--- a/output/wordlabs-ative-suffix-3day.pptx
+++ b/output/wordlabs-ative-suffix-3day.pptx
@@ -6057,7 +6057,7 @@
                 <a:ea typeface="Calibri" pitchFamily="34" charset="-122"/>
                 <a:cs typeface="Calibri" pitchFamily="34" charset="-120"/>
               </a:rPr>
-              <a:t>talkative</a:t>
+              <a:t>imaginative</a:t>
             </a:r>
             <a:pPr algn="l" indent="0" marL="0">
               <a:buNone/>
@@ -6071,7 +6071,7 @@
                 <a:ea typeface="Calibri" pitchFamily="34" charset="-122"/>
                 <a:cs typeface="Calibri" pitchFamily="34" charset="-120"/>
               </a:rPr>
-              <a:t> girl gave an </a:t>
+              <a:t> writer came up with a </a:t>
             </a:r>
             <a:pPr algn="l" indent="0" marL="0">
               <a:buNone/>
@@ -6088,7 +6088,7 @@
                 <a:ea typeface="Calibri" pitchFamily="34" charset="-122"/>
                 <a:cs typeface="Calibri" pitchFamily="34" charset="-120"/>
               </a:rPr>
-              <a:t>imaginative</a:t>
+              <a:t>narrative</a:t>
             </a:r>
             <a:pPr algn="l" indent="0" marL="0">
               <a:buNone/>
@@ -6102,7 +6102,7 @@
                 <a:ea typeface="Calibri" pitchFamily="34" charset="-122"/>
                 <a:cs typeface="Calibri" pitchFamily="34" charset="-120"/>
               </a:rPr>
-              <a:t> speech to the whole school.</a:t>
+              <a:t> that surprised everyone in the class.</a:t>
             </a:r>
             <a:endParaRPr lang="en-US" sz="1800" dirty="0"/>
           </a:p>
@@ -6257,7 +6257,7 @@
                 <a:ea typeface="Trebuchet MS" pitchFamily="34" charset="-122"/>
                 <a:cs typeface="Trebuchet MS" pitchFamily="34" charset="-120"/>
               </a:rPr>
-              <a:t>talkative</a:t>
+              <a:t>imaginative</a:t>
             </a:r>
             <a:endParaRPr lang="en-US" sz="1400" dirty="0"/>
           </a:p>
@@ -6385,7 +6385,7 @@
                 <a:ea typeface="Trebuchet MS" pitchFamily="34" charset="-122"/>
                 <a:cs typeface="Trebuchet MS" pitchFamily="34" charset="-120"/>
               </a:rPr>
-              <a:t>imaginative</a:t>
+              <a:t>narrative</a:t>
             </a:r>
             <a:endParaRPr lang="en-US" sz="1400" dirty="0"/>
           </a:p>
@@ -6855,7 +6855,7 @@
                 <a:ea typeface="Trebuchet MS" pitchFamily="34" charset="-122"/>
                 <a:cs typeface="Trebuchet MS" pitchFamily="34" charset="-120"/>
               </a:rPr>
-              <a:t>talkative</a:t>
+              <a:t>imaginative</a:t>
             </a:r>
             <a:endParaRPr lang="en-US" sz="2800" dirty="0"/>
           </a:p>
@@ -7682,7 +7682,7 @@
                 <a:ea typeface="Trebuchet MS" pitchFamily="34" charset="-122"/>
                 <a:cs typeface="Trebuchet MS" pitchFamily="34" charset="-120"/>
               </a:rPr>
-              <a:t>talkative</a:t>
+              <a:t>imaginative</a:t>
             </a:r>
             <a:endParaRPr lang="en-US" sz="2800" dirty="0"/>
           </a:p>
@@ -7821,7 +7821,7 @@
                 <a:ea typeface="Trebuchet MS" pitchFamily="34" charset="-122"/>
                 <a:cs typeface="Trebuchet MS" pitchFamily="34" charset="-120"/>
               </a:rPr>
-              <a:t>talk</a:t>
+              <a:t>imagin</a:t>
             </a:r>
             <a:endParaRPr lang="en-US" sz="1300" dirty="0"/>
           </a:p>
@@ -7860,7 +7860,7 @@
                 <a:ea typeface="Calibri" pitchFamily="34" charset="-122"/>
                 <a:cs typeface="Calibri" pitchFamily="34" charset="-120"/>
               </a:rPr>
-              <a:t>to speak</a:t>
+              <a:t>to form a mental image</a:t>
             </a:r>
             <a:endParaRPr lang="en-US" sz="850" dirty="0"/>
           </a:p>
@@ -7868,7 +7868,46 @@
       </p:sp>
       <p:sp>
         <p:nvSpPr>
-          <p:cNvPr id="19" name="Shape 17"/>
+          <p:cNvPr id="19" name="Text 17"/>
+          <p:cNvSpPr/>
+          <p:nvPr/>
+        </p:nvSpPr>
+        <p:spPr>
+          <a:xfrm>
+            <a:off x="2938272" y="2752344"/>
+            <a:ext cx="1828800" cy="182880"/>
+          </a:xfrm>
+          <a:prstGeom prst="rect">
+            <a:avLst/>
+          </a:prstGeom>
+          <a:noFill/>
+          <a:ln/>
+        </p:spPr>
+        <p:txBody>
+          <a:bodyPr wrap="square" lIns="0" tIns="0" rIns="0" bIns="0" rtlCol="0" anchor="t"/>
+          <a:lstStyle/>
+          <a:p>
+            <a:pPr algn="ctr" indent="0" marL="0">
+              <a:buNone/>
+            </a:pPr>
+            <a:r>
+              <a:rPr lang="en-US" sz="700" i="1" dirty="0">
+                <a:solidFill>
+                  <a:srgbClr val="94A3B8"/>
+                </a:solidFill>
+                <a:latin typeface="Calibri" pitchFamily="34" charset="0"/>
+                <a:ea typeface="Calibri" pitchFamily="34" charset="-122"/>
+                <a:cs typeface="Calibri" pitchFamily="34" charset="-120"/>
+              </a:rPr>
+              <a:t>'e' dropped before vowel suffix</a:t>
+            </a:r>
+            <a:endParaRPr lang="en-US" sz="700" dirty="0"/>
+          </a:p>
+        </p:txBody>
+      </p:sp>
+      <p:sp>
+        <p:nvSpPr>
+          <p:cNvPr id="20" name="Shape 18"/>
           <p:cNvSpPr/>
           <p:nvPr/>
         </p:nvSpPr>
@@ -7902,7 +7941,7 @@
       </p:sp>
       <p:sp>
         <p:nvSpPr>
-          <p:cNvPr id="20" name="Text 18"/>
+          <p:cNvPr id="21" name="Text 19"/>
           <p:cNvSpPr/>
           <p:nvPr/>
         </p:nvSpPr>
@@ -7941,7 +7980,7 @@
       </p:sp>
       <p:sp>
         <p:nvSpPr>
-          <p:cNvPr id="21" name="Text 19"/>
+          <p:cNvPr id="22" name="Text 20"/>
           <p:cNvSpPr/>
           <p:nvPr/>
         </p:nvSpPr>
@@ -7972,7 +8011,7 @@
                 <a:ea typeface="Calibri" pitchFamily="34" charset="-122"/>
                 <a:cs typeface="Calibri" pitchFamily="34" charset="-120"/>
               </a:rPr>
-              <a:t>tending to</a:t>
+              <a:t>tending to, relating to</a:t>
             </a:r>
             <a:endParaRPr lang="en-US" sz="850" dirty="0"/>
           </a:p>
@@ -7980,7 +8019,7 @@
       </p:sp>
       <p:sp>
         <p:nvSpPr>
-          <p:cNvPr id="22" name="Shape 20"/>
+          <p:cNvPr id="23" name="Shape 21"/>
           <p:cNvSpPr/>
           <p:nvPr/>
         </p:nvSpPr>
@@ -8007,7 +8046,7 @@
       </p:sp>
       <p:sp>
         <p:nvSpPr>
-          <p:cNvPr id="23" name="Text 21"/>
+          <p:cNvPr id="24" name="Text 22"/>
           <p:cNvSpPr/>
           <p:nvPr/>
         </p:nvSpPr>
@@ -8046,7 +8085,7 @@
       </p:sp>
       <p:sp>
         <p:nvSpPr>
-          <p:cNvPr id="24" name="Shape 22"/>
+          <p:cNvPr id="25" name="Shape 23"/>
           <p:cNvSpPr/>
           <p:nvPr/>
         </p:nvSpPr>
@@ -8073,7 +8112,7 @@
       </p:sp>
       <p:sp>
         <p:nvSpPr>
-          <p:cNvPr id="25" name="Text 23"/>
+          <p:cNvPr id="26" name="Text 24"/>
           <p:cNvSpPr/>
           <p:nvPr/>
         </p:nvSpPr>
@@ -8112,7 +8151,7 @@
       </p:sp>
       <p:sp>
         <p:nvSpPr>
-          <p:cNvPr id="26" name="Shape 24"/>
+          <p:cNvPr id="27" name="Shape 25"/>
           <p:cNvSpPr/>
           <p:nvPr/>
         </p:nvSpPr>
@@ -8139,7 +8178,7 @@
       </p:sp>
       <p:sp>
         <p:nvSpPr>
-          <p:cNvPr id="27" name="Text 25"/>
+          <p:cNvPr id="28" name="Text 26"/>
           <p:cNvSpPr/>
           <p:nvPr/>
         </p:nvSpPr>
@@ -8178,7 +8217,7 @@
       </p:sp>
       <p:sp>
         <p:nvSpPr>
-          <p:cNvPr id="28" name="Shape 26"/>
+          <p:cNvPr id="29" name="Shape 27"/>
           <p:cNvSpPr/>
           <p:nvPr/>
         </p:nvSpPr>
@@ -8205,7 +8244,7 @@
       </p:sp>
       <p:sp>
         <p:nvSpPr>
-          <p:cNvPr id="29" name="Text 27"/>
+          <p:cNvPr id="30" name="Text 28"/>
           <p:cNvSpPr/>
           <p:nvPr/>
         </p:nvSpPr>
@@ -8667,7 +8706,7 @@
                 <a:ea typeface="Trebuchet MS" pitchFamily="34" charset="-122"/>
                 <a:cs typeface="Trebuchet MS" pitchFamily="34" charset="-120"/>
               </a:rPr>
-              <a:t>talkative</a:t>
+              <a:t>imaginative</a:t>
             </a:r>
             <a:endParaRPr lang="en-US" sz="2800" dirty="0"/>
           </a:p>
@@ -8806,7 +8845,7 @@
                 <a:ea typeface="Trebuchet MS" pitchFamily="34" charset="-122"/>
                 <a:cs typeface="Trebuchet MS" pitchFamily="34" charset="-120"/>
               </a:rPr>
-              <a:t>talk</a:t>
+              <a:t>imagin</a:t>
             </a:r>
             <a:endParaRPr lang="en-US" sz="1300" dirty="0"/>
           </a:p>
@@ -8845,7 +8884,7 @@
                 <a:ea typeface="Calibri" pitchFamily="34" charset="-122"/>
                 <a:cs typeface="Calibri" pitchFamily="34" charset="-120"/>
               </a:rPr>
-              <a:t>to speak</a:t>
+              <a:t>to form a mental image</a:t>
             </a:r>
             <a:endParaRPr lang="en-US" sz="850" dirty="0"/>
           </a:p>
@@ -8853,7 +8892,46 @@
       </p:sp>
       <p:sp>
         <p:nvSpPr>
-          <p:cNvPr id="19" name="Shape 17"/>
+          <p:cNvPr id="19" name="Text 17"/>
+          <p:cNvSpPr/>
+          <p:nvPr/>
+        </p:nvSpPr>
+        <p:spPr>
+          <a:xfrm>
+            <a:off x="2938272" y="2752344"/>
+            <a:ext cx="1828800" cy="182880"/>
+          </a:xfrm>
+          <a:prstGeom prst="rect">
+            <a:avLst/>
+          </a:prstGeom>
+          <a:noFill/>
+          <a:ln/>
+        </p:spPr>
+        <p:txBody>
+          <a:bodyPr wrap="square" lIns="0" tIns="0" rIns="0" bIns="0" rtlCol="0" anchor="t"/>
+          <a:lstStyle/>
+          <a:p>
+            <a:pPr algn="ctr" indent="0" marL="0">
+              <a:buNone/>
+            </a:pPr>
+            <a:r>
+              <a:rPr lang="en-US" sz="700" i="1" dirty="0">
+                <a:solidFill>
+                  <a:srgbClr val="94A3B8"/>
+                </a:solidFill>
+                <a:latin typeface="Calibri" pitchFamily="34" charset="0"/>
+                <a:ea typeface="Calibri" pitchFamily="34" charset="-122"/>
+                <a:cs typeface="Calibri" pitchFamily="34" charset="-120"/>
+              </a:rPr>
+              <a:t>'e' dropped before vowel suffix</a:t>
+            </a:r>
+            <a:endParaRPr lang="en-US" sz="700" dirty="0"/>
+          </a:p>
+        </p:txBody>
+      </p:sp>
+      <p:sp>
+        <p:nvSpPr>
+          <p:cNvPr id="20" name="Shape 18"/>
           <p:cNvSpPr/>
           <p:nvPr/>
         </p:nvSpPr>
@@ -8887,7 +8965,7 @@
       </p:sp>
       <p:sp>
         <p:nvSpPr>
-          <p:cNvPr id="20" name="Text 18"/>
+          <p:cNvPr id="21" name="Text 19"/>
           <p:cNvSpPr/>
           <p:nvPr/>
         </p:nvSpPr>
@@ -8926,7 +9004,7 @@
       </p:sp>
       <p:sp>
         <p:nvSpPr>
-          <p:cNvPr id="21" name="Text 19"/>
+          <p:cNvPr id="22" name="Text 20"/>
           <p:cNvSpPr/>
           <p:nvPr/>
         </p:nvSpPr>
@@ -8957,7 +9035,7 @@
                 <a:ea typeface="Calibri" pitchFamily="34" charset="-122"/>
                 <a:cs typeface="Calibri" pitchFamily="34" charset="-120"/>
               </a:rPr>
-              <a:t>tending to</a:t>
+              <a:t>tending to, relating to</a:t>
             </a:r>
             <a:endParaRPr lang="en-US" sz="850" dirty="0"/>
           </a:p>
@@ -8965,7 +9043,7 @@
       </p:sp>
       <p:sp>
         <p:nvSpPr>
-          <p:cNvPr id="22" name="Shape 20"/>
+          <p:cNvPr id="23" name="Shape 21"/>
           <p:cNvSpPr/>
           <p:nvPr/>
         </p:nvSpPr>
@@ -8992,7 +9070,7 @@
       </p:sp>
       <p:sp>
         <p:nvSpPr>
-          <p:cNvPr id="23" name="Text 21"/>
+          <p:cNvPr id="24" name="Text 22"/>
           <p:cNvSpPr/>
           <p:nvPr/>
         </p:nvSpPr>
@@ -9031,7 +9109,7 @@
       </p:sp>
       <p:sp>
         <p:nvSpPr>
-          <p:cNvPr id="24" name="Shape 22"/>
+          <p:cNvPr id="25" name="Shape 23"/>
           <p:cNvSpPr/>
           <p:nvPr/>
         </p:nvSpPr>
@@ -9058,14 +9136,14 @@
       </p:sp>
       <p:sp>
         <p:nvSpPr>
-          <p:cNvPr id="25" name="Shape 23"/>
-          <p:cNvSpPr/>
-          <p:nvPr/>
-        </p:nvSpPr>
-        <p:spPr>
-          <a:xfrm>
-            <a:off x="2313432" y="3364992"/>
-            <a:ext cx="1645920" cy="475488"/>
+          <p:cNvPr id="26" name="Shape 24"/>
+          <p:cNvSpPr/>
+          <p:nvPr/>
+        </p:nvSpPr>
+        <p:spPr>
+          <a:xfrm>
+            <a:off x="1978152" y="3364992"/>
+            <a:ext cx="1225296" cy="475488"/>
           </a:xfrm>
           <a:prstGeom prst="rect">
             <a:avLst>
@@ -9085,14 +9163,14 @@
       </p:sp>
       <p:sp>
         <p:nvSpPr>
-          <p:cNvPr id="26" name="Text 24"/>
-          <p:cNvSpPr/>
-          <p:nvPr/>
-        </p:nvSpPr>
-        <p:spPr>
-          <a:xfrm>
-            <a:off x="2313432" y="3364992"/>
-            <a:ext cx="1645920" cy="475488"/>
+          <p:cNvPr id="27" name="Text 25"/>
+          <p:cNvSpPr/>
+          <p:nvPr/>
+        </p:nvSpPr>
+        <p:spPr>
+          <a:xfrm>
+            <a:off x="1978152" y="3364992"/>
+            <a:ext cx="1225296" cy="475488"/>
           </a:xfrm>
           <a:prstGeom prst="rect">
             <a:avLst/>
@@ -9116,7 +9194,7 @@
                 <a:ea typeface="Trebuchet MS" pitchFamily="34" charset="-122"/>
                 <a:cs typeface="Trebuchet MS" pitchFamily="34" charset="-120"/>
               </a:rPr>
-              <a:t>talk</a:t>
+              <a:t>i</a:t>
             </a:r>
             <a:endParaRPr lang="en-US" sz="1400" dirty="0"/>
           </a:p>
@@ -9124,14 +9202,14 @@
       </p:sp>
       <p:sp>
         <p:nvSpPr>
-          <p:cNvPr id="27" name="Text 25"/>
-          <p:cNvSpPr/>
-          <p:nvPr/>
-        </p:nvSpPr>
-        <p:spPr>
-          <a:xfrm>
-            <a:off x="3959352" y="3364992"/>
-            <a:ext cx="411480" cy="475488"/>
+          <p:cNvPr id="28" name="Text 26"/>
+          <p:cNvSpPr/>
+          <p:nvPr/>
+        </p:nvSpPr>
+        <p:spPr>
+          <a:xfrm>
+            <a:off x="3203448" y="3364992"/>
+            <a:ext cx="76200" cy="475488"/>
           </a:xfrm>
           <a:prstGeom prst="rect">
             <a:avLst/>
@@ -9163,14 +9241,14 @@
       </p:sp>
       <p:sp>
         <p:nvSpPr>
-          <p:cNvPr id="28" name="Shape 26"/>
-          <p:cNvSpPr/>
-          <p:nvPr/>
-        </p:nvSpPr>
-        <p:spPr>
-          <a:xfrm>
-            <a:off x="4370832" y="3364992"/>
-            <a:ext cx="1645920" cy="475488"/>
+          <p:cNvPr id="29" name="Shape 27"/>
+          <p:cNvSpPr/>
+          <p:nvPr/>
+        </p:nvSpPr>
+        <p:spPr>
+          <a:xfrm>
+            <a:off x="3279648" y="3364992"/>
+            <a:ext cx="1225296" cy="475488"/>
           </a:xfrm>
           <a:prstGeom prst="rect">
             <a:avLst>
@@ -9190,14 +9268,14 @@
       </p:sp>
       <p:sp>
         <p:nvSpPr>
-          <p:cNvPr id="29" name="Text 27"/>
-          <p:cNvSpPr/>
-          <p:nvPr/>
-        </p:nvSpPr>
-        <p:spPr>
-          <a:xfrm>
-            <a:off x="4370832" y="3364992"/>
-            <a:ext cx="1645920" cy="475488"/>
+          <p:cNvPr id="30" name="Text 28"/>
+          <p:cNvSpPr/>
+          <p:nvPr/>
+        </p:nvSpPr>
+        <p:spPr>
+          <a:xfrm>
+            <a:off x="3279648" y="3364992"/>
+            <a:ext cx="1225296" cy="475488"/>
           </a:xfrm>
           <a:prstGeom prst="rect">
             <a:avLst/>
@@ -9221,7 +9299,7 @@
                 <a:ea typeface="Trebuchet MS" pitchFamily="34" charset="-122"/>
                 <a:cs typeface="Trebuchet MS" pitchFamily="34" charset="-120"/>
               </a:rPr>
-              <a:t>a</a:t>
+              <a:t>mag</a:t>
             </a:r>
             <a:endParaRPr lang="en-US" sz="1400" dirty="0"/>
           </a:p>
@@ -9229,14 +9307,14 @@
       </p:sp>
       <p:sp>
         <p:nvSpPr>
-          <p:cNvPr id="30" name="Text 28"/>
-          <p:cNvSpPr/>
-          <p:nvPr/>
-        </p:nvSpPr>
-        <p:spPr>
-          <a:xfrm>
-            <a:off x="6016752" y="3364992"/>
-            <a:ext cx="411480" cy="475488"/>
+          <p:cNvPr id="31" name="Text 29"/>
+          <p:cNvSpPr/>
+          <p:nvPr/>
+        </p:nvSpPr>
+        <p:spPr>
+          <a:xfrm>
+            <a:off x="4504944" y="3364992"/>
+            <a:ext cx="76200" cy="475488"/>
           </a:xfrm>
           <a:prstGeom prst="rect">
             <a:avLst/>
@@ -9268,14 +9346,14 @@
       </p:sp>
       <p:sp>
         <p:nvSpPr>
-          <p:cNvPr id="31" name="Shape 29"/>
-          <p:cNvSpPr/>
-          <p:nvPr/>
-        </p:nvSpPr>
-        <p:spPr>
-          <a:xfrm>
-            <a:off x="6428232" y="3364992"/>
-            <a:ext cx="1645920" cy="475488"/>
+          <p:cNvPr id="32" name="Shape 30"/>
+          <p:cNvSpPr/>
+          <p:nvPr/>
+        </p:nvSpPr>
+        <p:spPr>
+          <a:xfrm>
+            <a:off x="4581144" y="3364992"/>
+            <a:ext cx="1225296" cy="475488"/>
           </a:xfrm>
           <a:prstGeom prst="rect">
             <a:avLst>
@@ -9295,14 +9373,14 @@
       </p:sp>
       <p:sp>
         <p:nvSpPr>
-          <p:cNvPr id="32" name="Text 30"/>
-          <p:cNvSpPr/>
-          <p:nvPr/>
-        </p:nvSpPr>
-        <p:spPr>
-          <a:xfrm>
-            <a:off x="6428232" y="3364992"/>
-            <a:ext cx="1645920" cy="475488"/>
+          <p:cNvPr id="33" name="Text 31"/>
+          <p:cNvSpPr/>
+          <p:nvPr/>
+        </p:nvSpPr>
+        <p:spPr>
+          <a:xfrm>
+            <a:off x="4581144" y="3364992"/>
+            <a:ext cx="1225296" cy="475488"/>
           </a:xfrm>
           <a:prstGeom prst="rect">
             <a:avLst/>
@@ -9326,6 +9404,216 @@
                 <a:ea typeface="Trebuchet MS" pitchFamily="34" charset="-122"/>
                 <a:cs typeface="Trebuchet MS" pitchFamily="34" charset="-120"/>
               </a:rPr>
+              <a:t>in</a:t>
+            </a:r>
+            <a:endParaRPr lang="en-US" sz="1400" dirty="0"/>
+          </a:p>
+        </p:txBody>
+      </p:sp>
+      <p:sp>
+        <p:nvSpPr>
+          <p:cNvPr id="34" name="Text 32"/>
+          <p:cNvSpPr/>
+          <p:nvPr/>
+        </p:nvSpPr>
+        <p:spPr>
+          <a:xfrm>
+            <a:off x="5806440" y="3364992"/>
+            <a:ext cx="76200" cy="475488"/>
+          </a:xfrm>
+          <a:prstGeom prst="rect">
+            <a:avLst/>
+          </a:prstGeom>
+          <a:noFill/>
+          <a:ln/>
+        </p:spPr>
+        <p:txBody>
+          <a:bodyPr wrap="square" lIns="0" tIns="0" rIns="0" bIns="0" rtlCol="0" anchor="ctr"/>
+          <a:lstStyle/>
+          <a:p>
+            <a:pPr algn="ctr" indent="0" marL="0">
+              <a:buNone/>
+            </a:pPr>
+            <a:r>
+              <a:rPr lang="en-US" sz="1600" b="1" dirty="0">
+                <a:solidFill>
+                  <a:srgbClr val="0D9488"/>
+                </a:solidFill>
+                <a:latin typeface="Trebuchet MS" pitchFamily="34" charset="0"/>
+                <a:ea typeface="Trebuchet MS" pitchFamily="34" charset="-122"/>
+                <a:cs typeface="Trebuchet MS" pitchFamily="34" charset="-120"/>
+              </a:rPr>
+              <a:t>·</a:t>
+            </a:r>
+            <a:endParaRPr lang="en-US" sz="1600" dirty="0"/>
+          </a:p>
+        </p:txBody>
+      </p:sp>
+      <p:sp>
+        <p:nvSpPr>
+          <p:cNvPr id="35" name="Shape 33"/>
+          <p:cNvSpPr/>
+          <p:nvPr/>
+        </p:nvSpPr>
+        <p:spPr>
+          <a:xfrm>
+            <a:off x="5882640" y="3364992"/>
+            <a:ext cx="1225296" cy="475488"/>
+          </a:xfrm>
+          <a:prstGeom prst="rect">
+            <a:avLst>
+              <a:gd name="adj" fmla="val 9615"/>
+            </a:avLst>
+          </a:prstGeom>
+          <a:solidFill>
+            <a:srgbClr val="FFFFFF"/>
+          </a:solidFill>
+          <a:ln w="12700">
+            <a:solidFill>
+              <a:srgbClr val="0D9488"/>
+            </a:solidFill>
+            <a:prstDash val="solid"/>
+          </a:ln>
+        </p:spPr>
+      </p:sp>
+      <p:sp>
+        <p:nvSpPr>
+          <p:cNvPr id="36" name="Text 34"/>
+          <p:cNvSpPr/>
+          <p:nvPr/>
+        </p:nvSpPr>
+        <p:spPr>
+          <a:xfrm>
+            <a:off x="5882640" y="3364992"/>
+            <a:ext cx="1225296" cy="475488"/>
+          </a:xfrm>
+          <a:prstGeom prst="rect">
+            <a:avLst/>
+          </a:prstGeom>
+          <a:noFill/>
+          <a:ln/>
+        </p:spPr>
+        <p:txBody>
+          <a:bodyPr wrap="square" lIns="0" tIns="0" rIns="0" bIns="0" rtlCol="0" anchor="ctr"/>
+          <a:lstStyle/>
+          <a:p>
+            <a:pPr algn="ctr" indent="0" marL="0">
+              <a:buNone/>
+            </a:pPr>
+            <a:r>
+              <a:rPr lang="en-US" sz="1400" b="1" dirty="0">
+                <a:solidFill>
+                  <a:srgbClr val="0D9488"/>
+                </a:solidFill>
+                <a:latin typeface="Trebuchet MS" pitchFamily="34" charset="0"/>
+                <a:ea typeface="Trebuchet MS" pitchFamily="34" charset="-122"/>
+                <a:cs typeface="Trebuchet MS" pitchFamily="34" charset="-120"/>
+              </a:rPr>
+              <a:t>a</a:t>
+            </a:r>
+            <a:endParaRPr lang="en-US" sz="1400" dirty="0"/>
+          </a:p>
+        </p:txBody>
+      </p:sp>
+      <p:sp>
+        <p:nvSpPr>
+          <p:cNvPr id="37" name="Text 35"/>
+          <p:cNvSpPr/>
+          <p:nvPr/>
+        </p:nvSpPr>
+        <p:spPr>
+          <a:xfrm>
+            <a:off x="7107936" y="3364992"/>
+            <a:ext cx="76200" cy="475488"/>
+          </a:xfrm>
+          <a:prstGeom prst="rect">
+            <a:avLst/>
+          </a:prstGeom>
+          <a:noFill/>
+          <a:ln/>
+        </p:spPr>
+        <p:txBody>
+          <a:bodyPr wrap="square" lIns="0" tIns="0" rIns="0" bIns="0" rtlCol="0" anchor="ctr"/>
+          <a:lstStyle/>
+          <a:p>
+            <a:pPr algn="ctr" indent="0" marL="0">
+              <a:buNone/>
+            </a:pPr>
+            <a:r>
+              <a:rPr lang="en-US" sz="1600" b="1" dirty="0">
+                <a:solidFill>
+                  <a:srgbClr val="0D9488"/>
+                </a:solidFill>
+                <a:latin typeface="Trebuchet MS" pitchFamily="34" charset="0"/>
+                <a:ea typeface="Trebuchet MS" pitchFamily="34" charset="-122"/>
+                <a:cs typeface="Trebuchet MS" pitchFamily="34" charset="-120"/>
+              </a:rPr>
+              <a:t>·</a:t>
+            </a:r>
+            <a:endParaRPr lang="en-US" sz="1600" dirty="0"/>
+          </a:p>
+        </p:txBody>
+      </p:sp>
+      <p:sp>
+        <p:nvSpPr>
+          <p:cNvPr id="38" name="Shape 36"/>
+          <p:cNvSpPr/>
+          <p:nvPr/>
+        </p:nvSpPr>
+        <p:spPr>
+          <a:xfrm>
+            <a:off x="7184136" y="3364992"/>
+            <a:ext cx="1225296" cy="475488"/>
+          </a:xfrm>
+          <a:prstGeom prst="rect">
+            <a:avLst>
+              <a:gd name="adj" fmla="val 9615"/>
+            </a:avLst>
+          </a:prstGeom>
+          <a:solidFill>
+            <a:srgbClr val="FFFFFF"/>
+          </a:solidFill>
+          <a:ln w="12700">
+            <a:solidFill>
+              <a:srgbClr val="0D9488"/>
+            </a:solidFill>
+            <a:prstDash val="solid"/>
+          </a:ln>
+        </p:spPr>
+      </p:sp>
+      <p:sp>
+        <p:nvSpPr>
+          <p:cNvPr id="39" name="Text 37"/>
+          <p:cNvSpPr/>
+          <p:nvPr/>
+        </p:nvSpPr>
+        <p:spPr>
+          <a:xfrm>
+            <a:off x="7184136" y="3364992"/>
+            <a:ext cx="1225296" cy="475488"/>
+          </a:xfrm>
+          <a:prstGeom prst="rect">
+            <a:avLst/>
+          </a:prstGeom>
+          <a:noFill/>
+          <a:ln/>
+        </p:spPr>
+        <p:txBody>
+          <a:bodyPr wrap="square" lIns="0" tIns="0" rIns="0" bIns="0" rtlCol="0" anchor="ctr"/>
+          <a:lstStyle/>
+          <a:p>
+            <a:pPr algn="ctr" indent="0" marL="0">
+              <a:buNone/>
+            </a:pPr>
+            <a:r>
+              <a:rPr lang="en-US" sz="1400" b="1" dirty="0">
+                <a:solidFill>
+                  <a:srgbClr val="0D9488"/>
+                </a:solidFill>
+                <a:latin typeface="Trebuchet MS" pitchFamily="34" charset="0"/>
+                <a:ea typeface="Trebuchet MS" pitchFamily="34" charset="-122"/>
+                <a:cs typeface="Trebuchet MS" pitchFamily="34" charset="-120"/>
+              </a:rPr>
               <a:t>tive</a:t>
             </a:r>
             <a:endParaRPr lang="en-US" sz="1400" dirty="0"/>
@@ -9334,7 +9622,7 @@
       </p:sp>
       <p:sp>
         <p:nvSpPr>
-          <p:cNvPr id="33" name="Shape 31"/>
+          <p:cNvPr id="40" name="Shape 38"/>
           <p:cNvSpPr/>
           <p:nvPr/>
         </p:nvSpPr>
@@ -9361,7 +9649,7 @@
       </p:sp>
       <p:sp>
         <p:nvSpPr>
-          <p:cNvPr id="34" name="Text 32"/>
+          <p:cNvPr id="41" name="Text 39"/>
           <p:cNvSpPr/>
           <p:nvPr/>
         </p:nvSpPr>
@@ -9400,7 +9688,7 @@
       </p:sp>
       <p:sp>
         <p:nvSpPr>
-          <p:cNvPr id="35" name="Shape 33"/>
+          <p:cNvPr id="42" name="Shape 40"/>
           <p:cNvSpPr/>
           <p:nvPr/>
         </p:nvSpPr>
@@ -9427,7 +9715,7 @@
       </p:sp>
       <p:sp>
         <p:nvSpPr>
-          <p:cNvPr id="36" name="Text 34"/>
+          <p:cNvPr id="43" name="Text 41"/>
           <p:cNvSpPr/>
           <p:nvPr/>
         </p:nvSpPr>
@@ -9889,7 +10177,7 @@
                 <a:ea typeface="Trebuchet MS" pitchFamily="34" charset="-122"/>
                 <a:cs typeface="Trebuchet MS" pitchFamily="34" charset="-120"/>
               </a:rPr>
-              <a:t>talkative</a:t>
+              <a:t>imaginative</a:t>
             </a:r>
             <a:endParaRPr lang="en-US" sz="2800" dirty="0"/>
           </a:p>
@@ -10028,7 +10316,7 @@
                 <a:ea typeface="Trebuchet MS" pitchFamily="34" charset="-122"/>
                 <a:cs typeface="Trebuchet MS" pitchFamily="34" charset="-120"/>
               </a:rPr>
-              <a:t>talk</a:t>
+              <a:t>imagin</a:t>
             </a:r>
             <a:endParaRPr lang="en-US" sz="1300" dirty="0"/>
           </a:p>
@@ -10067,7 +10355,7 @@
                 <a:ea typeface="Calibri" pitchFamily="34" charset="-122"/>
                 <a:cs typeface="Calibri" pitchFamily="34" charset="-120"/>
               </a:rPr>
-              <a:t>to speak</a:t>
+              <a:t>to form a mental image</a:t>
             </a:r>
             <a:endParaRPr lang="en-US" sz="850" dirty="0"/>
           </a:p>
@@ -10075,7 +10363,46 @@
       </p:sp>
       <p:sp>
         <p:nvSpPr>
-          <p:cNvPr id="19" name="Shape 17"/>
+          <p:cNvPr id="19" name="Text 17"/>
+          <p:cNvSpPr/>
+          <p:nvPr/>
+        </p:nvSpPr>
+        <p:spPr>
+          <a:xfrm>
+            <a:off x="2938272" y="2752344"/>
+            <a:ext cx="1828800" cy="182880"/>
+          </a:xfrm>
+          <a:prstGeom prst="rect">
+            <a:avLst/>
+          </a:prstGeom>
+          <a:noFill/>
+          <a:ln/>
+        </p:spPr>
+        <p:txBody>
+          <a:bodyPr wrap="square" lIns="0" tIns="0" rIns="0" bIns="0" rtlCol="0" anchor="t"/>
+          <a:lstStyle/>
+          <a:p>
+            <a:pPr algn="ctr" indent="0" marL="0">
+              <a:buNone/>
+            </a:pPr>
+            <a:r>
+              <a:rPr lang="en-US" sz="700" i="1" dirty="0">
+                <a:solidFill>
+                  <a:srgbClr val="94A3B8"/>
+                </a:solidFill>
+                <a:latin typeface="Calibri" pitchFamily="34" charset="0"/>
+                <a:ea typeface="Calibri" pitchFamily="34" charset="-122"/>
+                <a:cs typeface="Calibri" pitchFamily="34" charset="-120"/>
+              </a:rPr>
+              <a:t>'e' dropped before vowel suffix</a:t>
+            </a:r>
+            <a:endParaRPr lang="en-US" sz="700" dirty="0"/>
+          </a:p>
+        </p:txBody>
+      </p:sp>
+      <p:sp>
+        <p:nvSpPr>
+          <p:cNvPr id="20" name="Shape 18"/>
           <p:cNvSpPr/>
           <p:nvPr/>
         </p:nvSpPr>
@@ -10109,7 +10436,7 @@
       </p:sp>
       <p:sp>
         <p:nvSpPr>
-          <p:cNvPr id="20" name="Text 18"/>
+          <p:cNvPr id="21" name="Text 19"/>
           <p:cNvSpPr/>
           <p:nvPr/>
         </p:nvSpPr>
@@ -10148,7 +10475,7 @@
       </p:sp>
       <p:sp>
         <p:nvSpPr>
-          <p:cNvPr id="21" name="Text 19"/>
+          <p:cNvPr id="22" name="Text 20"/>
           <p:cNvSpPr/>
           <p:nvPr/>
         </p:nvSpPr>
@@ -10179,7 +10506,7 @@
                 <a:ea typeface="Calibri" pitchFamily="34" charset="-122"/>
                 <a:cs typeface="Calibri" pitchFamily="34" charset="-120"/>
               </a:rPr>
-              <a:t>tending to</a:t>
+              <a:t>tending to, relating to</a:t>
             </a:r>
             <a:endParaRPr lang="en-US" sz="850" dirty="0"/>
           </a:p>
@@ -10187,7 +10514,7 @@
       </p:sp>
       <p:sp>
         <p:nvSpPr>
-          <p:cNvPr id="22" name="Shape 20"/>
+          <p:cNvPr id="23" name="Shape 21"/>
           <p:cNvSpPr/>
           <p:nvPr/>
         </p:nvSpPr>
@@ -10214,7 +10541,7 @@
       </p:sp>
       <p:sp>
         <p:nvSpPr>
-          <p:cNvPr id="23" name="Text 21"/>
+          <p:cNvPr id="24" name="Text 22"/>
           <p:cNvSpPr/>
           <p:nvPr/>
         </p:nvSpPr>
@@ -10253,7 +10580,7 @@
       </p:sp>
       <p:sp>
         <p:nvSpPr>
-          <p:cNvPr id="24" name="Shape 22"/>
+          <p:cNvPr id="25" name="Shape 23"/>
           <p:cNvSpPr/>
           <p:nvPr/>
         </p:nvSpPr>
@@ -10280,14 +10607,14 @@
       </p:sp>
       <p:sp>
         <p:nvSpPr>
-          <p:cNvPr id="25" name="Shape 23"/>
-          <p:cNvSpPr/>
-          <p:nvPr/>
-        </p:nvSpPr>
-        <p:spPr>
-          <a:xfrm>
-            <a:off x="2313432" y="3364992"/>
-            <a:ext cx="1645920" cy="475488"/>
+          <p:cNvPr id="26" name="Shape 24"/>
+          <p:cNvSpPr/>
+          <p:nvPr/>
+        </p:nvSpPr>
+        <p:spPr>
+          <a:xfrm>
+            <a:off x="1978152" y="3364992"/>
+            <a:ext cx="1225296" cy="475488"/>
           </a:xfrm>
           <a:prstGeom prst="rect">
             <a:avLst>
@@ -10307,14 +10634,14 @@
       </p:sp>
       <p:sp>
         <p:nvSpPr>
-          <p:cNvPr id="26" name="Text 24"/>
-          <p:cNvSpPr/>
-          <p:nvPr/>
-        </p:nvSpPr>
-        <p:spPr>
-          <a:xfrm>
-            <a:off x="2313432" y="3364992"/>
-            <a:ext cx="1645920" cy="475488"/>
+          <p:cNvPr id="27" name="Text 25"/>
+          <p:cNvSpPr/>
+          <p:nvPr/>
+        </p:nvSpPr>
+        <p:spPr>
+          <a:xfrm>
+            <a:off x="1978152" y="3364992"/>
+            <a:ext cx="1225296" cy="475488"/>
           </a:xfrm>
           <a:prstGeom prst="rect">
             <a:avLst/>
@@ -10338,7 +10665,7 @@
                 <a:ea typeface="Trebuchet MS" pitchFamily="34" charset="-122"/>
                 <a:cs typeface="Trebuchet MS" pitchFamily="34" charset="-120"/>
               </a:rPr>
-              <a:t>talk</a:t>
+              <a:t>i</a:t>
             </a:r>
             <a:endParaRPr lang="en-US" sz="1400" dirty="0"/>
           </a:p>
@@ -10346,14 +10673,14 @@
       </p:sp>
       <p:sp>
         <p:nvSpPr>
-          <p:cNvPr id="27" name="Text 25"/>
-          <p:cNvSpPr/>
-          <p:nvPr/>
-        </p:nvSpPr>
-        <p:spPr>
-          <a:xfrm>
-            <a:off x="3959352" y="3364992"/>
-            <a:ext cx="411480" cy="475488"/>
+          <p:cNvPr id="28" name="Text 26"/>
+          <p:cNvSpPr/>
+          <p:nvPr/>
+        </p:nvSpPr>
+        <p:spPr>
+          <a:xfrm>
+            <a:off x="3203448" y="3364992"/>
+            <a:ext cx="76200" cy="475488"/>
           </a:xfrm>
           <a:prstGeom prst="rect">
             <a:avLst/>
@@ -10385,14 +10712,14 @@
       </p:sp>
       <p:sp>
         <p:nvSpPr>
-          <p:cNvPr id="28" name="Shape 26"/>
-          <p:cNvSpPr/>
-          <p:nvPr/>
-        </p:nvSpPr>
-        <p:spPr>
-          <a:xfrm>
-            <a:off x="4370832" y="3364992"/>
-            <a:ext cx="1645920" cy="475488"/>
+          <p:cNvPr id="29" name="Shape 27"/>
+          <p:cNvSpPr/>
+          <p:nvPr/>
+        </p:nvSpPr>
+        <p:spPr>
+          <a:xfrm>
+            <a:off x="3279648" y="3364992"/>
+            <a:ext cx="1225296" cy="475488"/>
           </a:xfrm>
           <a:prstGeom prst="rect">
             <a:avLst>
@@ -10412,14 +10739,14 @@
       </p:sp>
       <p:sp>
         <p:nvSpPr>
-          <p:cNvPr id="29" name="Text 27"/>
-          <p:cNvSpPr/>
-          <p:nvPr/>
-        </p:nvSpPr>
-        <p:spPr>
-          <a:xfrm>
-            <a:off x="4370832" y="3364992"/>
-            <a:ext cx="1645920" cy="475488"/>
+          <p:cNvPr id="30" name="Text 28"/>
+          <p:cNvSpPr/>
+          <p:nvPr/>
+        </p:nvSpPr>
+        <p:spPr>
+          <a:xfrm>
+            <a:off x="3279648" y="3364992"/>
+            <a:ext cx="1225296" cy="475488"/>
           </a:xfrm>
           <a:prstGeom prst="rect">
             <a:avLst/>
@@ -10443,7 +10770,7 @@
                 <a:ea typeface="Trebuchet MS" pitchFamily="34" charset="-122"/>
                 <a:cs typeface="Trebuchet MS" pitchFamily="34" charset="-120"/>
               </a:rPr>
-              <a:t>a</a:t>
+              <a:t>mag</a:t>
             </a:r>
             <a:endParaRPr lang="en-US" sz="1400" dirty="0"/>
           </a:p>
@@ -10451,14 +10778,14 @@
       </p:sp>
       <p:sp>
         <p:nvSpPr>
-          <p:cNvPr id="30" name="Text 28"/>
-          <p:cNvSpPr/>
-          <p:nvPr/>
-        </p:nvSpPr>
-        <p:spPr>
-          <a:xfrm>
-            <a:off x="6016752" y="3364992"/>
-            <a:ext cx="411480" cy="475488"/>
+          <p:cNvPr id="31" name="Text 29"/>
+          <p:cNvSpPr/>
+          <p:nvPr/>
+        </p:nvSpPr>
+        <p:spPr>
+          <a:xfrm>
+            <a:off x="4504944" y="3364992"/>
+            <a:ext cx="76200" cy="475488"/>
           </a:xfrm>
           <a:prstGeom prst="rect">
             <a:avLst/>
@@ -10490,14 +10817,14 @@
       </p:sp>
       <p:sp>
         <p:nvSpPr>
-          <p:cNvPr id="31" name="Shape 29"/>
-          <p:cNvSpPr/>
-          <p:nvPr/>
-        </p:nvSpPr>
-        <p:spPr>
-          <a:xfrm>
-            <a:off x="6428232" y="3364992"/>
-            <a:ext cx="1645920" cy="475488"/>
+          <p:cNvPr id="32" name="Shape 30"/>
+          <p:cNvSpPr/>
+          <p:nvPr/>
+        </p:nvSpPr>
+        <p:spPr>
+          <a:xfrm>
+            <a:off x="4581144" y="3364992"/>
+            <a:ext cx="1225296" cy="475488"/>
           </a:xfrm>
           <a:prstGeom prst="rect">
             <a:avLst>
@@ -10517,14 +10844,14 @@
       </p:sp>
       <p:sp>
         <p:nvSpPr>
-          <p:cNvPr id="32" name="Text 30"/>
-          <p:cNvSpPr/>
-          <p:nvPr/>
-        </p:nvSpPr>
-        <p:spPr>
-          <a:xfrm>
-            <a:off x="6428232" y="3364992"/>
-            <a:ext cx="1645920" cy="475488"/>
+          <p:cNvPr id="33" name="Text 31"/>
+          <p:cNvSpPr/>
+          <p:nvPr/>
+        </p:nvSpPr>
+        <p:spPr>
+          <a:xfrm>
+            <a:off x="4581144" y="3364992"/>
+            <a:ext cx="1225296" cy="475488"/>
           </a:xfrm>
           <a:prstGeom prst="rect">
             <a:avLst/>
@@ -10548,6 +10875,216 @@
                 <a:ea typeface="Trebuchet MS" pitchFamily="34" charset="-122"/>
                 <a:cs typeface="Trebuchet MS" pitchFamily="34" charset="-120"/>
               </a:rPr>
+              <a:t>in</a:t>
+            </a:r>
+            <a:endParaRPr lang="en-US" sz="1400" dirty="0"/>
+          </a:p>
+        </p:txBody>
+      </p:sp>
+      <p:sp>
+        <p:nvSpPr>
+          <p:cNvPr id="34" name="Text 32"/>
+          <p:cNvSpPr/>
+          <p:nvPr/>
+        </p:nvSpPr>
+        <p:spPr>
+          <a:xfrm>
+            <a:off x="5806440" y="3364992"/>
+            <a:ext cx="76200" cy="475488"/>
+          </a:xfrm>
+          <a:prstGeom prst="rect">
+            <a:avLst/>
+          </a:prstGeom>
+          <a:noFill/>
+          <a:ln/>
+        </p:spPr>
+        <p:txBody>
+          <a:bodyPr wrap="square" lIns="0" tIns="0" rIns="0" bIns="0" rtlCol="0" anchor="ctr"/>
+          <a:lstStyle/>
+          <a:p>
+            <a:pPr algn="ctr" indent="0" marL="0">
+              <a:buNone/>
+            </a:pPr>
+            <a:r>
+              <a:rPr lang="en-US" sz="1600" b="1" dirty="0">
+                <a:solidFill>
+                  <a:srgbClr val="0D9488"/>
+                </a:solidFill>
+                <a:latin typeface="Trebuchet MS" pitchFamily="34" charset="0"/>
+                <a:ea typeface="Trebuchet MS" pitchFamily="34" charset="-122"/>
+                <a:cs typeface="Trebuchet MS" pitchFamily="34" charset="-120"/>
+              </a:rPr>
+              <a:t>·</a:t>
+            </a:r>
+            <a:endParaRPr lang="en-US" sz="1600" dirty="0"/>
+          </a:p>
+        </p:txBody>
+      </p:sp>
+      <p:sp>
+        <p:nvSpPr>
+          <p:cNvPr id="35" name="Shape 33"/>
+          <p:cNvSpPr/>
+          <p:nvPr/>
+        </p:nvSpPr>
+        <p:spPr>
+          <a:xfrm>
+            <a:off x="5882640" y="3364992"/>
+            <a:ext cx="1225296" cy="475488"/>
+          </a:xfrm>
+          <a:prstGeom prst="rect">
+            <a:avLst>
+              <a:gd name="adj" fmla="val 9615"/>
+            </a:avLst>
+          </a:prstGeom>
+          <a:solidFill>
+            <a:srgbClr val="FFFFFF"/>
+          </a:solidFill>
+          <a:ln w="12700">
+            <a:solidFill>
+              <a:srgbClr val="0D9488"/>
+            </a:solidFill>
+            <a:prstDash val="solid"/>
+          </a:ln>
+        </p:spPr>
+      </p:sp>
+      <p:sp>
+        <p:nvSpPr>
+          <p:cNvPr id="36" name="Text 34"/>
+          <p:cNvSpPr/>
+          <p:nvPr/>
+        </p:nvSpPr>
+        <p:spPr>
+          <a:xfrm>
+            <a:off x="5882640" y="3364992"/>
+            <a:ext cx="1225296" cy="475488"/>
+          </a:xfrm>
+          <a:prstGeom prst="rect">
+            <a:avLst/>
+          </a:prstGeom>
+          <a:noFill/>
+          <a:ln/>
+        </p:spPr>
+        <p:txBody>
+          <a:bodyPr wrap="square" lIns="0" tIns="0" rIns="0" bIns="0" rtlCol="0" anchor="ctr"/>
+          <a:lstStyle/>
+          <a:p>
+            <a:pPr algn="ctr" indent="0" marL="0">
+              <a:buNone/>
+            </a:pPr>
+            <a:r>
+              <a:rPr lang="en-US" sz="1400" b="1" dirty="0">
+                <a:solidFill>
+                  <a:srgbClr val="0D9488"/>
+                </a:solidFill>
+                <a:latin typeface="Trebuchet MS" pitchFamily="34" charset="0"/>
+                <a:ea typeface="Trebuchet MS" pitchFamily="34" charset="-122"/>
+                <a:cs typeface="Trebuchet MS" pitchFamily="34" charset="-120"/>
+              </a:rPr>
+              <a:t>a</a:t>
+            </a:r>
+            <a:endParaRPr lang="en-US" sz="1400" dirty="0"/>
+          </a:p>
+        </p:txBody>
+      </p:sp>
+      <p:sp>
+        <p:nvSpPr>
+          <p:cNvPr id="37" name="Text 35"/>
+          <p:cNvSpPr/>
+          <p:nvPr/>
+        </p:nvSpPr>
+        <p:spPr>
+          <a:xfrm>
+            <a:off x="7107936" y="3364992"/>
+            <a:ext cx="76200" cy="475488"/>
+          </a:xfrm>
+          <a:prstGeom prst="rect">
+            <a:avLst/>
+          </a:prstGeom>
+          <a:noFill/>
+          <a:ln/>
+        </p:spPr>
+        <p:txBody>
+          <a:bodyPr wrap="square" lIns="0" tIns="0" rIns="0" bIns="0" rtlCol="0" anchor="ctr"/>
+          <a:lstStyle/>
+          <a:p>
+            <a:pPr algn="ctr" indent="0" marL="0">
+              <a:buNone/>
+            </a:pPr>
+            <a:r>
+              <a:rPr lang="en-US" sz="1600" b="1" dirty="0">
+                <a:solidFill>
+                  <a:srgbClr val="0D9488"/>
+                </a:solidFill>
+                <a:latin typeface="Trebuchet MS" pitchFamily="34" charset="0"/>
+                <a:ea typeface="Trebuchet MS" pitchFamily="34" charset="-122"/>
+                <a:cs typeface="Trebuchet MS" pitchFamily="34" charset="-120"/>
+              </a:rPr>
+              <a:t>·</a:t>
+            </a:r>
+            <a:endParaRPr lang="en-US" sz="1600" dirty="0"/>
+          </a:p>
+        </p:txBody>
+      </p:sp>
+      <p:sp>
+        <p:nvSpPr>
+          <p:cNvPr id="38" name="Shape 36"/>
+          <p:cNvSpPr/>
+          <p:nvPr/>
+        </p:nvSpPr>
+        <p:spPr>
+          <a:xfrm>
+            <a:off x="7184136" y="3364992"/>
+            <a:ext cx="1225296" cy="475488"/>
+          </a:xfrm>
+          <a:prstGeom prst="rect">
+            <a:avLst>
+              <a:gd name="adj" fmla="val 9615"/>
+            </a:avLst>
+          </a:prstGeom>
+          <a:solidFill>
+            <a:srgbClr val="FFFFFF"/>
+          </a:solidFill>
+          <a:ln w="12700">
+            <a:solidFill>
+              <a:srgbClr val="0D9488"/>
+            </a:solidFill>
+            <a:prstDash val="solid"/>
+          </a:ln>
+        </p:spPr>
+      </p:sp>
+      <p:sp>
+        <p:nvSpPr>
+          <p:cNvPr id="39" name="Text 37"/>
+          <p:cNvSpPr/>
+          <p:nvPr/>
+        </p:nvSpPr>
+        <p:spPr>
+          <a:xfrm>
+            <a:off x="7184136" y="3364992"/>
+            <a:ext cx="1225296" cy="475488"/>
+          </a:xfrm>
+          <a:prstGeom prst="rect">
+            <a:avLst/>
+          </a:prstGeom>
+          <a:noFill/>
+          <a:ln/>
+        </p:spPr>
+        <p:txBody>
+          <a:bodyPr wrap="square" lIns="0" tIns="0" rIns="0" bIns="0" rtlCol="0" anchor="ctr"/>
+          <a:lstStyle/>
+          <a:p>
+            <a:pPr algn="ctr" indent="0" marL="0">
+              <a:buNone/>
+            </a:pPr>
+            <a:r>
+              <a:rPr lang="en-US" sz="1400" b="1" dirty="0">
+                <a:solidFill>
+                  <a:srgbClr val="0D9488"/>
+                </a:solidFill>
+                <a:latin typeface="Trebuchet MS" pitchFamily="34" charset="0"/>
+                <a:ea typeface="Trebuchet MS" pitchFamily="34" charset="-122"/>
+                <a:cs typeface="Trebuchet MS" pitchFamily="34" charset="-120"/>
+              </a:rPr>
               <a:t>tive</a:t>
             </a:r>
             <a:endParaRPr lang="en-US" sz="1400" dirty="0"/>
@@ -10556,7 +11093,7 @@
       </p:sp>
       <p:sp>
         <p:nvSpPr>
-          <p:cNvPr id="33" name="Shape 31"/>
+          <p:cNvPr id="40" name="Shape 38"/>
           <p:cNvSpPr/>
           <p:nvPr/>
         </p:nvSpPr>
@@ -10583,7 +11120,7 @@
       </p:sp>
       <p:sp>
         <p:nvSpPr>
-          <p:cNvPr id="34" name="Text 32"/>
+          <p:cNvPr id="41" name="Text 39"/>
           <p:cNvSpPr/>
           <p:nvPr/>
         </p:nvSpPr>
@@ -10622,7 +11159,7 @@
       </p:sp>
       <p:sp>
         <p:nvSpPr>
-          <p:cNvPr id="35" name="Shape 33"/>
+          <p:cNvPr id="42" name="Shape 40"/>
           <p:cNvSpPr/>
           <p:nvPr/>
         </p:nvSpPr>
@@ -10649,14 +11186,14 @@
       </p:sp>
       <p:sp>
         <p:nvSpPr>
-          <p:cNvPr id="36" name="Shape 34"/>
-          <p:cNvSpPr/>
-          <p:nvPr/>
-        </p:nvSpPr>
-        <p:spPr>
-          <a:xfrm>
-            <a:off x="2023872" y="4169664"/>
-            <a:ext cx="685800" cy="384048"/>
+          <p:cNvPr id="43" name="Shape 41"/>
+          <p:cNvSpPr/>
+          <p:nvPr/>
+        </p:nvSpPr>
+        <p:spPr>
+          <a:xfrm>
+            <a:off x="1952244" y="4169664"/>
+            <a:ext cx="543652" cy="384048"/>
           </a:xfrm>
           <a:prstGeom prst="rect">
             <a:avLst>
@@ -10676,14 +11213,14 @@
       </p:sp>
       <p:sp>
         <p:nvSpPr>
-          <p:cNvPr id="37" name="Text 35"/>
-          <p:cNvSpPr/>
-          <p:nvPr/>
-        </p:nvSpPr>
-        <p:spPr>
-          <a:xfrm>
-            <a:off x="2023872" y="4169664"/>
-            <a:ext cx="685800" cy="384048"/>
+          <p:cNvPr id="44" name="Text 42"/>
+          <p:cNvSpPr/>
+          <p:nvPr/>
+        </p:nvSpPr>
+        <p:spPr>
+          <a:xfrm>
+            <a:off x="1952244" y="4169664"/>
+            <a:ext cx="543652" cy="384048"/>
           </a:xfrm>
           <a:prstGeom prst="rect">
             <a:avLst/>
@@ -10707,7 +11244,7 @@
                 <a:ea typeface="Trebuchet MS" pitchFamily="34" charset="-122"/>
                 <a:cs typeface="Trebuchet MS" pitchFamily="34" charset="-120"/>
               </a:rPr>
-              <a:t>t</a:t>
+              <a:t>i</a:t>
             </a:r>
             <a:endParaRPr lang="en-US" sz="900" dirty="0"/>
           </a:p>
@@ -10715,14 +11252,14 @@
       </p:sp>
       <p:sp>
         <p:nvSpPr>
-          <p:cNvPr id="38" name="Shape 36"/>
-          <p:cNvSpPr/>
-          <p:nvPr/>
-        </p:nvSpPr>
-        <p:spPr>
-          <a:xfrm>
-            <a:off x="2831592" y="4169664"/>
-            <a:ext cx="685800" cy="384048"/>
+          <p:cNvPr id="45" name="Shape 43"/>
+          <p:cNvSpPr/>
+          <p:nvPr/>
+        </p:nvSpPr>
+        <p:spPr>
+          <a:xfrm>
+            <a:off x="2546188" y="4169664"/>
+            <a:ext cx="543652" cy="384048"/>
           </a:xfrm>
           <a:prstGeom prst="rect">
             <a:avLst>
@@ -10742,14 +11279,14 @@
       </p:sp>
       <p:sp>
         <p:nvSpPr>
-          <p:cNvPr id="39" name="Text 37"/>
-          <p:cNvSpPr/>
-          <p:nvPr/>
-        </p:nvSpPr>
-        <p:spPr>
-          <a:xfrm>
-            <a:off x="2831592" y="4169664"/>
-            <a:ext cx="685800" cy="384048"/>
+          <p:cNvPr id="46" name="Text 44"/>
+          <p:cNvSpPr/>
+          <p:nvPr/>
+        </p:nvSpPr>
+        <p:spPr>
+          <a:xfrm>
+            <a:off x="2546188" y="4169664"/>
+            <a:ext cx="543652" cy="384048"/>
           </a:xfrm>
           <a:prstGeom prst="rect">
             <a:avLst/>
@@ -10773,7 +11310,7 @@
                 <a:ea typeface="Trebuchet MS" pitchFamily="34" charset="-122"/>
                 <a:cs typeface="Trebuchet MS" pitchFamily="34" charset="-120"/>
               </a:rPr>
-              <a:t>a</a:t>
+              <a:t>m</a:t>
             </a:r>
             <a:endParaRPr lang="en-US" sz="900" dirty="0"/>
           </a:p>
@@ -10781,14 +11318,14 @@
       </p:sp>
       <p:sp>
         <p:nvSpPr>
-          <p:cNvPr id="40" name="Shape 38"/>
-          <p:cNvSpPr/>
-          <p:nvPr/>
-        </p:nvSpPr>
-        <p:spPr>
-          <a:xfrm>
-            <a:off x="3639312" y="4169664"/>
-            <a:ext cx="685800" cy="384048"/>
+          <p:cNvPr id="47" name="Shape 45"/>
+          <p:cNvSpPr/>
+          <p:nvPr/>
+        </p:nvSpPr>
+        <p:spPr>
+          <a:xfrm>
+            <a:off x="3140133" y="4169664"/>
+            <a:ext cx="543652" cy="384048"/>
           </a:xfrm>
           <a:prstGeom prst="rect">
             <a:avLst>
@@ -10808,14 +11345,14 @@
       </p:sp>
       <p:sp>
         <p:nvSpPr>
-          <p:cNvPr id="41" name="Text 39"/>
-          <p:cNvSpPr/>
-          <p:nvPr/>
-        </p:nvSpPr>
-        <p:spPr>
-          <a:xfrm>
-            <a:off x="3639312" y="4169664"/>
-            <a:ext cx="685800" cy="384048"/>
+          <p:cNvPr id="48" name="Text 46"/>
+          <p:cNvSpPr/>
+          <p:nvPr/>
+        </p:nvSpPr>
+        <p:spPr>
+          <a:xfrm>
+            <a:off x="3140133" y="4169664"/>
+            <a:ext cx="543652" cy="384048"/>
           </a:xfrm>
           <a:prstGeom prst="rect">
             <a:avLst/>
@@ -10839,7 +11376,7 @@
                 <a:ea typeface="Trebuchet MS" pitchFamily="34" charset="-122"/>
                 <a:cs typeface="Trebuchet MS" pitchFamily="34" charset="-120"/>
               </a:rPr>
-              <a:t>l</a:t>
+              <a:t>a</a:t>
             </a:r>
             <a:endParaRPr lang="en-US" sz="900" dirty="0"/>
           </a:p>
@@ -10847,14 +11384,14 @@
       </p:sp>
       <p:sp>
         <p:nvSpPr>
-          <p:cNvPr id="42" name="Shape 40"/>
-          <p:cNvSpPr/>
-          <p:nvPr/>
-        </p:nvSpPr>
-        <p:spPr>
-          <a:xfrm>
-            <a:off x="4447032" y="4169664"/>
-            <a:ext cx="685800" cy="384048"/>
+          <p:cNvPr id="49" name="Shape 47"/>
+          <p:cNvSpPr/>
+          <p:nvPr/>
+        </p:nvSpPr>
+        <p:spPr>
+          <a:xfrm>
+            <a:off x="3734077" y="4169664"/>
+            <a:ext cx="543652" cy="384048"/>
           </a:xfrm>
           <a:prstGeom prst="rect">
             <a:avLst>
@@ -10874,14 +11411,14 @@
       </p:sp>
       <p:sp>
         <p:nvSpPr>
-          <p:cNvPr id="43" name="Text 41"/>
-          <p:cNvSpPr/>
-          <p:nvPr/>
-        </p:nvSpPr>
-        <p:spPr>
-          <a:xfrm>
-            <a:off x="4447032" y="4169664"/>
-            <a:ext cx="685800" cy="384048"/>
+          <p:cNvPr id="50" name="Text 48"/>
+          <p:cNvSpPr/>
+          <p:nvPr/>
+        </p:nvSpPr>
+        <p:spPr>
+          <a:xfrm>
+            <a:off x="3734077" y="4169664"/>
+            <a:ext cx="543652" cy="384048"/>
           </a:xfrm>
           <a:prstGeom prst="rect">
             <a:avLst/>
@@ -10905,7 +11442,7 @@
                 <a:ea typeface="Trebuchet MS" pitchFamily="34" charset="-122"/>
                 <a:cs typeface="Trebuchet MS" pitchFamily="34" charset="-120"/>
               </a:rPr>
-              <a:t>k</a:t>
+              <a:t>g</a:t>
             </a:r>
             <a:endParaRPr lang="en-US" sz="900" dirty="0"/>
           </a:p>
@@ -10913,14 +11450,14 @@
       </p:sp>
       <p:sp>
         <p:nvSpPr>
-          <p:cNvPr id="44" name="Shape 42"/>
-          <p:cNvSpPr/>
-          <p:nvPr/>
-        </p:nvSpPr>
-        <p:spPr>
-          <a:xfrm>
-            <a:off x="5254752" y="4169664"/>
-            <a:ext cx="685800" cy="384048"/>
+          <p:cNvPr id="51" name="Shape 49"/>
+          <p:cNvSpPr/>
+          <p:nvPr/>
+        </p:nvSpPr>
+        <p:spPr>
+          <a:xfrm>
+            <a:off x="4328021" y="4169664"/>
+            <a:ext cx="543652" cy="384048"/>
           </a:xfrm>
           <a:prstGeom prst="rect">
             <a:avLst>
@@ -10940,14 +11477,14 @@
       </p:sp>
       <p:sp>
         <p:nvSpPr>
-          <p:cNvPr id="45" name="Text 43"/>
-          <p:cNvSpPr/>
-          <p:nvPr/>
-        </p:nvSpPr>
-        <p:spPr>
-          <a:xfrm>
-            <a:off x="5254752" y="4169664"/>
-            <a:ext cx="685800" cy="384048"/>
+          <p:cNvPr id="52" name="Text 50"/>
+          <p:cNvSpPr/>
+          <p:nvPr/>
+        </p:nvSpPr>
+        <p:spPr>
+          <a:xfrm>
+            <a:off x="4328021" y="4169664"/>
+            <a:ext cx="543652" cy="384048"/>
           </a:xfrm>
           <a:prstGeom prst="rect">
             <a:avLst/>
@@ -10971,7 +11508,7 @@
                 <a:ea typeface="Trebuchet MS" pitchFamily="34" charset="-122"/>
                 <a:cs typeface="Trebuchet MS" pitchFamily="34" charset="-120"/>
               </a:rPr>
-              <a:t>a</a:t>
+              <a:t>i</a:t>
             </a:r>
             <a:endParaRPr lang="en-US" sz="900" dirty="0"/>
           </a:p>
@@ -10979,14 +11516,14 @@
       </p:sp>
       <p:sp>
         <p:nvSpPr>
-          <p:cNvPr id="46" name="Shape 44"/>
-          <p:cNvSpPr/>
-          <p:nvPr/>
-        </p:nvSpPr>
-        <p:spPr>
-          <a:xfrm>
-            <a:off x="6062472" y="4169664"/>
-            <a:ext cx="685800" cy="384048"/>
+          <p:cNvPr id="53" name="Shape 51"/>
+          <p:cNvSpPr/>
+          <p:nvPr/>
+        </p:nvSpPr>
+        <p:spPr>
+          <a:xfrm>
+            <a:off x="4921966" y="4169664"/>
+            <a:ext cx="543652" cy="384048"/>
           </a:xfrm>
           <a:prstGeom prst="rect">
             <a:avLst>
@@ -11006,14 +11543,14 @@
       </p:sp>
       <p:sp>
         <p:nvSpPr>
-          <p:cNvPr id="47" name="Text 45"/>
-          <p:cNvSpPr/>
-          <p:nvPr/>
-        </p:nvSpPr>
-        <p:spPr>
-          <a:xfrm>
-            <a:off x="6062472" y="4169664"/>
-            <a:ext cx="685800" cy="384048"/>
+          <p:cNvPr id="54" name="Text 52"/>
+          <p:cNvSpPr/>
+          <p:nvPr/>
+        </p:nvSpPr>
+        <p:spPr>
+          <a:xfrm>
+            <a:off x="4921966" y="4169664"/>
+            <a:ext cx="543652" cy="384048"/>
           </a:xfrm>
           <a:prstGeom prst="rect">
             <a:avLst/>
@@ -11037,7 +11574,7 @@
                 <a:ea typeface="Trebuchet MS" pitchFamily="34" charset="-122"/>
                 <a:cs typeface="Trebuchet MS" pitchFamily="34" charset="-120"/>
               </a:rPr>
-              <a:t>t</a:t>
+              <a:t>n</a:t>
             </a:r>
             <a:endParaRPr lang="en-US" sz="900" dirty="0"/>
           </a:p>
@@ -11045,14 +11582,14 @@
       </p:sp>
       <p:sp>
         <p:nvSpPr>
-          <p:cNvPr id="48" name="Shape 46"/>
-          <p:cNvSpPr/>
-          <p:nvPr/>
-        </p:nvSpPr>
-        <p:spPr>
-          <a:xfrm>
-            <a:off x="6870192" y="4169664"/>
-            <a:ext cx="685800" cy="384048"/>
+          <p:cNvPr id="55" name="Shape 53"/>
+          <p:cNvSpPr/>
+          <p:nvPr/>
+        </p:nvSpPr>
+        <p:spPr>
+          <a:xfrm>
+            <a:off x="5515910" y="4169664"/>
+            <a:ext cx="543652" cy="384048"/>
           </a:xfrm>
           <a:prstGeom prst="rect">
             <a:avLst>
@@ -11072,14 +11609,14 @@
       </p:sp>
       <p:sp>
         <p:nvSpPr>
-          <p:cNvPr id="49" name="Text 47"/>
-          <p:cNvSpPr/>
-          <p:nvPr/>
-        </p:nvSpPr>
-        <p:spPr>
-          <a:xfrm>
-            <a:off x="6870192" y="4169664"/>
-            <a:ext cx="685800" cy="384048"/>
+          <p:cNvPr id="56" name="Text 54"/>
+          <p:cNvSpPr/>
+          <p:nvPr/>
+        </p:nvSpPr>
+        <p:spPr>
+          <a:xfrm>
+            <a:off x="5515910" y="4169664"/>
+            <a:ext cx="543652" cy="384048"/>
           </a:xfrm>
           <a:prstGeom prst="rect">
             <a:avLst/>
@@ -11103,7 +11640,7 @@
                 <a:ea typeface="Trebuchet MS" pitchFamily="34" charset="-122"/>
                 <a:cs typeface="Trebuchet MS" pitchFamily="34" charset="-120"/>
               </a:rPr>
-              <a:t>i</a:t>
+              <a:t>a</a:t>
             </a:r>
             <a:endParaRPr lang="en-US" sz="900" dirty="0"/>
           </a:p>
@@ -11111,14 +11648,14 @@
       </p:sp>
       <p:sp>
         <p:nvSpPr>
-          <p:cNvPr id="50" name="Shape 48"/>
-          <p:cNvSpPr/>
-          <p:nvPr/>
-        </p:nvSpPr>
-        <p:spPr>
-          <a:xfrm>
-            <a:off x="7677912" y="4169664"/>
-            <a:ext cx="685800" cy="384048"/>
+          <p:cNvPr id="57" name="Shape 55"/>
+          <p:cNvSpPr/>
+          <p:nvPr/>
+        </p:nvSpPr>
+        <p:spPr>
+          <a:xfrm>
+            <a:off x="6109855" y="4169664"/>
+            <a:ext cx="543652" cy="384048"/>
           </a:xfrm>
           <a:prstGeom prst="rect">
             <a:avLst>
@@ -11138,14 +11675,14 @@
       </p:sp>
       <p:sp>
         <p:nvSpPr>
-          <p:cNvPr id="51" name="Text 49"/>
-          <p:cNvSpPr/>
-          <p:nvPr/>
-        </p:nvSpPr>
-        <p:spPr>
-          <a:xfrm>
-            <a:off x="7677912" y="4169664"/>
-            <a:ext cx="685800" cy="384048"/>
+          <p:cNvPr id="58" name="Text 56"/>
+          <p:cNvSpPr/>
+          <p:nvPr/>
+        </p:nvSpPr>
+        <p:spPr>
+          <a:xfrm>
+            <a:off x="6109855" y="4169664"/>
+            <a:ext cx="543652" cy="384048"/>
           </a:xfrm>
           <a:prstGeom prst="rect">
             <a:avLst/>
@@ -11169,7 +11706,7 @@
                 <a:ea typeface="Trebuchet MS" pitchFamily="34" charset="-122"/>
                 <a:cs typeface="Trebuchet MS" pitchFamily="34" charset="-120"/>
               </a:rPr>
-              <a:t>ve</a:t>
+              <a:t>t</a:t>
             </a:r>
             <a:endParaRPr lang="en-US" sz="900" dirty="0"/>
           </a:p>
@@ -11177,14 +11714,212 @@
       </p:sp>
       <p:sp>
         <p:nvSpPr>
-          <p:cNvPr id="52" name="Text 50"/>
-          <p:cNvSpPr/>
-          <p:nvPr/>
-        </p:nvSpPr>
-        <p:spPr>
-          <a:xfrm>
-            <a:off x="7677912" y="4572000"/>
-            <a:ext cx="685800" cy="219456"/>
+          <p:cNvPr id="59" name="Shape 57"/>
+          <p:cNvSpPr/>
+          <p:nvPr/>
+        </p:nvSpPr>
+        <p:spPr>
+          <a:xfrm>
+            <a:off x="6703799" y="4169664"/>
+            <a:ext cx="543652" cy="384048"/>
+          </a:xfrm>
+          <a:prstGeom prst="rect">
+            <a:avLst>
+              <a:gd name="adj" fmla="val 9524"/>
+            </a:avLst>
+          </a:prstGeom>
+          <a:solidFill>
+            <a:srgbClr val="FFFFFF"/>
+          </a:solidFill>
+          <a:ln w="12700">
+            <a:solidFill>
+              <a:srgbClr val="DB2777"/>
+            </a:solidFill>
+            <a:prstDash val="solid"/>
+          </a:ln>
+        </p:spPr>
+      </p:sp>
+      <p:sp>
+        <p:nvSpPr>
+          <p:cNvPr id="60" name="Text 58"/>
+          <p:cNvSpPr/>
+          <p:nvPr/>
+        </p:nvSpPr>
+        <p:spPr>
+          <a:xfrm>
+            <a:off x="6703799" y="4169664"/>
+            <a:ext cx="543652" cy="384048"/>
+          </a:xfrm>
+          <a:prstGeom prst="rect">
+            <a:avLst/>
+          </a:prstGeom>
+          <a:noFill/>
+          <a:ln/>
+        </p:spPr>
+        <p:txBody>
+          <a:bodyPr wrap="square" lIns="0" tIns="0" rIns="0" bIns="0" rtlCol="0" anchor="ctr"/>
+          <a:lstStyle/>
+          <a:p>
+            <a:pPr algn="ctr" indent="0" marL="0">
+              <a:buNone/>
+            </a:pPr>
+            <a:r>
+              <a:rPr lang="en-US" sz="900" b="1" dirty="0">
+                <a:solidFill>
+                  <a:srgbClr val="9D174D"/>
+                </a:solidFill>
+                <a:latin typeface="Trebuchet MS" pitchFamily="34" charset="0"/>
+                <a:ea typeface="Trebuchet MS" pitchFamily="34" charset="-122"/>
+                <a:cs typeface="Trebuchet MS" pitchFamily="34" charset="-120"/>
+              </a:rPr>
+              <a:t>i</a:t>
+            </a:r>
+            <a:endParaRPr lang="en-US" sz="900" dirty="0"/>
+          </a:p>
+        </p:txBody>
+      </p:sp>
+      <p:sp>
+        <p:nvSpPr>
+          <p:cNvPr id="61" name="Shape 59"/>
+          <p:cNvSpPr/>
+          <p:nvPr/>
+        </p:nvSpPr>
+        <p:spPr>
+          <a:xfrm>
+            <a:off x="7297743" y="4169664"/>
+            <a:ext cx="543652" cy="384048"/>
+          </a:xfrm>
+          <a:prstGeom prst="rect">
+            <a:avLst>
+              <a:gd name="adj" fmla="val 9524"/>
+            </a:avLst>
+          </a:prstGeom>
+          <a:solidFill>
+            <a:srgbClr val="FFFFFF"/>
+          </a:solidFill>
+          <a:ln w="12700">
+            <a:solidFill>
+              <a:srgbClr val="DB2777"/>
+            </a:solidFill>
+            <a:prstDash val="solid"/>
+          </a:ln>
+        </p:spPr>
+      </p:sp>
+      <p:sp>
+        <p:nvSpPr>
+          <p:cNvPr id="62" name="Text 60"/>
+          <p:cNvSpPr/>
+          <p:nvPr/>
+        </p:nvSpPr>
+        <p:spPr>
+          <a:xfrm>
+            <a:off x="7297743" y="4169664"/>
+            <a:ext cx="543652" cy="384048"/>
+          </a:xfrm>
+          <a:prstGeom prst="rect">
+            <a:avLst/>
+          </a:prstGeom>
+          <a:noFill/>
+          <a:ln/>
+        </p:spPr>
+        <p:txBody>
+          <a:bodyPr wrap="square" lIns="0" tIns="0" rIns="0" bIns="0" rtlCol="0" anchor="ctr"/>
+          <a:lstStyle/>
+          <a:p>
+            <a:pPr algn="ctr" indent="0" marL="0">
+              <a:buNone/>
+            </a:pPr>
+            <a:r>
+              <a:rPr lang="en-US" sz="900" b="1" dirty="0">
+                <a:solidFill>
+                  <a:srgbClr val="9D174D"/>
+                </a:solidFill>
+                <a:latin typeface="Trebuchet MS" pitchFamily="34" charset="0"/>
+                <a:ea typeface="Trebuchet MS" pitchFamily="34" charset="-122"/>
+                <a:cs typeface="Trebuchet MS" pitchFamily="34" charset="-120"/>
+              </a:rPr>
+              <a:t>v</a:t>
+            </a:r>
+            <a:endParaRPr lang="en-US" sz="900" dirty="0"/>
+          </a:p>
+        </p:txBody>
+      </p:sp>
+      <p:sp>
+        <p:nvSpPr>
+          <p:cNvPr id="63" name="Shape 61"/>
+          <p:cNvSpPr/>
+          <p:nvPr/>
+        </p:nvSpPr>
+        <p:spPr>
+          <a:xfrm>
+            <a:off x="7891688" y="4169664"/>
+            <a:ext cx="543652" cy="384048"/>
+          </a:xfrm>
+          <a:prstGeom prst="rect">
+            <a:avLst>
+              <a:gd name="adj" fmla="val 9524"/>
+            </a:avLst>
+          </a:prstGeom>
+          <a:solidFill>
+            <a:srgbClr val="FFFFFF"/>
+          </a:solidFill>
+          <a:ln w="12700">
+            <a:solidFill>
+              <a:srgbClr val="DB2777"/>
+            </a:solidFill>
+            <a:prstDash val="solid"/>
+          </a:ln>
+        </p:spPr>
+      </p:sp>
+      <p:sp>
+        <p:nvSpPr>
+          <p:cNvPr id="64" name="Text 62"/>
+          <p:cNvSpPr/>
+          <p:nvPr/>
+        </p:nvSpPr>
+        <p:spPr>
+          <a:xfrm>
+            <a:off x="7891688" y="4169664"/>
+            <a:ext cx="543652" cy="384048"/>
+          </a:xfrm>
+          <a:prstGeom prst="rect">
+            <a:avLst/>
+          </a:prstGeom>
+          <a:noFill/>
+          <a:ln/>
+        </p:spPr>
+        <p:txBody>
+          <a:bodyPr wrap="square" lIns="0" tIns="0" rIns="0" bIns="0" rtlCol="0" anchor="ctr"/>
+          <a:lstStyle/>
+          <a:p>
+            <a:pPr algn="ctr" indent="0" marL="0">
+              <a:buNone/>
+            </a:pPr>
+            <a:r>
+              <a:rPr lang="en-US" sz="900" b="1" dirty="0">
+                <a:solidFill>
+                  <a:srgbClr val="9D174D"/>
+                </a:solidFill>
+                <a:latin typeface="Trebuchet MS" pitchFamily="34" charset="0"/>
+                <a:ea typeface="Trebuchet MS" pitchFamily="34" charset="-122"/>
+                <a:cs typeface="Trebuchet MS" pitchFamily="34" charset="-120"/>
+              </a:rPr>
+              <a:t>e</a:t>
+            </a:r>
+            <a:endParaRPr lang="en-US" sz="900" dirty="0"/>
+          </a:p>
+        </p:txBody>
+      </p:sp>
+      <p:sp>
+        <p:nvSpPr>
+          <p:cNvPr id="65" name="Text 63"/>
+          <p:cNvSpPr/>
+          <p:nvPr/>
+        </p:nvSpPr>
+        <p:spPr>
+          <a:xfrm>
+            <a:off x="7891688" y="4572000"/>
+            <a:ext cx="543652" cy="219456"/>
           </a:xfrm>
           <a:prstGeom prst="rect">
             <a:avLst/>
@@ -11208,7 +11943,7 @@
                 <a:ea typeface="Calibri" pitchFamily="34" charset="-122"/>
                 <a:cs typeface="Calibri" pitchFamily="34" charset="-120"/>
               </a:rPr>
-              <a:t>/v/</a:t>
+              <a:t>silent</a:t>
             </a:r>
             <a:endParaRPr lang="en-US" sz="750" dirty="0"/>
           </a:p>
@@ -11639,7 +12374,7 @@
                 <a:ea typeface="Trebuchet MS" pitchFamily="34" charset="-122"/>
                 <a:cs typeface="Trebuchet MS" pitchFamily="34" charset="-120"/>
               </a:rPr>
-              <a:t>imaginative</a:t>
+              <a:t>narrative</a:t>
             </a:r>
             <a:endParaRPr lang="en-US" sz="2800" dirty="0"/>
           </a:p>
@@ -12466,7 +13201,7 @@
                 <a:ea typeface="Trebuchet MS" pitchFamily="34" charset="-122"/>
                 <a:cs typeface="Trebuchet MS" pitchFamily="34" charset="-120"/>
               </a:rPr>
-              <a:t>imaginative</a:t>
+              <a:t>narrative</a:t>
             </a:r>
             <a:endParaRPr lang="en-US" sz="2800" dirty="0"/>
           </a:p>
@@ -12605,7 +13340,7 @@
                 <a:ea typeface="Trebuchet MS" pitchFamily="34" charset="-122"/>
                 <a:cs typeface="Trebuchet MS" pitchFamily="34" charset="-120"/>
               </a:rPr>
-              <a:t>imagin</a:t>
+              <a:t>narr</a:t>
             </a:r>
             <a:endParaRPr lang="en-US" sz="1300" dirty="0"/>
           </a:p>
@@ -12644,7 +13379,7 @@
                 <a:ea typeface="Calibri" pitchFamily="34" charset="-122"/>
                 <a:cs typeface="Calibri" pitchFamily="34" charset="-120"/>
               </a:rPr>
-              <a:t>to picture in the mind</a:t>
+              <a:t>to tell a story</a:t>
             </a:r>
             <a:endParaRPr lang="en-US" sz="850" dirty="0"/>
           </a:p>
@@ -12652,46 +13387,7 @@
       </p:sp>
       <p:sp>
         <p:nvSpPr>
-          <p:cNvPr id="19" name="Text 17"/>
-          <p:cNvSpPr/>
-          <p:nvPr/>
-        </p:nvSpPr>
-        <p:spPr>
-          <a:xfrm>
-            <a:off x="2938272" y="2752344"/>
-            <a:ext cx="1828800" cy="182880"/>
-          </a:xfrm>
-          <a:prstGeom prst="rect">
-            <a:avLst/>
-          </a:prstGeom>
-          <a:noFill/>
-          <a:ln/>
-        </p:spPr>
-        <p:txBody>
-          <a:bodyPr wrap="square" lIns="0" tIns="0" rIns="0" bIns="0" rtlCol="0" anchor="t"/>
-          <a:lstStyle/>
-          <a:p>
-            <a:pPr algn="ctr" indent="0" marL="0">
-              <a:buNone/>
-            </a:pPr>
-            <a:r>
-              <a:rPr lang="en-US" sz="700" i="1" dirty="0">
-                <a:solidFill>
-                  <a:srgbClr val="94A3B8"/>
-                </a:solidFill>
-                <a:latin typeface="Calibri" pitchFamily="34" charset="0"/>
-                <a:ea typeface="Calibri" pitchFamily="34" charset="-122"/>
-                <a:cs typeface="Calibri" pitchFamily="34" charset="-120"/>
-              </a:rPr>
-              <a:t>'e' dropped before vowel suffix</a:t>
-            </a:r>
-            <a:endParaRPr lang="en-US" sz="700" dirty="0"/>
-          </a:p>
-        </p:txBody>
-      </p:sp>
-      <p:sp>
-        <p:nvSpPr>
-          <p:cNvPr id="20" name="Shape 18"/>
+          <p:cNvPr id="19" name="Shape 17"/>
           <p:cNvSpPr/>
           <p:nvPr/>
         </p:nvSpPr>
@@ -12725,7 +13421,7 @@
       </p:sp>
       <p:sp>
         <p:nvSpPr>
-          <p:cNvPr id="21" name="Text 19"/>
+          <p:cNvPr id="20" name="Text 18"/>
           <p:cNvSpPr/>
           <p:nvPr/>
         </p:nvSpPr>
@@ -12764,7 +13460,7 @@
       </p:sp>
       <p:sp>
         <p:nvSpPr>
-          <p:cNvPr id="22" name="Text 20"/>
+          <p:cNvPr id="21" name="Text 19"/>
           <p:cNvSpPr/>
           <p:nvPr/>
         </p:nvSpPr>
@@ -12795,7 +13491,7 @@
                 <a:ea typeface="Calibri" pitchFamily="34" charset="-122"/>
                 <a:cs typeface="Calibri" pitchFamily="34" charset="-120"/>
               </a:rPr>
-              <a:t>tending to</a:t>
+              <a:t>tending to, relating to</a:t>
             </a:r>
             <a:endParaRPr lang="en-US" sz="850" dirty="0"/>
           </a:p>
@@ -12803,7 +13499,7 @@
       </p:sp>
       <p:sp>
         <p:nvSpPr>
-          <p:cNvPr id="23" name="Shape 21"/>
+          <p:cNvPr id="22" name="Shape 20"/>
           <p:cNvSpPr/>
           <p:nvPr/>
         </p:nvSpPr>
@@ -12830,7 +13526,7 @@
       </p:sp>
       <p:sp>
         <p:nvSpPr>
-          <p:cNvPr id="24" name="Text 22"/>
+          <p:cNvPr id="23" name="Text 21"/>
           <p:cNvSpPr/>
           <p:nvPr/>
         </p:nvSpPr>
@@ -12869,7 +13565,7 @@
       </p:sp>
       <p:sp>
         <p:nvSpPr>
-          <p:cNvPr id="25" name="Shape 23"/>
+          <p:cNvPr id="24" name="Shape 22"/>
           <p:cNvSpPr/>
           <p:nvPr/>
         </p:nvSpPr>
@@ -12896,7 +13592,7 @@
       </p:sp>
       <p:sp>
         <p:nvSpPr>
-          <p:cNvPr id="26" name="Text 24"/>
+          <p:cNvPr id="25" name="Text 23"/>
           <p:cNvSpPr/>
           <p:nvPr/>
         </p:nvSpPr>
@@ -12935,7 +13631,7 @@
       </p:sp>
       <p:sp>
         <p:nvSpPr>
-          <p:cNvPr id="27" name="Shape 25"/>
+          <p:cNvPr id="26" name="Shape 24"/>
           <p:cNvSpPr/>
           <p:nvPr/>
         </p:nvSpPr>
@@ -12962,7 +13658,7 @@
       </p:sp>
       <p:sp>
         <p:nvSpPr>
-          <p:cNvPr id="28" name="Text 26"/>
+          <p:cNvPr id="27" name="Text 25"/>
           <p:cNvSpPr/>
           <p:nvPr/>
         </p:nvSpPr>
@@ -13001,7 +13697,7 @@
       </p:sp>
       <p:sp>
         <p:nvSpPr>
-          <p:cNvPr id="29" name="Shape 27"/>
+          <p:cNvPr id="28" name="Shape 26"/>
           <p:cNvSpPr/>
           <p:nvPr/>
         </p:nvSpPr>
@@ -13028,7 +13724,7 @@
       </p:sp>
       <p:sp>
         <p:nvSpPr>
-          <p:cNvPr id="30" name="Text 28"/>
+          <p:cNvPr id="29" name="Text 27"/>
           <p:cNvSpPr/>
           <p:nvPr/>
         </p:nvSpPr>
@@ -13490,7 +14186,7 @@
                 <a:ea typeface="Trebuchet MS" pitchFamily="34" charset="-122"/>
                 <a:cs typeface="Trebuchet MS" pitchFamily="34" charset="-120"/>
               </a:rPr>
-              <a:t>imaginative</a:t>
+              <a:t>narrative</a:t>
             </a:r>
             <a:endParaRPr lang="en-US" sz="2800" dirty="0"/>
           </a:p>
@@ -13629,7 +14325,7 @@
                 <a:ea typeface="Trebuchet MS" pitchFamily="34" charset="-122"/>
                 <a:cs typeface="Trebuchet MS" pitchFamily="34" charset="-120"/>
               </a:rPr>
-              <a:t>imagin</a:t>
+              <a:t>narr</a:t>
             </a:r>
             <a:endParaRPr lang="en-US" sz="1300" dirty="0"/>
           </a:p>
@@ -13668,7 +14364,7 @@
                 <a:ea typeface="Calibri" pitchFamily="34" charset="-122"/>
                 <a:cs typeface="Calibri" pitchFamily="34" charset="-120"/>
               </a:rPr>
-              <a:t>to picture in the mind</a:t>
+              <a:t>to tell a story</a:t>
             </a:r>
             <a:endParaRPr lang="en-US" sz="850" dirty="0"/>
           </a:p>
@@ -13676,46 +14372,7 @@
       </p:sp>
       <p:sp>
         <p:nvSpPr>
-          <p:cNvPr id="19" name="Text 17"/>
-          <p:cNvSpPr/>
-          <p:nvPr/>
-        </p:nvSpPr>
-        <p:spPr>
-          <a:xfrm>
-            <a:off x="2938272" y="2752344"/>
-            <a:ext cx="1828800" cy="182880"/>
-          </a:xfrm>
-          <a:prstGeom prst="rect">
-            <a:avLst/>
-          </a:prstGeom>
-          <a:noFill/>
-          <a:ln/>
-        </p:spPr>
-        <p:txBody>
-          <a:bodyPr wrap="square" lIns="0" tIns="0" rIns="0" bIns="0" rtlCol="0" anchor="t"/>
-          <a:lstStyle/>
-          <a:p>
-            <a:pPr algn="ctr" indent="0" marL="0">
-              <a:buNone/>
-            </a:pPr>
-            <a:r>
-              <a:rPr lang="en-US" sz="700" i="1" dirty="0">
-                <a:solidFill>
-                  <a:srgbClr val="94A3B8"/>
-                </a:solidFill>
-                <a:latin typeface="Calibri" pitchFamily="34" charset="0"/>
-                <a:ea typeface="Calibri" pitchFamily="34" charset="-122"/>
-                <a:cs typeface="Calibri" pitchFamily="34" charset="-120"/>
-              </a:rPr>
-              <a:t>'e' dropped before vowel suffix</a:t>
-            </a:r>
-            <a:endParaRPr lang="en-US" sz="700" dirty="0"/>
-          </a:p>
-        </p:txBody>
-      </p:sp>
-      <p:sp>
-        <p:nvSpPr>
-          <p:cNvPr id="20" name="Shape 18"/>
+          <p:cNvPr id="19" name="Shape 17"/>
           <p:cNvSpPr/>
           <p:nvPr/>
         </p:nvSpPr>
@@ -13749,7 +14406,7 @@
       </p:sp>
       <p:sp>
         <p:nvSpPr>
-          <p:cNvPr id="21" name="Text 19"/>
+          <p:cNvPr id="20" name="Text 18"/>
           <p:cNvSpPr/>
           <p:nvPr/>
         </p:nvSpPr>
@@ -13788,7 +14445,7 @@
       </p:sp>
       <p:sp>
         <p:nvSpPr>
-          <p:cNvPr id="22" name="Text 20"/>
+          <p:cNvPr id="21" name="Text 19"/>
           <p:cNvSpPr/>
           <p:nvPr/>
         </p:nvSpPr>
@@ -13819,7 +14476,7 @@
                 <a:ea typeface="Calibri" pitchFamily="34" charset="-122"/>
                 <a:cs typeface="Calibri" pitchFamily="34" charset="-120"/>
               </a:rPr>
-              <a:t>tending to</a:t>
+              <a:t>tending to, relating to</a:t>
             </a:r>
             <a:endParaRPr lang="en-US" sz="850" dirty="0"/>
           </a:p>
@@ -13827,7 +14484,7 @@
       </p:sp>
       <p:sp>
         <p:nvSpPr>
-          <p:cNvPr id="23" name="Shape 21"/>
+          <p:cNvPr id="22" name="Shape 20"/>
           <p:cNvSpPr/>
           <p:nvPr/>
         </p:nvSpPr>
@@ -13854,7 +14511,7 @@
       </p:sp>
       <p:sp>
         <p:nvSpPr>
-          <p:cNvPr id="24" name="Text 22"/>
+          <p:cNvPr id="23" name="Text 21"/>
           <p:cNvSpPr/>
           <p:nvPr/>
         </p:nvSpPr>
@@ -13893,7 +14550,7 @@
       </p:sp>
       <p:sp>
         <p:nvSpPr>
-          <p:cNvPr id="25" name="Shape 23"/>
+          <p:cNvPr id="24" name="Shape 22"/>
           <p:cNvSpPr/>
           <p:nvPr/>
         </p:nvSpPr>
@@ -13920,14 +14577,14 @@
       </p:sp>
       <p:sp>
         <p:nvSpPr>
-          <p:cNvPr id="26" name="Shape 24"/>
-          <p:cNvSpPr/>
-          <p:nvPr/>
-        </p:nvSpPr>
-        <p:spPr>
-          <a:xfrm>
-            <a:off x="1978152" y="3364992"/>
-            <a:ext cx="1225296" cy="475488"/>
+          <p:cNvPr id="25" name="Shape 23"/>
+          <p:cNvSpPr/>
+          <p:nvPr/>
+        </p:nvSpPr>
+        <p:spPr>
+          <a:xfrm>
+            <a:off x="2313432" y="3364992"/>
+            <a:ext cx="1645920" cy="475488"/>
           </a:xfrm>
           <a:prstGeom prst="rect">
             <a:avLst>
@@ -13947,14 +14604,14 @@
       </p:sp>
       <p:sp>
         <p:nvSpPr>
-          <p:cNvPr id="27" name="Text 25"/>
-          <p:cNvSpPr/>
-          <p:nvPr/>
-        </p:nvSpPr>
-        <p:spPr>
-          <a:xfrm>
-            <a:off x="1978152" y="3364992"/>
-            <a:ext cx="1225296" cy="475488"/>
+          <p:cNvPr id="26" name="Text 24"/>
+          <p:cNvSpPr/>
+          <p:nvPr/>
+        </p:nvSpPr>
+        <p:spPr>
+          <a:xfrm>
+            <a:off x="2313432" y="3364992"/>
+            <a:ext cx="1645920" cy="475488"/>
           </a:xfrm>
           <a:prstGeom prst="rect">
             <a:avLst/>
@@ -13978,7 +14635,7 @@
                 <a:ea typeface="Trebuchet MS" pitchFamily="34" charset="-122"/>
                 <a:cs typeface="Trebuchet MS" pitchFamily="34" charset="-120"/>
               </a:rPr>
-              <a:t>i</a:t>
+              <a:t>nar</a:t>
             </a:r>
             <a:endParaRPr lang="en-US" sz="1400" dirty="0"/>
           </a:p>
@@ -13986,14 +14643,14 @@
       </p:sp>
       <p:sp>
         <p:nvSpPr>
-          <p:cNvPr id="28" name="Text 26"/>
-          <p:cNvSpPr/>
-          <p:nvPr/>
-        </p:nvSpPr>
-        <p:spPr>
-          <a:xfrm>
-            <a:off x="3203448" y="3364992"/>
-            <a:ext cx="76200" cy="475488"/>
+          <p:cNvPr id="27" name="Text 25"/>
+          <p:cNvSpPr/>
+          <p:nvPr/>
+        </p:nvSpPr>
+        <p:spPr>
+          <a:xfrm>
+            <a:off x="3959352" y="3364992"/>
+            <a:ext cx="411480" cy="475488"/>
           </a:xfrm>
           <a:prstGeom prst="rect">
             <a:avLst/>
@@ -14025,14 +14682,14 @@
       </p:sp>
       <p:sp>
         <p:nvSpPr>
-          <p:cNvPr id="29" name="Shape 27"/>
-          <p:cNvSpPr/>
-          <p:nvPr/>
-        </p:nvSpPr>
-        <p:spPr>
-          <a:xfrm>
-            <a:off x="3279648" y="3364992"/>
-            <a:ext cx="1225296" cy="475488"/>
+          <p:cNvPr id="28" name="Shape 26"/>
+          <p:cNvSpPr/>
+          <p:nvPr/>
+        </p:nvSpPr>
+        <p:spPr>
+          <a:xfrm>
+            <a:off x="4370832" y="3364992"/>
+            <a:ext cx="1645920" cy="475488"/>
           </a:xfrm>
           <a:prstGeom prst="rect">
             <a:avLst>
@@ -14052,14 +14709,14 @@
       </p:sp>
       <p:sp>
         <p:nvSpPr>
-          <p:cNvPr id="30" name="Text 28"/>
-          <p:cNvSpPr/>
-          <p:nvPr/>
-        </p:nvSpPr>
-        <p:spPr>
-          <a:xfrm>
-            <a:off x="3279648" y="3364992"/>
-            <a:ext cx="1225296" cy="475488"/>
+          <p:cNvPr id="29" name="Text 27"/>
+          <p:cNvSpPr/>
+          <p:nvPr/>
+        </p:nvSpPr>
+        <p:spPr>
+          <a:xfrm>
+            <a:off x="4370832" y="3364992"/>
+            <a:ext cx="1645920" cy="475488"/>
           </a:xfrm>
           <a:prstGeom prst="rect">
             <a:avLst/>
@@ -14083,7 +14740,7 @@
                 <a:ea typeface="Trebuchet MS" pitchFamily="34" charset="-122"/>
                 <a:cs typeface="Trebuchet MS" pitchFamily="34" charset="-120"/>
               </a:rPr>
-              <a:t>mag</a:t>
+              <a:t>ra</a:t>
             </a:r>
             <a:endParaRPr lang="en-US" sz="1400" dirty="0"/>
           </a:p>
@@ -14091,14 +14748,14 @@
       </p:sp>
       <p:sp>
         <p:nvSpPr>
-          <p:cNvPr id="31" name="Text 29"/>
-          <p:cNvSpPr/>
-          <p:nvPr/>
-        </p:nvSpPr>
-        <p:spPr>
-          <a:xfrm>
-            <a:off x="4504944" y="3364992"/>
-            <a:ext cx="76200" cy="475488"/>
+          <p:cNvPr id="30" name="Text 28"/>
+          <p:cNvSpPr/>
+          <p:nvPr/>
+        </p:nvSpPr>
+        <p:spPr>
+          <a:xfrm>
+            <a:off x="6016752" y="3364992"/>
+            <a:ext cx="411480" cy="475488"/>
           </a:xfrm>
           <a:prstGeom prst="rect">
             <a:avLst/>
@@ -14130,14 +14787,14 @@
       </p:sp>
       <p:sp>
         <p:nvSpPr>
-          <p:cNvPr id="32" name="Shape 30"/>
-          <p:cNvSpPr/>
-          <p:nvPr/>
-        </p:nvSpPr>
-        <p:spPr>
-          <a:xfrm>
-            <a:off x="4581144" y="3364992"/>
-            <a:ext cx="1225296" cy="475488"/>
+          <p:cNvPr id="31" name="Shape 29"/>
+          <p:cNvSpPr/>
+          <p:nvPr/>
+        </p:nvSpPr>
+        <p:spPr>
+          <a:xfrm>
+            <a:off x="6428232" y="3364992"/>
+            <a:ext cx="1645920" cy="475488"/>
           </a:xfrm>
           <a:prstGeom prst="rect">
             <a:avLst>
@@ -14157,14 +14814,14 @@
       </p:sp>
       <p:sp>
         <p:nvSpPr>
-          <p:cNvPr id="33" name="Text 31"/>
-          <p:cNvSpPr/>
-          <p:nvPr/>
-        </p:nvSpPr>
-        <p:spPr>
-          <a:xfrm>
-            <a:off x="4581144" y="3364992"/>
-            <a:ext cx="1225296" cy="475488"/>
+          <p:cNvPr id="32" name="Text 30"/>
+          <p:cNvSpPr/>
+          <p:nvPr/>
+        </p:nvSpPr>
+        <p:spPr>
+          <a:xfrm>
+            <a:off x="6428232" y="3364992"/>
+            <a:ext cx="1645920" cy="475488"/>
           </a:xfrm>
           <a:prstGeom prst="rect">
             <a:avLst/>
@@ -14188,7 +14845,7 @@
                 <a:ea typeface="Trebuchet MS" pitchFamily="34" charset="-122"/>
                 <a:cs typeface="Trebuchet MS" pitchFamily="34" charset="-120"/>
               </a:rPr>
-              <a:t>i</a:t>
+              <a:t>tive</a:t>
             </a:r>
             <a:endParaRPr lang="en-US" sz="1400" dirty="0"/>
           </a:p>
@@ -14196,40 +14853,67 @@
       </p:sp>
       <p:sp>
         <p:nvSpPr>
+          <p:cNvPr id="33" name="Shape 31"/>
+          <p:cNvSpPr/>
+          <p:nvPr/>
+        </p:nvSpPr>
+        <p:spPr>
+          <a:xfrm>
+            <a:off x="365760" y="4096512"/>
+            <a:ext cx="1371600" cy="804672"/>
+          </a:xfrm>
+          <a:prstGeom prst="rect">
+            <a:avLst>
+              <a:gd name="adj" fmla="val 6818"/>
+            </a:avLst>
+          </a:prstGeom>
+          <a:solidFill>
+            <a:srgbClr val="E2E8F0"/>
+          </a:solidFill>
+          <a:ln w="12700">
+            <a:solidFill>
+              <a:srgbClr val="E2E8F0"/>
+            </a:solidFill>
+            <a:prstDash val="solid"/>
+          </a:ln>
+        </p:spPr>
+      </p:sp>
+      <p:sp>
+        <p:nvSpPr>
           <p:cNvPr id="34" name="Text 32"/>
           <p:cNvSpPr/>
           <p:nvPr/>
         </p:nvSpPr>
         <p:spPr>
           <a:xfrm>
-            <a:off x="5806440" y="3364992"/>
-            <a:ext cx="76200" cy="475488"/>
-          </a:xfrm>
-          <a:prstGeom prst="rect">
-            <a:avLst/>
-          </a:prstGeom>
-          <a:noFill/>
-          <a:ln/>
-        </p:spPr>
-        <p:txBody>
-          <a:bodyPr wrap="square" lIns="0" tIns="0" rIns="0" bIns="0" rtlCol="0" anchor="ctr"/>
-          <a:lstStyle/>
-          <a:p>
-            <a:pPr algn="ctr" indent="0" marL="0">
-              <a:buNone/>
-            </a:pPr>
-            <a:r>
-              <a:rPr lang="en-US" sz="1600" b="1" dirty="0">
-                <a:solidFill>
-                  <a:srgbClr val="0D9488"/>
+            <a:off x="365760" y="4096512"/>
+            <a:ext cx="1371600" cy="804672"/>
+          </a:xfrm>
+          <a:prstGeom prst="rect">
+            <a:avLst/>
+          </a:prstGeom>
+          <a:noFill/>
+          <a:ln/>
+        </p:spPr>
+        <p:txBody>
+          <a:bodyPr wrap="square" lIns="0" tIns="0" rIns="0" bIns="0" rtlCol="0" anchor="ctr"/>
+          <a:lstStyle/>
+          <a:p>
+            <a:pPr algn="ctr" indent="0" marL="0">
+              <a:buNone/>
+            </a:pPr>
+            <a:r>
+              <a:rPr lang="en-US" sz="1100" b="1" dirty="0">
+                <a:solidFill>
+                  <a:srgbClr val="475569"/>
                 </a:solidFill>
                 <a:latin typeface="Trebuchet MS" pitchFamily="34" charset="0"/>
                 <a:ea typeface="Trebuchet MS" pitchFamily="34" charset="-122"/>
                 <a:cs typeface="Trebuchet MS" pitchFamily="34" charset="-120"/>
               </a:rPr>
-              <a:t>·</a:t>
-            </a:r>
-            <a:endParaRPr lang="en-US" sz="1600" dirty="0"/>
+              <a:t>Phonemes</a:t>
+            </a:r>
+            <a:endParaRPr lang="en-US" sz="1100" dirty="0"/>
           </a:p>
         </p:txBody>
       </p:sp>
@@ -14241,179 +14925,8 @@
         </p:nvSpPr>
         <p:spPr>
           <a:xfrm>
-            <a:off x="5882640" y="3364992"/>
-            <a:ext cx="1225296" cy="475488"/>
-          </a:xfrm>
-          <a:prstGeom prst="rect">
-            <a:avLst>
-              <a:gd name="adj" fmla="val 9615"/>
-            </a:avLst>
-          </a:prstGeom>
-          <a:solidFill>
-            <a:srgbClr val="FFFFFF"/>
-          </a:solidFill>
-          <a:ln w="12700">
-            <a:solidFill>
-              <a:srgbClr val="0D9488"/>
-            </a:solidFill>
-            <a:prstDash val="solid"/>
-          </a:ln>
-        </p:spPr>
-      </p:sp>
-      <p:sp>
-        <p:nvSpPr>
-          <p:cNvPr id="36" name="Text 34"/>
-          <p:cNvSpPr/>
-          <p:nvPr/>
-        </p:nvSpPr>
-        <p:spPr>
-          <a:xfrm>
-            <a:off x="5882640" y="3364992"/>
-            <a:ext cx="1225296" cy="475488"/>
-          </a:xfrm>
-          <a:prstGeom prst="rect">
-            <a:avLst/>
-          </a:prstGeom>
-          <a:noFill/>
-          <a:ln/>
-        </p:spPr>
-        <p:txBody>
-          <a:bodyPr wrap="square" lIns="0" tIns="0" rIns="0" bIns="0" rtlCol="0" anchor="ctr"/>
-          <a:lstStyle/>
-          <a:p>
-            <a:pPr algn="ctr" indent="0" marL="0">
-              <a:buNone/>
-            </a:pPr>
-            <a:r>
-              <a:rPr lang="en-US" sz="1400" b="1" dirty="0">
-                <a:solidFill>
-                  <a:srgbClr val="0D9488"/>
-                </a:solidFill>
-                <a:latin typeface="Trebuchet MS" pitchFamily="34" charset="0"/>
-                <a:ea typeface="Trebuchet MS" pitchFamily="34" charset="-122"/>
-                <a:cs typeface="Trebuchet MS" pitchFamily="34" charset="-120"/>
-              </a:rPr>
-              <a:t>na</a:t>
-            </a:r>
-            <a:endParaRPr lang="en-US" sz="1400" dirty="0"/>
-          </a:p>
-        </p:txBody>
-      </p:sp>
-      <p:sp>
-        <p:nvSpPr>
-          <p:cNvPr id="37" name="Text 35"/>
-          <p:cNvSpPr/>
-          <p:nvPr/>
-        </p:nvSpPr>
-        <p:spPr>
-          <a:xfrm>
-            <a:off x="7107936" y="3364992"/>
-            <a:ext cx="76200" cy="475488"/>
-          </a:xfrm>
-          <a:prstGeom prst="rect">
-            <a:avLst/>
-          </a:prstGeom>
-          <a:noFill/>
-          <a:ln/>
-        </p:spPr>
-        <p:txBody>
-          <a:bodyPr wrap="square" lIns="0" tIns="0" rIns="0" bIns="0" rtlCol="0" anchor="ctr"/>
-          <a:lstStyle/>
-          <a:p>
-            <a:pPr algn="ctr" indent="0" marL="0">
-              <a:buNone/>
-            </a:pPr>
-            <a:r>
-              <a:rPr lang="en-US" sz="1600" b="1" dirty="0">
-                <a:solidFill>
-                  <a:srgbClr val="0D9488"/>
-                </a:solidFill>
-                <a:latin typeface="Trebuchet MS" pitchFamily="34" charset="0"/>
-                <a:ea typeface="Trebuchet MS" pitchFamily="34" charset="-122"/>
-                <a:cs typeface="Trebuchet MS" pitchFamily="34" charset="-120"/>
-              </a:rPr>
-              <a:t>·</a:t>
-            </a:r>
-            <a:endParaRPr lang="en-US" sz="1600" dirty="0"/>
-          </a:p>
-        </p:txBody>
-      </p:sp>
-      <p:sp>
-        <p:nvSpPr>
-          <p:cNvPr id="38" name="Shape 36"/>
-          <p:cNvSpPr/>
-          <p:nvPr/>
-        </p:nvSpPr>
-        <p:spPr>
-          <a:xfrm>
-            <a:off x="7184136" y="3364992"/>
-            <a:ext cx="1225296" cy="475488"/>
-          </a:xfrm>
-          <a:prstGeom prst="rect">
-            <a:avLst>
-              <a:gd name="adj" fmla="val 9615"/>
-            </a:avLst>
-          </a:prstGeom>
-          <a:solidFill>
-            <a:srgbClr val="FFFFFF"/>
-          </a:solidFill>
-          <a:ln w="12700">
-            <a:solidFill>
-              <a:srgbClr val="0D9488"/>
-            </a:solidFill>
-            <a:prstDash val="solid"/>
-          </a:ln>
-        </p:spPr>
-      </p:sp>
-      <p:sp>
-        <p:nvSpPr>
-          <p:cNvPr id="39" name="Text 37"/>
-          <p:cNvSpPr/>
-          <p:nvPr/>
-        </p:nvSpPr>
-        <p:spPr>
-          <a:xfrm>
-            <a:off x="7184136" y="3364992"/>
-            <a:ext cx="1225296" cy="475488"/>
-          </a:xfrm>
-          <a:prstGeom prst="rect">
-            <a:avLst/>
-          </a:prstGeom>
-          <a:noFill/>
-          <a:ln/>
-        </p:spPr>
-        <p:txBody>
-          <a:bodyPr wrap="square" lIns="0" tIns="0" rIns="0" bIns="0" rtlCol="0" anchor="ctr"/>
-          <a:lstStyle/>
-          <a:p>
-            <a:pPr algn="ctr" indent="0" marL="0">
-              <a:buNone/>
-            </a:pPr>
-            <a:r>
-              <a:rPr lang="en-US" sz="1400" b="1" dirty="0">
-                <a:solidFill>
-                  <a:srgbClr val="0D9488"/>
-                </a:solidFill>
-                <a:latin typeface="Trebuchet MS" pitchFamily="34" charset="0"/>
-                <a:ea typeface="Trebuchet MS" pitchFamily="34" charset="-122"/>
-                <a:cs typeface="Trebuchet MS" pitchFamily="34" charset="-120"/>
-              </a:rPr>
-              <a:t>tive</a:t>
-            </a:r>
-            <a:endParaRPr lang="en-US" sz="1400" dirty="0"/>
-          </a:p>
-        </p:txBody>
-      </p:sp>
-      <p:sp>
-        <p:nvSpPr>
-          <p:cNvPr id="40" name="Shape 38"/>
-          <p:cNvSpPr/>
-          <p:nvPr/>
-        </p:nvSpPr>
-        <p:spPr>
-          <a:xfrm>
-            <a:off x="365760" y="4096512"/>
-            <a:ext cx="1371600" cy="804672"/>
+            <a:off x="1874520" y="4096512"/>
+            <a:ext cx="6903720" cy="804672"/>
           </a:xfrm>
           <a:prstGeom prst="rect">
             <a:avLst>
@@ -14421,85 +14934,19 @@
             </a:avLst>
           </a:prstGeom>
           <a:solidFill>
-            <a:srgbClr val="E2E8F0"/>
+            <a:srgbClr val="F8FAFC"/>
           </a:solidFill>
           <a:ln w="12700">
             <a:solidFill>
               <a:srgbClr val="E2E8F0"/>
             </a:solidFill>
-            <a:prstDash val="solid"/>
-          </a:ln>
-        </p:spPr>
-      </p:sp>
-      <p:sp>
-        <p:nvSpPr>
-          <p:cNvPr id="41" name="Text 39"/>
-          <p:cNvSpPr/>
-          <p:nvPr/>
-        </p:nvSpPr>
-        <p:spPr>
-          <a:xfrm>
-            <a:off x="365760" y="4096512"/>
-            <a:ext cx="1371600" cy="804672"/>
-          </a:xfrm>
-          <a:prstGeom prst="rect">
-            <a:avLst/>
-          </a:prstGeom>
-          <a:noFill/>
-          <a:ln/>
-        </p:spPr>
-        <p:txBody>
-          <a:bodyPr wrap="square" lIns="0" tIns="0" rIns="0" bIns="0" rtlCol="0" anchor="ctr"/>
-          <a:lstStyle/>
-          <a:p>
-            <a:pPr algn="ctr" indent="0" marL="0">
-              <a:buNone/>
-            </a:pPr>
-            <a:r>
-              <a:rPr lang="en-US" sz="1100" b="1" dirty="0">
-                <a:solidFill>
-                  <a:srgbClr val="475569"/>
-                </a:solidFill>
-                <a:latin typeface="Trebuchet MS" pitchFamily="34" charset="0"/>
-                <a:ea typeface="Trebuchet MS" pitchFamily="34" charset="-122"/>
-                <a:cs typeface="Trebuchet MS" pitchFamily="34" charset="-120"/>
-              </a:rPr>
-              <a:t>Phonemes</a:t>
-            </a:r>
-            <a:endParaRPr lang="en-US" sz="1100" dirty="0"/>
-          </a:p>
-        </p:txBody>
-      </p:sp>
-      <p:sp>
-        <p:nvSpPr>
-          <p:cNvPr id="42" name="Shape 40"/>
-          <p:cNvSpPr/>
-          <p:nvPr/>
-        </p:nvSpPr>
-        <p:spPr>
-          <a:xfrm>
-            <a:off x="1874520" y="4096512"/>
-            <a:ext cx="6903720" cy="804672"/>
-          </a:xfrm>
-          <a:prstGeom prst="rect">
-            <a:avLst>
-              <a:gd name="adj" fmla="val 6818"/>
-            </a:avLst>
-          </a:prstGeom>
-          <a:solidFill>
-            <a:srgbClr val="F8FAFC"/>
-          </a:solidFill>
-          <a:ln w="12700">
-            <a:solidFill>
-              <a:srgbClr val="E2E8F0"/>
-            </a:solidFill>
             <a:prstDash val="dash"/>
           </a:ln>
         </p:spPr>
       </p:sp>
       <p:sp>
         <p:nvSpPr>
-          <p:cNvPr id="43" name="Text 41"/>
+          <p:cNvPr id="36" name="Text 34"/>
           <p:cNvSpPr/>
           <p:nvPr/>
         </p:nvSpPr>
@@ -15226,7 +15673,7 @@
                 <a:ea typeface="Trebuchet MS" pitchFamily="34" charset="-122"/>
                 <a:cs typeface="Trebuchet MS" pitchFamily="34" charset="-120"/>
               </a:rPr>
-              <a:t>imaginative</a:t>
+              <a:t>narrative</a:t>
             </a:r>
             <a:endParaRPr lang="en-US" sz="2800" dirty="0"/>
           </a:p>
@@ -15365,7 +15812,7 @@
                 <a:ea typeface="Trebuchet MS" pitchFamily="34" charset="-122"/>
                 <a:cs typeface="Trebuchet MS" pitchFamily="34" charset="-120"/>
               </a:rPr>
-              <a:t>imagin</a:t>
+              <a:t>narr</a:t>
             </a:r>
             <a:endParaRPr lang="en-US" sz="1300" dirty="0"/>
           </a:p>
@@ -15404,7 +15851,7 @@
                 <a:ea typeface="Calibri" pitchFamily="34" charset="-122"/>
                 <a:cs typeface="Calibri" pitchFamily="34" charset="-120"/>
               </a:rPr>
-              <a:t>to picture in the mind</a:t>
+              <a:t>to tell a story</a:t>
             </a:r>
             <a:endParaRPr lang="en-US" sz="850" dirty="0"/>
           </a:p>
@@ -15412,46 +15859,7 @@
       </p:sp>
       <p:sp>
         <p:nvSpPr>
-          <p:cNvPr id="19" name="Text 17"/>
-          <p:cNvSpPr/>
-          <p:nvPr/>
-        </p:nvSpPr>
-        <p:spPr>
-          <a:xfrm>
-            <a:off x="2938272" y="2752344"/>
-            <a:ext cx="1828800" cy="182880"/>
-          </a:xfrm>
-          <a:prstGeom prst="rect">
-            <a:avLst/>
-          </a:prstGeom>
-          <a:noFill/>
-          <a:ln/>
-        </p:spPr>
-        <p:txBody>
-          <a:bodyPr wrap="square" lIns="0" tIns="0" rIns="0" bIns="0" rtlCol="0" anchor="t"/>
-          <a:lstStyle/>
-          <a:p>
-            <a:pPr algn="ctr" indent="0" marL="0">
-              <a:buNone/>
-            </a:pPr>
-            <a:r>
-              <a:rPr lang="en-US" sz="700" i="1" dirty="0">
-                <a:solidFill>
-                  <a:srgbClr val="94A3B8"/>
-                </a:solidFill>
-                <a:latin typeface="Calibri" pitchFamily="34" charset="0"/>
-                <a:ea typeface="Calibri" pitchFamily="34" charset="-122"/>
-                <a:cs typeface="Calibri" pitchFamily="34" charset="-120"/>
-              </a:rPr>
-              <a:t>'e' dropped before vowel suffix</a:t>
-            </a:r>
-            <a:endParaRPr lang="en-US" sz="700" dirty="0"/>
-          </a:p>
-        </p:txBody>
-      </p:sp>
-      <p:sp>
-        <p:nvSpPr>
-          <p:cNvPr id="20" name="Shape 18"/>
+          <p:cNvPr id="19" name="Shape 17"/>
           <p:cNvSpPr/>
           <p:nvPr/>
         </p:nvSpPr>
@@ -15485,7 +15893,7 @@
       </p:sp>
       <p:sp>
         <p:nvSpPr>
-          <p:cNvPr id="21" name="Text 19"/>
+          <p:cNvPr id="20" name="Text 18"/>
           <p:cNvSpPr/>
           <p:nvPr/>
         </p:nvSpPr>
@@ -15524,7 +15932,7 @@
       </p:sp>
       <p:sp>
         <p:nvSpPr>
-          <p:cNvPr id="22" name="Text 20"/>
+          <p:cNvPr id="21" name="Text 19"/>
           <p:cNvSpPr/>
           <p:nvPr/>
         </p:nvSpPr>
@@ -15555,7 +15963,7 @@
                 <a:ea typeface="Calibri" pitchFamily="34" charset="-122"/>
                 <a:cs typeface="Calibri" pitchFamily="34" charset="-120"/>
               </a:rPr>
-              <a:t>tending to</a:t>
+              <a:t>tending to, relating to</a:t>
             </a:r>
             <a:endParaRPr lang="en-US" sz="850" dirty="0"/>
           </a:p>
@@ -15563,7 +15971,7 @@
       </p:sp>
       <p:sp>
         <p:nvSpPr>
-          <p:cNvPr id="23" name="Shape 21"/>
+          <p:cNvPr id="22" name="Shape 20"/>
           <p:cNvSpPr/>
           <p:nvPr/>
         </p:nvSpPr>
@@ -15590,7 +15998,7 @@
       </p:sp>
       <p:sp>
         <p:nvSpPr>
-          <p:cNvPr id="24" name="Text 22"/>
+          <p:cNvPr id="23" name="Text 21"/>
           <p:cNvSpPr/>
           <p:nvPr/>
         </p:nvSpPr>
@@ -15629,7 +16037,7 @@
       </p:sp>
       <p:sp>
         <p:nvSpPr>
-          <p:cNvPr id="25" name="Shape 23"/>
+          <p:cNvPr id="24" name="Shape 22"/>
           <p:cNvSpPr/>
           <p:nvPr/>
         </p:nvSpPr>
@@ -15656,14 +16064,14 @@
       </p:sp>
       <p:sp>
         <p:nvSpPr>
-          <p:cNvPr id="26" name="Shape 24"/>
-          <p:cNvSpPr/>
-          <p:nvPr/>
-        </p:nvSpPr>
-        <p:spPr>
-          <a:xfrm>
-            <a:off x="1978152" y="3364992"/>
-            <a:ext cx="1225296" cy="475488"/>
+          <p:cNvPr id="25" name="Shape 23"/>
+          <p:cNvSpPr/>
+          <p:nvPr/>
+        </p:nvSpPr>
+        <p:spPr>
+          <a:xfrm>
+            <a:off x="2313432" y="3364992"/>
+            <a:ext cx="1645920" cy="475488"/>
           </a:xfrm>
           <a:prstGeom prst="rect">
             <a:avLst>
@@ -15683,14 +16091,14 @@
       </p:sp>
       <p:sp>
         <p:nvSpPr>
-          <p:cNvPr id="27" name="Text 25"/>
-          <p:cNvSpPr/>
-          <p:nvPr/>
-        </p:nvSpPr>
-        <p:spPr>
-          <a:xfrm>
-            <a:off x="1978152" y="3364992"/>
-            <a:ext cx="1225296" cy="475488"/>
+          <p:cNvPr id="26" name="Text 24"/>
+          <p:cNvSpPr/>
+          <p:nvPr/>
+        </p:nvSpPr>
+        <p:spPr>
+          <a:xfrm>
+            <a:off x="2313432" y="3364992"/>
+            <a:ext cx="1645920" cy="475488"/>
           </a:xfrm>
           <a:prstGeom prst="rect">
             <a:avLst/>
@@ -15714,7 +16122,7 @@
                 <a:ea typeface="Trebuchet MS" pitchFamily="34" charset="-122"/>
                 <a:cs typeface="Trebuchet MS" pitchFamily="34" charset="-120"/>
               </a:rPr>
-              <a:t>i</a:t>
+              <a:t>nar</a:t>
             </a:r>
             <a:endParaRPr lang="en-US" sz="1400" dirty="0"/>
           </a:p>
@@ -15722,14 +16130,14 @@
       </p:sp>
       <p:sp>
         <p:nvSpPr>
-          <p:cNvPr id="28" name="Text 26"/>
-          <p:cNvSpPr/>
-          <p:nvPr/>
-        </p:nvSpPr>
-        <p:spPr>
-          <a:xfrm>
-            <a:off x="3203448" y="3364992"/>
-            <a:ext cx="76200" cy="475488"/>
+          <p:cNvPr id="27" name="Text 25"/>
+          <p:cNvSpPr/>
+          <p:nvPr/>
+        </p:nvSpPr>
+        <p:spPr>
+          <a:xfrm>
+            <a:off x="3959352" y="3364992"/>
+            <a:ext cx="411480" cy="475488"/>
           </a:xfrm>
           <a:prstGeom prst="rect">
             <a:avLst/>
@@ -15761,14 +16169,14 @@
       </p:sp>
       <p:sp>
         <p:nvSpPr>
-          <p:cNvPr id="29" name="Shape 27"/>
-          <p:cNvSpPr/>
-          <p:nvPr/>
-        </p:nvSpPr>
-        <p:spPr>
-          <a:xfrm>
-            <a:off x="3279648" y="3364992"/>
-            <a:ext cx="1225296" cy="475488"/>
+          <p:cNvPr id="28" name="Shape 26"/>
+          <p:cNvSpPr/>
+          <p:nvPr/>
+        </p:nvSpPr>
+        <p:spPr>
+          <a:xfrm>
+            <a:off x="4370832" y="3364992"/>
+            <a:ext cx="1645920" cy="475488"/>
           </a:xfrm>
           <a:prstGeom prst="rect">
             <a:avLst>
@@ -15788,14 +16196,14 @@
       </p:sp>
       <p:sp>
         <p:nvSpPr>
-          <p:cNvPr id="30" name="Text 28"/>
-          <p:cNvSpPr/>
-          <p:nvPr/>
-        </p:nvSpPr>
-        <p:spPr>
-          <a:xfrm>
-            <a:off x="3279648" y="3364992"/>
-            <a:ext cx="1225296" cy="475488"/>
+          <p:cNvPr id="29" name="Text 27"/>
+          <p:cNvSpPr/>
+          <p:nvPr/>
+        </p:nvSpPr>
+        <p:spPr>
+          <a:xfrm>
+            <a:off x="4370832" y="3364992"/>
+            <a:ext cx="1645920" cy="475488"/>
           </a:xfrm>
           <a:prstGeom prst="rect">
             <a:avLst/>
@@ -15819,7 +16227,7 @@
                 <a:ea typeface="Trebuchet MS" pitchFamily="34" charset="-122"/>
                 <a:cs typeface="Trebuchet MS" pitchFamily="34" charset="-120"/>
               </a:rPr>
-              <a:t>mag</a:t>
+              <a:t>ra</a:t>
             </a:r>
             <a:endParaRPr lang="en-US" sz="1400" dirty="0"/>
           </a:p>
@@ -15827,14 +16235,14 @@
       </p:sp>
       <p:sp>
         <p:nvSpPr>
-          <p:cNvPr id="31" name="Text 29"/>
-          <p:cNvSpPr/>
-          <p:nvPr/>
-        </p:nvSpPr>
-        <p:spPr>
-          <a:xfrm>
-            <a:off x="4504944" y="3364992"/>
-            <a:ext cx="76200" cy="475488"/>
+          <p:cNvPr id="30" name="Text 28"/>
+          <p:cNvSpPr/>
+          <p:nvPr/>
+        </p:nvSpPr>
+        <p:spPr>
+          <a:xfrm>
+            <a:off x="6016752" y="3364992"/>
+            <a:ext cx="411480" cy="475488"/>
           </a:xfrm>
           <a:prstGeom prst="rect">
             <a:avLst/>
@@ -15866,14 +16274,14 @@
       </p:sp>
       <p:sp>
         <p:nvSpPr>
-          <p:cNvPr id="32" name="Shape 30"/>
-          <p:cNvSpPr/>
-          <p:nvPr/>
-        </p:nvSpPr>
-        <p:spPr>
-          <a:xfrm>
-            <a:off x="4581144" y="3364992"/>
-            <a:ext cx="1225296" cy="475488"/>
+          <p:cNvPr id="31" name="Shape 29"/>
+          <p:cNvSpPr/>
+          <p:nvPr/>
+        </p:nvSpPr>
+        <p:spPr>
+          <a:xfrm>
+            <a:off x="6428232" y="3364992"/>
+            <a:ext cx="1645920" cy="475488"/>
           </a:xfrm>
           <a:prstGeom prst="rect">
             <a:avLst>
@@ -15893,14 +16301,14 @@
       </p:sp>
       <p:sp>
         <p:nvSpPr>
-          <p:cNvPr id="33" name="Text 31"/>
-          <p:cNvSpPr/>
-          <p:nvPr/>
-        </p:nvSpPr>
-        <p:spPr>
-          <a:xfrm>
-            <a:off x="4581144" y="3364992"/>
-            <a:ext cx="1225296" cy="475488"/>
+          <p:cNvPr id="32" name="Text 30"/>
+          <p:cNvSpPr/>
+          <p:nvPr/>
+        </p:nvSpPr>
+        <p:spPr>
+          <a:xfrm>
+            <a:off x="6428232" y="3364992"/>
+            <a:ext cx="1645920" cy="475488"/>
           </a:xfrm>
           <a:prstGeom prst="rect">
             <a:avLst/>
@@ -15924,7 +16332,7 @@
                 <a:ea typeface="Trebuchet MS" pitchFamily="34" charset="-122"/>
                 <a:cs typeface="Trebuchet MS" pitchFamily="34" charset="-120"/>
               </a:rPr>
-              <a:t>i</a:t>
+              <a:t>tive</a:t>
             </a:r>
             <a:endParaRPr lang="en-US" sz="1400" dirty="0"/>
           </a:p>
@@ -15932,40 +16340,67 @@
       </p:sp>
       <p:sp>
         <p:nvSpPr>
+          <p:cNvPr id="33" name="Shape 31"/>
+          <p:cNvSpPr/>
+          <p:nvPr/>
+        </p:nvSpPr>
+        <p:spPr>
+          <a:xfrm>
+            <a:off x="365760" y="4096512"/>
+            <a:ext cx="1371600" cy="804672"/>
+          </a:xfrm>
+          <a:prstGeom prst="rect">
+            <a:avLst>
+              <a:gd name="adj" fmla="val 6818"/>
+            </a:avLst>
+          </a:prstGeom>
+          <a:solidFill>
+            <a:srgbClr val="E2E8F0"/>
+          </a:solidFill>
+          <a:ln w="12700">
+            <a:solidFill>
+              <a:srgbClr val="E2E8F0"/>
+            </a:solidFill>
+            <a:prstDash val="solid"/>
+          </a:ln>
+        </p:spPr>
+      </p:sp>
+      <p:sp>
+        <p:nvSpPr>
           <p:cNvPr id="34" name="Text 32"/>
           <p:cNvSpPr/>
           <p:nvPr/>
         </p:nvSpPr>
         <p:spPr>
           <a:xfrm>
-            <a:off x="5806440" y="3364992"/>
-            <a:ext cx="76200" cy="475488"/>
-          </a:xfrm>
-          <a:prstGeom prst="rect">
-            <a:avLst/>
-          </a:prstGeom>
-          <a:noFill/>
-          <a:ln/>
-        </p:spPr>
-        <p:txBody>
-          <a:bodyPr wrap="square" lIns="0" tIns="0" rIns="0" bIns="0" rtlCol="0" anchor="ctr"/>
-          <a:lstStyle/>
-          <a:p>
-            <a:pPr algn="ctr" indent="0" marL="0">
-              <a:buNone/>
-            </a:pPr>
-            <a:r>
-              <a:rPr lang="en-US" sz="1600" b="1" dirty="0">
-                <a:solidFill>
-                  <a:srgbClr val="0D9488"/>
+            <a:off x="365760" y="4096512"/>
+            <a:ext cx="1371600" cy="804672"/>
+          </a:xfrm>
+          <a:prstGeom prst="rect">
+            <a:avLst/>
+          </a:prstGeom>
+          <a:noFill/>
+          <a:ln/>
+        </p:spPr>
+        <p:txBody>
+          <a:bodyPr wrap="square" lIns="0" tIns="0" rIns="0" bIns="0" rtlCol="0" anchor="ctr"/>
+          <a:lstStyle/>
+          <a:p>
+            <a:pPr algn="ctr" indent="0" marL="0">
+              <a:buNone/>
+            </a:pPr>
+            <a:r>
+              <a:rPr lang="en-US" sz="1100" b="1" dirty="0">
+                <a:solidFill>
+                  <a:srgbClr val="475569"/>
                 </a:solidFill>
                 <a:latin typeface="Trebuchet MS" pitchFamily="34" charset="0"/>
                 <a:ea typeface="Trebuchet MS" pitchFamily="34" charset="-122"/>
                 <a:cs typeface="Trebuchet MS" pitchFamily="34" charset="-120"/>
               </a:rPr>
-              <a:t>·</a:t>
-            </a:r>
-            <a:endParaRPr lang="en-US" sz="1600" dirty="0"/>
+              <a:t>Phonemes</a:t>
+            </a:r>
+            <a:endParaRPr lang="en-US" sz="1100" dirty="0"/>
           </a:p>
         </p:txBody>
       </p:sp>
@@ -15977,117 +16412,171 @@
         </p:nvSpPr>
         <p:spPr>
           <a:xfrm>
-            <a:off x="5882640" y="3364992"/>
-            <a:ext cx="1225296" cy="475488"/>
+            <a:off x="1874520" y="4096512"/>
+            <a:ext cx="6903720" cy="804672"/>
           </a:xfrm>
           <a:prstGeom prst="rect">
             <a:avLst>
-              <a:gd name="adj" fmla="val 9615"/>
+              <a:gd name="adj" fmla="val 6818"/>
             </a:avLst>
           </a:prstGeom>
           <a:solidFill>
+            <a:srgbClr val="FCE7F3"/>
+          </a:solidFill>
+          <a:ln w="12700">
+            <a:solidFill>
+              <a:srgbClr val="DB2777"/>
+            </a:solidFill>
+            <a:prstDash val="solid"/>
+          </a:ln>
+        </p:spPr>
+      </p:sp>
+      <p:sp>
+        <p:nvSpPr>
+          <p:cNvPr id="36" name="Shape 34"/>
+          <p:cNvSpPr/>
+          <p:nvPr/>
+        </p:nvSpPr>
+        <p:spPr>
+          <a:xfrm>
+            <a:off x="2023872" y="4169664"/>
+            <a:ext cx="685800" cy="384048"/>
+          </a:xfrm>
+          <a:prstGeom prst="rect">
+            <a:avLst>
+              <a:gd name="adj" fmla="val 9524"/>
+            </a:avLst>
+          </a:prstGeom>
+          <a:solidFill>
             <a:srgbClr val="FFFFFF"/>
           </a:solidFill>
           <a:ln w="12700">
             <a:solidFill>
-              <a:srgbClr val="0D9488"/>
-            </a:solidFill>
-            <a:prstDash val="solid"/>
-          </a:ln>
-        </p:spPr>
-      </p:sp>
-      <p:sp>
-        <p:nvSpPr>
-          <p:cNvPr id="36" name="Text 34"/>
-          <p:cNvSpPr/>
-          <p:nvPr/>
-        </p:nvSpPr>
-        <p:spPr>
-          <a:xfrm>
-            <a:off x="5882640" y="3364992"/>
-            <a:ext cx="1225296" cy="475488"/>
-          </a:xfrm>
-          <a:prstGeom prst="rect">
-            <a:avLst/>
-          </a:prstGeom>
-          <a:noFill/>
-          <a:ln/>
-        </p:spPr>
-        <p:txBody>
-          <a:bodyPr wrap="square" lIns="0" tIns="0" rIns="0" bIns="0" rtlCol="0" anchor="ctr"/>
-          <a:lstStyle/>
-          <a:p>
-            <a:pPr algn="ctr" indent="0" marL="0">
-              <a:buNone/>
-            </a:pPr>
-            <a:r>
-              <a:rPr lang="en-US" sz="1400" b="1" dirty="0">
-                <a:solidFill>
-                  <a:srgbClr val="0D9488"/>
+              <a:srgbClr val="DB2777"/>
+            </a:solidFill>
+            <a:prstDash val="solid"/>
+          </a:ln>
+        </p:spPr>
+      </p:sp>
+      <p:sp>
+        <p:nvSpPr>
+          <p:cNvPr id="37" name="Text 35"/>
+          <p:cNvSpPr/>
+          <p:nvPr/>
+        </p:nvSpPr>
+        <p:spPr>
+          <a:xfrm>
+            <a:off x="2023872" y="4169664"/>
+            <a:ext cx="685800" cy="384048"/>
+          </a:xfrm>
+          <a:prstGeom prst="rect">
+            <a:avLst/>
+          </a:prstGeom>
+          <a:noFill/>
+          <a:ln/>
+        </p:spPr>
+        <p:txBody>
+          <a:bodyPr wrap="square" lIns="0" tIns="0" rIns="0" bIns="0" rtlCol="0" anchor="ctr"/>
+          <a:lstStyle/>
+          <a:p>
+            <a:pPr algn="ctr" indent="0" marL="0">
+              <a:buNone/>
+            </a:pPr>
+            <a:r>
+              <a:rPr lang="en-US" sz="900" b="1" dirty="0">
+                <a:solidFill>
+                  <a:srgbClr val="9D174D"/>
                 </a:solidFill>
                 <a:latin typeface="Trebuchet MS" pitchFamily="34" charset="0"/>
                 <a:ea typeface="Trebuchet MS" pitchFamily="34" charset="-122"/>
                 <a:cs typeface="Trebuchet MS" pitchFamily="34" charset="-120"/>
               </a:rPr>
-              <a:t>na</a:t>
-            </a:r>
-            <a:endParaRPr lang="en-US" sz="1400" dirty="0"/>
-          </a:p>
-        </p:txBody>
-      </p:sp>
-      <p:sp>
-        <p:nvSpPr>
-          <p:cNvPr id="37" name="Text 35"/>
-          <p:cNvSpPr/>
-          <p:nvPr/>
-        </p:nvSpPr>
-        <p:spPr>
-          <a:xfrm>
-            <a:off x="7107936" y="3364992"/>
-            <a:ext cx="76200" cy="475488"/>
-          </a:xfrm>
-          <a:prstGeom prst="rect">
-            <a:avLst/>
-          </a:prstGeom>
-          <a:noFill/>
-          <a:ln/>
-        </p:spPr>
-        <p:txBody>
-          <a:bodyPr wrap="square" lIns="0" tIns="0" rIns="0" bIns="0" rtlCol="0" anchor="ctr"/>
-          <a:lstStyle/>
-          <a:p>
-            <a:pPr algn="ctr" indent="0" marL="0">
-              <a:buNone/>
-            </a:pPr>
-            <a:r>
-              <a:rPr lang="en-US" sz="1600" b="1" dirty="0">
-                <a:solidFill>
-                  <a:srgbClr val="0D9488"/>
+              <a:t>n</a:t>
+            </a:r>
+            <a:endParaRPr lang="en-US" sz="900" dirty="0"/>
+          </a:p>
+        </p:txBody>
+      </p:sp>
+      <p:sp>
+        <p:nvSpPr>
+          <p:cNvPr id="38" name="Shape 36"/>
+          <p:cNvSpPr/>
+          <p:nvPr/>
+        </p:nvSpPr>
+        <p:spPr>
+          <a:xfrm>
+            <a:off x="2831592" y="4169664"/>
+            <a:ext cx="685800" cy="384048"/>
+          </a:xfrm>
+          <a:prstGeom prst="rect">
+            <a:avLst>
+              <a:gd name="adj" fmla="val 9524"/>
+            </a:avLst>
+          </a:prstGeom>
+          <a:solidFill>
+            <a:srgbClr val="FFFFFF"/>
+          </a:solidFill>
+          <a:ln w="12700">
+            <a:solidFill>
+              <a:srgbClr val="DB2777"/>
+            </a:solidFill>
+            <a:prstDash val="solid"/>
+          </a:ln>
+        </p:spPr>
+      </p:sp>
+      <p:sp>
+        <p:nvSpPr>
+          <p:cNvPr id="39" name="Text 37"/>
+          <p:cNvSpPr/>
+          <p:nvPr/>
+        </p:nvSpPr>
+        <p:spPr>
+          <a:xfrm>
+            <a:off x="2831592" y="4169664"/>
+            <a:ext cx="685800" cy="384048"/>
+          </a:xfrm>
+          <a:prstGeom prst="rect">
+            <a:avLst/>
+          </a:prstGeom>
+          <a:noFill/>
+          <a:ln/>
+        </p:spPr>
+        <p:txBody>
+          <a:bodyPr wrap="square" lIns="0" tIns="0" rIns="0" bIns="0" rtlCol="0" anchor="ctr"/>
+          <a:lstStyle/>
+          <a:p>
+            <a:pPr algn="ctr" indent="0" marL="0">
+              <a:buNone/>
+            </a:pPr>
+            <a:r>
+              <a:rPr lang="en-US" sz="900" b="1" dirty="0">
+                <a:solidFill>
+                  <a:srgbClr val="9D174D"/>
                 </a:solidFill>
                 <a:latin typeface="Trebuchet MS" pitchFamily="34" charset="0"/>
                 <a:ea typeface="Trebuchet MS" pitchFamily="34" charset="-122"/>
                 <a:cs typeface="Trebuchet MS" pitchFamily="34" charset="-120"/>
               </a:rPr>
-              <a:t>·</a:t>
-            </a:r>
-            <a:endParaRPr lang="en-US" sz="1600" dirty="0"/>
-          </a:p>
-        </p:txBody>
-      </p:sp>
-      <p:sp>
-        <p:nvSpPr>
-          <p:cNvPr id="38" name="Shape 36"/>
-          <p:cNvSpPr/>
-          <p:nvPr/>
-        </p:nvSpPr>
-        <p:spPr>
-          <a:xfrm>
-            <a:off x="7184136" y="3364992"/>
-            <a:ext cx="1225296" cy="475488"/>
+              <a:t>ar</a:t>
+            </a:r>
+            <a:endParaRPr lang="en-US" sz="900" dirty="0"/>
+          </a:p>
+        </p:txBody>
+      </p:sp>
+      <p:sp>
+        <p:nvSpPr>
+          <p:cNvPr id="40" name="Shape 38"/>
+          <p:cNvSpPr/>
+          <p:nvPr/>
+        </p:nvSpPr>
+        <p:spPr>
+          <a:xfrm>
+            <a:off x="3639312" y="4169664"/>
+            <a:ext cx="685800" cy="384048"/>
           </a:xfrm>
           <a:prstGeom prst="rect">
             <a:avLst>
-              <a:gd name="adj" fmla="val 9615"/>
+              <a:gd name="adj" fmla="val 9524"/>
             </a:avLst>
           </a:prstGeom>
           <a:solidFill>
@@ -16095,154 +16584,127 @@
           </a:solidFill>
           <a:ln w="12700">
             <a:solidFill>
-              <a:srgbClr val="0D9488"/>
-            </a:solidFill>
-            <a:prstDash val="solid"/>
-          </a:ln>
-        </p:spPr>
-      </p:sp>
-      <p:sp>
-        <p:nvSpPr>
-          <p:cNvPr id="39" name="Text 37"/>
-          <p:cNvSpPr/>
-          <p:nvPr/>
-        </p:nvSpPr>
-        <p:spPr>
-          <a:xfrm>
-            <a:off x="7184136" y="3364992"/>
-            <a:ext cx="1225296" cy="475488"/>
-          </a:xfrm>
-          <a:prstGeom prst="rect">
-            <a:avLst/>
-          </a:prstGeom>
-          <a:noFill/>
-          <a:ln/>
-        </p:spPr>
-        <p:txBody>
-          <a:bodyPr wrap="square" lIns="0" tIns="0" rIns="0" bIns="0" rtlCol="0" anchor="ctr"/>
-          <a:lstStyle/>
-          <a:p>
-            <a:pPr algn="ctr" indent="0" marL="0">
-              <a:buNone/>
-            </a:pPr>
-            <a:r>
-              <a:rPr lang="en-US" sz="1400" b="1" dirty="0">
-                <a:solidFill>
-                  <a:srgbClr val="0D9488"/>
+              <a:srgbClr val="DB2777"/>
+            </a:solidFill>
+            <a:prstDash val="solid"/>
+          </a:ln>
+        </p:spPr>
+      </p:sp>
+      <p:sp>
+        <p:nvSpPr>
+          <p:cNvPr id="41" name="Text 39"/>
+          <p:cNvSpPr/>
+          <p:nvPr/>
+        </p:nvSpPr>
+        <p:spPr>
+          <a:xfrm>
+            <a:off x="3639312" y="4169664"/>
+            <a:ext cx="685800" cy="384048"/>
+          </a:xfrm>
+          <a:prstGeom prst="rect">
+            <a:avLst/>
+          </a:prstGeom>
+          <a:noFill/>
+          <a:ln/>
+        </p:spPr>
+        <p:txBody>
+          <a:bodyPr wrap="square" lIns="0" tIns="0" rIns="0" bIns="0" rtlCol="0" anchor="ctr"/>
+          <a:lstStyle/>
+          <a:p>
+            <a:pPr algn="ctr" indent="0" marL="0">
+              <a:buNone/>
+            </a:pPr>
+            <a:r>
+              <a:rPr lang="en-US" sz="900" b="1" dirty="0">
+                <a:solidFill>
+                  <a:srgbClr val="9D174D"/>
                 </a:solidFill>
                 <a:latin typeface="Trebuchet MS" pitchFamily="34" charset="0"/>
                 <a:ea typeface="Trebuchet MS" pitchFamily="34" charset="-122"/>
                 <a:cs typeface="Trebuchet MS" pitchFamily="34" charset="-120"/>
               </a:rPr>
-              <a:t>tive</a:t>
-            </a:r>
-            <a:endParaRPr lang="en-US" sz="1400" dirty="0"/>
-          </a:p>
-        </p:txBody>
-      </p:sp>
-      <p:sp>
-        <p:nvSpPr>
-          <p:cNvPr id="40" name="Shape 38"/>
-          <p:cNvSpPr/>
-          <p:nvPr/>
-        </p:nvSpPr>
-        <p:spPr>
-          <a:xfrm>
-            <a:off x="365760" y="4096512"/>
-            <a:ext cx="1371600" cy="804672"/>
+              <a:t>r</a:t>
+            </a:r>
+            <a:endParaRPr lang="en-US" sz="900" dirty="0"/>
+          </a:p>
+        </p:txBody>
+      </p:sp>
+      <p:sp>
+        <p:nvSpPr>
+          <p:cNvPr id="42" name="Shape 40"/>
+          <p:cNvSpPr/>
+          <p:nvPr/>
+        </p:nvSpPr>
+        <p:spPr>
+          <a:xfrm>
+            <a:off x="4447032" y="4169664"/>
+            <a:ext cx="685800" cy="384048"/>
           </a:xfrm>
           <a:prstGeom prst="rect">
             <a:avLst>
-              <a:gd name="adj" fmla="val 6818"/>
+              <a:gd name="adj" fmla="val 9524"/>
             </a:avLst>
           </a:prstGeom>
           <a:solidFill>
-            <a:srgbClr val="E2E8F0"/>
-          </a:solidFill>
-          <a:ln w="12700">
-            <a:solidFill>
-              <a:srgbClr val="E2E8F0"/>
-            </a:solidFill>
-            <a:prstDash val="solid"/>
-          </a:ln>
-        </p:spPr>
-      </p:sp>
-      <p:sp>
-        <p:nvSpPr>
-          <p:cNvPr id="41" name="Text 39"/>
-          <p:cNvSpPr/>
-          <p:nvPr/>
-        </p:nvSpPr>
-        <p:spPr>
-          <a:xfrm>
-            <a:off x="365760" y="4096512"/>
-            <a:ext cx="1371600" cy="804672"/>
-          </a:xfrm>
-          <a:prstGeom prst="rect">
-            <a:avLst/>
-          </a:prstGeom>
-          <a:noFill/>
-          <a:ln/>
-        </p:spPr>
-        <p:txBody>
-          <a:bodyPr wrap="square" lIns="0" tIns="0" rIns="0" bIns="0" rtlCol="0" anchor="ctr"/>
-          <a:lstStyle/>
-          <a:p>
-            <a:pPr algn="ctr" indent="0" marL="0">
-              <a:buNone/>
-            </a:pPr>
-            <a:r>
-              <a:rPr lang="en-US" sz="1100" b="1" dirty="0">
-                <a:solidFill>
-                  <a:srgbClr val="475569"/>
+            <a:srgbClr val="FFFFFF"/>
+          </a:solidFill>
+          <a:ln w="12700">
+            <a:solidFill>
+              <a:srgbClr val="DB2777"/>
+            </a:solidFill>
+            <a:prstDash val="solid"/>
+          </a:ln>
+        </p:spPr>
+      </p:sp>
+      <p:sp>
+        <p:nvSpPr>
+          <p:cNvPr id="43" name="Text 41"/>
+          <p:cNvSpPr/>
+          <p:nvPr/>
+        </p:nvSpPr>
+        <p:spPr>
+          <a:xfrm>
+            <a:off x="4447032" y="4169664"/>
+            <a:ext cx="685800" cy="384048"/>
+          </a:xfrm>
+          <a:prstGeom prst="rect">
+            <a:avLst/>
+          </a:prstGeom>
+          <a:noFill/>
+          <a:ln/>
+        </p:spPr>
+        <p:txBody>
+          <a:bodyPr wrap="square" lIns="0" tIns="0" rIns="0" bIns="0" rtlCol="0" anchor="ctr"/>
+          <a:lstStyle/>
+          <a:p>
+            <a:pPr algn="ctr" indent="0" marL="0">
+              <a:buNone/>
+            </a:pPr>
+            <a:r>
+              <a:rPr lang="en-US" sz="900" b="1" dirty="0">
+                <a:solidFill>
+                  <a:srgbClr val="9D174D"/>
                 </a:solidFill>
                 <a:latin typeface="Trebuchet MS" pitchFamily="34" charset="0"/>
                 <a:ea typeface="Trebuchet MS" pitchFamily="34" charset="-122"/>
                 <a:cs typeface="Trebuchet MS" pitchFamily="34" charset="-120"/>
               </a:rPr>
-              <a:t>Phonemes</a:t>
-            </a:r>
-            <a:endParaRPr lang="en-US" sz="1100" dirty="0"/>
-          </a:p>
-        </p:txBody>
-      </p:sp>
-      <p:sp>
-        <p:nvSpPr>
-          <p:cNvPr id="42" name="Shape 40"/>
-          <p:cNvSpPr/>
-          <p:nvPr/>
-        </p:nvSpPr>
-        <p:spPr>
-          <a:xfrm>
-            <a:off x="1874520" y="4096512"/>
-            <a:ext cx="6903720" cy="804672"/>
-          </a:xfrm>
-          <a:prstGeom prst="rect">
-            <a:avLst>
-              <a:gd name="adj" fmla="val 6818"/>
-            </a:avLst>
-          </a:prstGeom>
-          <a:solidFill>
-            <a:srgbClr val="FCE7F3"/>
-          </a:solidFill>
-          <a:ln w="12700">
-            <a:solidFill>
-              <a:srgbClr val="DB2777"/>
-            </a:solidFill>
-            <a:prstDash val="solid"/>
-          </a:ln>
-        </p:spPr>
-      </p:sp>
-      <p:sp>
-        <p:nvSpPr>
-          <p:cNvPr id="43" name="Shape 41"/>
-          <p:cNvSpPr/>
-          <p:nvPr/>
-        </p:nvSpPr>
-        <p:spPr>
-          <a:xfrm>
-            <a:off x="1951828" y="4169664"/>
-            <a:ext cx="603504" cy="384048"/>
+              <a:t>a</a:t>
+            </a:r>
+            <a:endParaRPr lang="en-US" sz="900" dirty="0"/>
+          </a:p>
+        </p:txBody>
+      </p:sp>
+      <p:sp>
+        <p:nvSpPr>
+          <p:cNvPr id="44" name="Shape 42"/>
+          <p:cNvSpPr/>
+          <p:nvPr/>
+        </p:nvSpPr>
+        <p:spPr>
+          <a:xfrm>
+            <a:off x="5254752" y="4169664"/>
+            <a:ext cx="685800" cy="384048"/>
           </a:xfrm>
           <a:prstGeom prst="rect">
             <a:avLst>
@@ -16262,14 +16724,14 @@
       </p:sp>
       <p:sp>
         <p:nvSpPr>
-          <p:cNvPr id="44" name="Text 42"/>
-          <p:cNvSpPr/>
-          <p:nvPr/>
-        </p:nvSpPr>
-        <p:spPr>
-          <a:xfrm>
-            <a:off x="1951828" y="4169664"/>
-            <a:ext cx="603504" cy="384048"/>
+          <p:cNvPr id="45" name="Text 43"/>
+          <p:cNvSpPr/>
+          <p:nvPr/>
+        </p:nvSpPr>
+        <p:spPr>
+          <a:xfrm>
+            <a:off x="5254752" y="4169664"/>
+            <a:ext cx="685800" cy="384048"/>
           </a:xfrm>
           <a:prstGeom prst="rect">
             <a:avLst/>
@@ -16293,7 +16755,7 @@
                 <a:ea typeface="Trebuchet MS" pitchFamily="34" charset="-122"/>
                 <a:cs typeface="Trebuchet MS" pitchFamily="34" charset="-120"/>
               </a:rPr>
-              <a:t>i</a:t>
+              <a:t>t</a:t>
             </a:r>
             <a:endParaRPr lang="en-US" sz="900" dirty="0"/>
           </a:p>
@@ -16301,14 +16763,14 @@
       </p:sp>
       <p:sp>
         <p:nvSpPr>
-          <p:cNvPr id="45" name="Shape 43"/>
-          <p:cNvSpPr/>
-          <p:nvPr/>
-        </p:nvSpPr>
-        <p:spPr>
-          <a:xfrm>
-            <a:off x="2605209" y="4169664"/>
-            <a:ext cx="603504" cy="384048"/>
+          <p:cNvPr id="46" name="Shape 44"/>
+          <p:cNvSpPr/>
+          <p:nvPr/>
+        </p:nvSpPr>
+        <p:spPr>
+          <a:xfrm>
+            <a:off x="6062472" y="4169664"/>
+            <a:ext cx="685800" cy="384048"/>
           </a:xfrm>
           <a:prstGeom prst="rect">
             <a:avLst>
@@ -16328,14 +16790,14 @@
       </p:sp>
       <p:sp>
         <p:nvSpPr>
-          <p:cNvPr id="46" name="Text 44"/>
-          <p:cNvSpPr/>
-          <p:nvPr/>
-        </p:nvSpPr>
-        <p:spPr>
-          <a:xfrm>
-            <a:off x="2605209" y="4169664"/>
-            <a:ext cx="603504" cy="384048"/>
+          <p:cNvPr id="47" name="Text 45"/>
+          <p:cNvSpPr/>
+          <p:nvPr/>
+        </p:nvSpPr>
+        <p:spPr>
+          <a:xfrm>
+            <a:off x="6062472" y="4169664"/>
+            <a:ext cx="685800" cy="384048"/>
           </a:xfrm>
           <a:prstGeom prst="rect">
             <a:avLst/>
@@ -16359,7 +16821,7 @@
                 <a:ea typeface="Trebuchet MS" pitchFamily="34" charset="-122"/>
                 <a:cs typeface="Trebuchet MS" pitchFamily="34" charset="-120"/>
               </a:rPr>
-              <a:t>m</a:t>
+              <a:t>i</a:t>
             </a:r>
             <a:endParaRPr lang="en-US" sz="900" dirty="0"/>
           </a:p>
@@ -16367,14 +16829,14 @@
       </p:sp>
       <p:sp>
         <p:nvSpPr>
-          <p:cNvPr id="47" name="Shape 45"/>
-          <p:cNvSpPr/>
-          <p:nvPr/>
-        </p:nvSpPr>
-        <p:spPr>
-          <a:xfrm>
-            <a:off x="3258589" y="4169664"/>
-            <a:ext cx="603504" cy="384048"/>
+          <p:cNvPr id="48" name="Shape 46"/>
+          <p:cNvSpPr/>
+          <p:nvPr/>
+        </p:nvSpPr>
+        <p:spPr>
+          <a:xfrm>
+            <a:off x="6870192" y="4169664"/>
+            <a:ext cx="685800" cy="384048"/>
           </a:xfrm>
           <a:prstGeom prst="rect">
             <a:avLst>
@@ -16394,14 +16856,14 @@
       </p:sp>
       <p:sp>
         <p:nvSpPr>
-          <p:cNvPr id="48" name="Text 46"/>
-          <p:cNvSpPr/>
-          <p:nvPr/>
-        </p:nvSpPr>
-        <p:spPr>
-          <a:xfrm>
-            <a:off x="3258589" y="4169664"/>
-            <a:ext cx="603504" cy="384048"/>
+          <p:cNvPr id="49" name="Text 47"/>
+          <p:cNvSpPr/>
+          <p:nvPr/>
+        </p:nvSpPr>
+        <p:spPr>
+          <a:xfrm>
+            <a:off x="6870192" y="4169664"/>
+            <a:ext cx="685800" cy="384048"/>
           </a:xfrm>
           <a:prstGeom prst="rect">
             <a:avLst/>
@@ -16425,7 +16887,7 @@
                 <a:ea typeface="Trebuchet MS" pitchFamily="34" charset="-122"/>
                 <a:cs typeface="Trebuchet MS" pitchFamily="34" charset="-120"/>
               </a:rPr>
-              <a:t>a</a:t>
+              <a:t>v</a:t>
             </a:r>
             <a:endParaRPr lang="en-US" sz="900" dirty="0"/>
           </a:p>
@@ -16433,14 +16895,14 @@
       </p:sp>
       <p:sp>
         <p:nvSpPr>
-          <p:cNvPr id="49" name="Shape 47"/>
-          <p:cNvSpPr/>
-          <p:nvPr/>
-        </p:nvSpPr>
-        <p:spPr>
-          <a:xfrm>
-            <a:off x="3911969" y="4169664"/>
-            <a:ext cx="603504" cy="384048"/>
+          <p:cNvPr id="50" name="Shape 48"/>
+          <p:cNvSpPr/>
+          <p:nvPr/>
+        </p:nvSpPr>
+        <p:spPr>
+          <a:xfrm>
+            <a:off x="7677912" y="4169664"/>
+            <a:ext cx="685800" cy="384048"/>
           </a:xfrm>
           <a:prstGeom prst="rect">
             <a:avLst>
@@ -16460,14 +16922,14 @@
       </p:sp>
       <p:sp>
         <p:nvSpPr>
-          <p:cNvPr id="50" name="Text 48"/>
-          <p:cNvSpPr/>
-          <p:nvPr/>
-        </p:nvSpPr>
-        <p:spPr>
-          <a:xfrm>
-            <a:off x="3911969" y="4169664"/>
-            <a:ext cx="603504" cy="384048"/>
+          <p:cNvPr id="51" name="Text 49"/>
+          <p:cNvSpPr/>
+          <p:nvPr/>
+        </p:nvSpPr>
+        <p:spPr>
+          <a:xfrm>
+            <a:off x="7677912" y="4169664"/>
+            <a:ext cx="685800" cy="384048"/>
           </a:xfrm>
           <a:prstGeom prst="rect">
             <a:avLst/>
@@ -16491,7 +16953,7 @@
                 <a:ea typeface="Trebuchet MS" pitchFamily="34" charset="-122"/>
                 <a:cs typeface="Trebuchet MS" pitchFamily="34" charset="-120"/>
               </a:rPr>
-              <a:t>g</a:t>
+              <a:t>e</a:t>
             </a:r>
             <a:endParaRPr lang="en-US" sz="900" dirty="0"/>
           </a:p>
@@ -16499,410 +16961,14 @@
       </p:sp>
       <p:sp>
         <p:nvSpPr>
-          <p:cNvPr id="51" name="Shape 49"/>
-          <p:cNvSpPr/>
-          <p:nvPr/>
-        </p:nvSpPr>
-        <p:spPr>
-          <a:xfrm>
-            <a:off x="4565350" y="4169664"/>
-            <a:ext cx="603504" cy="384048"/>
-          </a:xfrm>
-          <a:prstGeom prst="rect">
-            <a:avLst>
-              <a:gd name="adj" fmla="val 9524"/>
-            </a:avLst>
-          </a:prstGeom>
-          <a:solidFill>
-            <a:srgbClr val="FFFFFF"/>
-          </a:solidFill>
-          <a:ln w="12700">
-            <a:solidFill>
-              <a:srgbClr val="DB2777"/>
-            </a:solidFill>
-            <a:prstDash val="solid"/>
-          </a:ln>
-        </p:spPr>
-      </p:sp>
-      <p:sp>
-        <p:nvSpPr>
           <p:cNvPr id="52" name="Text 50"/>
           <p:cNvSpPr/>
           <p:nvPr/>
         </p:nvSpPr>
         <p:spPr>
           <a:xfrm>
-            <a:off x="4565350" y="4169664"/>
-            <a:ext cx="603504" cy="384048"/>
-          </a:xfrm>
-          <a:prstGeom prst="rect">
-            <a:avLst/>
-          </a:prstGeom>
-          <a:noFill/>
-          <a:ln/>
-        </p:spPr>
-        <p:txBody>
-          <a:bodyPr wrap="square" lIns="0" tIns="0" rIns="0" bIns="0" rtlCol="0" anchor="ctr"/>
-          <a:lstStyle/>
-          <a:p>
-            <a:pPr algn="ctr" indent="0" marL="0">
-              <a:buNone/>
-            </a:pPr>
-            <a:r>
-              <a:rPr lang="en-US" sz="900" b="1" dirty="0">
-                <a:solidFill>
-                  <a:srgbClr val="9D174D"/>
-                </a:solidFill>
-                <a:latin typeface="Trebuchet MS" pitchFamily="34" charset="0"/>
-                <a:ea typeface="Trebuchet MS" pitchFamily="34" charset="-122"/>
-                <a:cs typeface="Trebuchet MS" pitchFamily="34" charset="-120"/>
-              </a:rPr>
-              <a:t>i</a:t>
-            </a:r>
-            <a:endParaRPr lang="en-US" sz="900" dirty="0"/>
-          </a:p>
-        </p:txBody>
-      </p:sp>
-      <p:sp>
-        <p:nvSpPr>
-          <p:cNvPr id="53" name="Shape 51"/>
-          <p:cNvSpPr/>
-          <p:nvPr/>
-        </p:nvSpPr>
-        <p:spPr>
-          <a:xfrm>
-            <a:off x="5218730" y="4169664"/>
-            <a:ext cx="603504" cy="384048"/>
-          </a:xfrm>
-          <a:prstGeom prst="rect">
-            <a:avLst>
-              <a:gd name="adj" fmla="val 9524"/>
-            </a:avLst>
-          </a:prstGeom>
-          <a:solidFill>
-            <a:srgbClr val="FFFFFF"/>
-          </a:solidFill>
-          <a:ln w="12700">
-            <a:solidFill>
-              <a:srgbClr val="DB2777"/>
-            </a:solidFill>
-            <a:prstDash val="solid"/>
-          </a:ln>
-        </p:spPr>
-      </p:sp>
-      <p:sp>
-        <p:nvSpPr>
-          <p:cNvPr id="54" name="Text 52"/>
-          <p:cNvSpPr/>
-          <p:nvPr/>
-        </p:nvSpPr>
-        <p:spPr>
-          <a:xfrm>
-            <a:off x="5218730" y="4169664"/>
-            <a:ext cx="603504" cy="384048"/>
-          </a:xfrm>
-          <a:prstGeom prst="rect">
-            <a:avLst/>
-          </a:prstGeom>
-          <a:noFill/>
-          <a:ln/>
-        </p:spPr>
-        <p:txBody>
-          <a:bodyPr wrap="square" lIns="0" tIns="0" rIns="0" bIns="0" rtlCol="0" anchor="ctr"/>
-          <a:lstStyle/>
-          <a:p>
-            <a:pPr algn="ctr" indent="0" marL="0">
-              <a:buNone/>
-            </a:pPr>
-            <a:r>
-              <a:rPr lang="en-US" sz="900" b="1" dirty="0">
-                <a:solidFill>
-                  <a:srgbClr val="9D174D"/>
-                </a:solidFill>
-                <a:latin typeface="Trebuchet MS" pitchFamily="34" charset="0"/>
-                <a:ea typeface="Trebuchet MS" pitchFamily="34" charset="-122"/>
-                <a:cs typeface="Trebuchet MS" pitchFamily="34" charset="-120"/>
-              </a:rPr>
-              <a:t>n</a:t>
-            </a:r>
-            <a:endParaRPr lang="en-US" sz="900" dirty="0"/>
-          </a:p>
-        </p:txBody>
-      </p:sp>
-      <p:sp>
-        <p:nvSpPr>
-          <p:cNvPr id="55" name="Shape 53"/>
-          <p:cNvSpPr/>
-          <p:nvPr/>
-        </p:nvSpPr>
-        <p:spPr>
-          <a:xfrm>
-            <a:off x="5872111" y="4169664"/>
-            <a:ext cx="603504" cy="384048"/>
-          </a:xfrm>
-          <a:prstGeom prst="rect">
-            <a:avLst>
-              <a:gd name="adj" fmla="val 9524"/>
-            </a:avLst>
-          </a:prstGeom>
-          <a:solidFill>
-            <a:srgbClr val="FFFFFF"/>
-          </a:solidFill>
-          <a:ln w="12700">
-            <a:solidFill>
-              <a:srgbClr val="DB2777"/>
-            </a:solidFill>
-            <a:prstDash val="solid"/>
-          </a:ln>
-        </p:spPr>
-      </p:sp>
-      <p:sp>
-        <p:nvSpPr>
-          <p:cNvPr id="56" name="Text 54"/>
-          <p:cNvSpPr/>
-          <p:nvPr/>
-        </p:nvSpPr>
-        <p:spPr>
-          <a:xfrm>
-            <a:off x="5872111" y="4169664"/>
-            <a:ext cx="603504" cy="384048"/>
-          </a:xfrm>
-          <a:prstGeom prst="rect">
-            <a:avLst/>
-          </a:prstGeom>
-          <a:noFill/>
-          <a:ln/>
-        </p:spPr>
-        <p:txBody>
-          <a:bodyPr wrap="square" lIns="0" tIns="0" rIns="0" bIns="0" rtlCol="0" anchor="ctr"/>
-          <a:lstStyle/>
-          <a:p>
-            <a:pPr algn="ctr" indent="0" marL="0">
-              <a:buNone/>
-            </a:pPr>
-            <a:r>
-              <a:rPr lang="en-US" sz="900" b="1" dirty="0">
-                <a:solidFill>
-                  <a:srgbClr val="9D174D"/>
-                </a:solidFill>
-                <a:latin typeface="Trebuchet MS" pitchFamily="34" charset="0"/>
-                <a:ea typeface="Trebuchet MS" pitchFamily="34" charset="-122"/>
-                <a:cs typeface="Trebuchet MS" pitchFamily="34" charset="-120"/>
-              </a:rPr>
-              <a:t>a</a:t>
-            </a:r>
-            <a:endParaRPr lang="en-US" sz="900" dirty="0"/>
-          </a:p>
-        </p:txBody>
-      </p:sp>
-      <p:sp>
-        <p:nvSpPr>
-          <p:cNvPr id="57" name="Shape 55"/>
-          <p:cNvSpPr/>
-          <p:nvPr/>
-        </p:nvSpPr>
-        <p:spPr>
-          <a:xfrm>
-            <a:off x="6525491" y="4169664"/>
-            <a:ext cx="603504" cy="384048"/>
-          </a:xfrm>
-          <a:prstGeom prst="rect">
-            <a:avLst>
-              <a:gd name="adj" fmla="val 9524"/>
-            </a:avLst>
-          </a:prstGeom>
-          <a:solidFill>
-            <a:srgbClr val="FFFFFF"/>
-          </a:solidFill>
-          <a:ln w="12700">
-            <a:solidFill>
-              <a:srgbClr val="DB2777"/>
-            </a:solidFill>
-            <a:prstDash val="solid"/>
-          </a:ln>
-        </p:spPr>
-      </p:sp>
-      <p:sp>
-        <p:nvSpPr>
-          <p:cNvPr id="58" name="Text 56"/>
-          <p:cNvSpPr/>
-          <p:nvPr/>
-        </p:nvSpPr>
-        <p:spPr>
-          <a:xfrm>
-            <a:off x="6525491" y="4169664"/>
-            <a:ext cx="603504" cy="384048"/>
-          </a:xfrm>
-          <a:prstGeom prst="rect">
-            <a:avLst/>
-          </a:prstGeom>
-          <a:noFill/>
-          <a:ln/>
-        </p:spPr>
-        <p:txBody>
-          <a:bodyPr wrap="square" lIns="0" tIns="0" rIns="0" bIns="0" rtlCol="0" anchor="ctr"/>
-          <a:lstStyle/>
-          <a:p>
-            <a:pPr algn="ctr" indent="0" marL="0">
-              <a:buNone/>
-            </a:pPr>
-            <a:r>
-              <a:rPr lang="en-US" sz="900" b="1" dirty="0">
-                <a:solidFill>
-                  <a:srgbClr val="9D174D"/>
-                </a:solidFill>
-                <a:latin typeface="Trebuchet MS" pitchFamily="34" charset="0"/>
-                <a:ea typeface="Trebuchet MS" pitchFamily="34" charset="-122"/>
-                <a:cs typeface="Trebuchet MS" pitchFamily="34" charset="-120"/>
-              </a:rPr>
-              <a:t>t</a:t>
-            </a:r>
-            <a:endParaRPr lang="en-US" sz="900" dirty="0"/>
-          </a:p>
-        </p:txBody>
-      </p:sp>
-      <p:sp>
-        <p:nvSpPr>
-          <p:cNvPr id="59" name="Shape 57"/>
-          <p:cNvSpPr/>
-          <p:nvPr/>
-        </p:nvSpPr>
-        <p:spPr>
-          <a:xfrm>
-            <a:off x="7178871" y="4169664"/>
-            <a:ext cx="603504" cy="384048"/>
-          </a:xfrm>
-          <a:prstGeom prst="rect">
-            <a:avLst>
-              <a:gd name="adj" fmla="val 9524"/>
-            </a:avLst>
-          </a:prstGeom>
-          <a:solidFill>
-            <a:srgbClr val="FFFFFF"/>
-          </a:solidFill>
-          <a:ln w="12700">
-            <a:solidFill>
-              <a:srgbClr val="DB2777"/>
-            </a:solidFill>
-            <a:prstDash val="solid"/>
-          </a:ln>
-        </p:spPr>
-      </p:sp>
-      <p:sp>
-        <p:nvSpPr>
-          <p:cNvPr id="60" name="Text 58"/>
-          <p:cNvSpPr/>
-          <p:nvPr/>
-        </p:nvSpPr>
-        <p:spPr>
-          <a:xfrm>
-            <a:off x="7178871" y="4169664"/>
-            <a:ext cx="603504" cy="384048"/>
-          </a:xfrm>
-          <a:prstGeom prst="rect">
-            <a:avLst/>
-          </a:prstGeom>
-          <a:noFill/>
-          <a:ln/>
-        </p:spPr>
-        <p:txBody>
-          <a:bodyPr wrap="square" lIns="0" tIns="0" rIns="0" bIns="0" rtlCol="0" anchor="ctr"/>
-          <a:lstStyle/>
-          <a:p>
-            <a:pPr algn="ctr" indent="0" marL="0">
-              <a:buNone/>
-            </a:pPr>
-            <a:r>
-              <a:rPr lang="en-US" sz="900" b="1" dirty="0">
-                <a:solidFill>
-                  <a:srgbClr val="9D174D"/>
-                </a:solidFill>
-                <a:latin typeface="Trebuchet MS" pitchFamily="34" charset="0"/>
-                <a:ea typeface="Trebuchet MS" pitchFamily="34" charset="-122"/>
-                <a:cs typeface="Trebuchet MS" pitchFamily="34" charset="-120"/>
-              </a:rPr>
-              <a:t>i</a:t>
-            </a:r>
-            <a:endParaRPr lang="en-US" sz="900" dirty="0"/>
-          </a:p>
-        </p:txBody>
-      </p:sp>
-      <p:sp>
-        <p:nvSpPr>
-          <p:cNvPr id="61" name="Shape 59"/>
-          <p:cNvSpPr/>
-          <p:nvPr/>
-        </p:nvSpPr>
-        <p:spPr>
-          <a:xfrm>
-            <a:off x="7832252" y="4169664"/>
-            <a:ext cx="603504" cy="384048"/>
-          </a:xfrm>
-          <a:prstGeom prst="rect">
-            <a:avLst>
-              <a:gd name="adj" fmla="val 9524"/>
-            </a:avLst>
-          </a:prstGeom>
-          <a:solidFill>
-            <a:srgbClr val="FFFFFF"/>
-          </a:solidFill>
-          <a:ln w="12700">
-            <a:solidFill>
-              <a:srgbClr val="DB2777"/>
-            </a:solidFill>
-            <a:prstDash val="solid"/>
-          </a:ln>
-        </p:spPr>
-      </p:sp>
-      <p:sp>
-        <p:nvSpPr>
-          <p:cNvPr id="62" name="Text 60"/>
-          <p:cNvSpPr/>
-          <p:nvPr/>
-        </p:nvSpPr>
-        <p:spPr>
-          <a:xfrm>
-            <a:off x="7832252" y="4169664"/>
-            <a:ext cx="603504" cy="384048"/>
-          </a:xfrm>
-          <a:prstGeom prst="rect">
-            <a:avLst/>
-          </a:prstGeom>
-          <a:noFill/>
-          <a:ln/>
-        </p:spPr>
-        <p:txBody>
-          <a:bodyPr wrap="square" lIns="0" tIns="0" rIns="0" bIns="0" rtlCol="0" anchor="ctr"/>
-          <a:lstStyle/>
-          <a:p>
-            <a:pPr algn="ctr" indent="0" marL="0">
-              <a:buNone/>
-            </a:pPr>
-            <a:r>
-              <a:rPr lang="en-US" sz="900" b="1" dirty="0">
-                <a:solidFill>
-                  <a:srgbClr val="9D174D"/>
-                </a:solidFill>
-                <a:latin typeface="Trebuchet MS" pitchFamily="34" charset="0"/>
-                <a:ea typeface="Trebuchet MS" pitchFamily="34" charset="-122"/>
-                <a:cs typeface="Trebuchet MS" pitchFamily="34" charset="-120"/>
-              </a:rPr>
-              <a:t>ve</a:t>
-            </a:r>
-            <a:endParaRPr lang="en-US" sz="900" dirty="0"/>
-          </a:p>
-        </p:txBody>
-      </p:sp>
-      <p:sp>
-        <p:nvSpPr>
-          <p:cNvPr id="63" name="Text 61"/>
-          <p:cNvSpPr/>
-          <p:nvPr/>
-        </p:nvSpPr>
-        <p:spPr>
-          <a:xfrm>
-            <a:off x="7832252" y="4572000"/>
-            <a:ext cx="603504" cy="219456"/>
+            <a:off x="7677912" y="4572000"/>
+            <a:ext cx="685800" cy="219456"/>
           </a:xfrm>
           <a:prstGeom prst="rect">
             <a:avLst/>
@@ -16926,7 +16992,7 @@
                 <a:ea typeface="Calibri" pitchFamily="34" charset="-122"/>
                 <a:cs typeface="Calibri" pitchFamily="34" charset="-120"/>
               </a:rPr>
-              <a:t>/v/</a:t>
+              <a:t>silent</a:t>
             </a:r>
             <a:endParaRPr lang="en-US" sz="750" dirty="0"/>
           </a:p>
@@ -18300,7 +18366,7 @@
                 <a:ea typeface="Calibri" pitchFamily="34" charset="-122"/>
                 <a:cs typeface="Calibri" pitchFamily="34" charset="-120"/>
               </a:rPr>
-              <a:t>creative</a:t>
+              <a:t>talkative</a:t>
             </a:r>
             <a:pPr algn="l" indent="0" marL="0">
               <a:buNone/>
@@ -18314,7 +18380,7 @@
                 <a:ea typeface="Calibri" pitchFamily="34" charset="-122"/>
                 <a:cs typeface="Calibri" pitchFamily="34" charset="-120"/>
               </a:rPr>
-              <a:t> class will find </a:t>
+              <a:t> student can be very </a:t>
             </a:r>
             <a:pPr algn="l" indent="0" marL="0">
               <a:buNone/>
@@ -18331,7 +18397,7 @@
                 <a:ea typeface="Calibri" pitchFamily="34" charset="-122"/>
                 <a:cs typeface="Calibri" pitchFamily="34" charset="-120"/>
               </a:rPr>
-              <a:t>narrative</a:t>
+              <a:t>informative</a:t>
             </a:r>
             <a:pPr algn="l" indent="0" marL="0">
               <a:buNone/>
@@ -18345,7 +18411,7 @@
                 <a:ea typeface="Calibri" pitchFamily="34" charset="-122"/>
                 <a:cs typeface="Calibri" pitchFamily="34" charset="-120"/>
               </a:rPr>
-              <a:t> writing much more enjoyable.</a:t>
+              <a:t> during class discussions.</a:t>
             </a:r>
             <a:endParaRPr lang="en-US" sz="1800" dirty="0"/>
           </a:p>
@@ -18628,7 +18694,7 @@
                 <a:ea typeface="Trebuchet MS" pitchFamily="34" charset="-122"/>
                 <a:cs typeface="Trebuchet MS" pitchFamily="34" charset="-120"/>
               </a:rPr>
-              <a:t>creative</a:t>
+              <a:t>talkative</a:t>
             </a:r>
             <a:endParaRPr lang="en-US" sz="1400" dirty="0"/>
           </a:p>
@@ -18756,7 +18822,7 @@
                 <a:ea typeface="Trebuchet MS" pitchFamily="34" charset="-122"/>
                 <a:cs typeface="Trebuchet MS" pitchFamily="34" charset="-120"/>
               </a:rPr>
-              <a:t>narrative</a:t>
+              <a:t>informative</a:t>
             </a:r>
             <a:endParaRPr lang="en-US" sz="1400" dirty="0"/>
           </a:p>
@@ -20231,7 +20297,7 @@
                 <a:ea typeface="Calibri" pitchFamily="34" charset="-122"/>
                 <a:cs typeface="Calibri" pitchFamily="34" charset="-120"/>
               </a:rPr>
-              <a:t>together</a:t>
+              <a:t>together, with</a:t>
             </a:r>
             <a:endParaRPr lang="en-US" sz="850" dirty="0"/>
           </a:p>
@@ -20455,7 +20521,7 @@
                 <a:ea typeface="Calibri" pitchFamily="34" charset="-122"/>
                 <a:cs typeface="Calibri" pitchFamily="34" charset="-120"/>
               </a:rPr>
-              <a:t>tending to</a:t>
+              <a:t>tending to, relating to</a:t>
             </a:r>
             <a:endParaRPr lang="en-US" sz="850" dirty="0"/>
           </a:p>
@@ -21328,7 +21394,7 @@
                 <a:ea typeface="Calibri" pitchFamily="34" charset="-122"/>
                 <a:cs typeface="Calibri" pitchFamily="34" charset="-120"/>
               </a:rPr>
-              <a:t>together</a:t>
+              <a:t>together, with</a:t>
             </a:r>
             <a:endParaRPr lang="en-US" sz="850" dirty="0"/>
           </a:p>
@@ -21552,7 +21618,7 @@
                 <a:ea typeface="Calibri" pitchFamily="34" charset="-122"/>
                 <a:cs typeface="Calibri" pitchFamily="34" charset="-120"/>
               </a:rPr>
-              <a:t>tending to</a:t>
+              <a:t>tending to, relating to</a:t>
             </a:r>
             <a:endParaRPr lang="en-US" sz="850" dirty="0"/>
           </a:p>
@@ -22872,7 +22938,7 @@
                 <a:ea typeface="Calibri" pitchFamily="34" charset="-122"/>
                 <a:cs typeface="Calibri" pitchFamily="34" charset="-120"/>
               </a:rPr>
-              <a:t>together</a:t>
+              <a:t>together, with</a:t>
             </a:r>
             <a:endParaRPr lang="en-US" sz="850" dirty="0"/>
           </a:p>
@@ -23096,7 +23162,7 @@
                 <a:ea typeface="Calibri" pitchFamily="34" charset="-122"/>
                 <a:cs typeface="Calibri" pitchFamily="34" charset="-120"/>
               </a:rPr>
-              <a:t>tending to</a:t>
+              <a:t>tending to, relating to</a:t>
             </a:r>
             <a:endParaRPr lang="en-US" sz="850" dirty="0"/>
           </a:p>
@@ -23782,8 +23848,8 @@
         </p:nvSpPr>
         <p:spPr>
           <a:xfrm>
-            <a:off x="1951330" y="4169664"/>
-            <a:ext cx="676656" cy="384048"/>
+            <a:off x="1951828" y="4169664"/>
+            <a:ext cx="603504" cy="384048"/>
           </a:xfrm>
           <a:prstGeom prst="rect">
             <a:avLst>
@@ -23809,8 +23875,8 @@
         </p:nvSpPr>
         <p:spPr>
           <a:xfrm>
-            <a:off x="1951330" y="4169664"/>
-            <a:ext cx="676656" cy="384048"/>
+            <a:off x="1951828" y="4169664"/>
+            <a:ext cx="603504" cy="384048"/>
           </a:xfrm>
           <a:prstGeom prst="rect">
             <a:avLst/>
@@ -23848,8 +23914,8 @@
         </p:nvSpPr>
         <p:spPr>
           <a:xfrm>
-            <a:off x="1951330" y="4572000"/>
-            <a:ext cx="676656" cy="219456"/>
+            <a:off x="1951828" y="4572000"/>
+            <a:ext cx="603504" cy="219456"/>
           </a:xfrm>
           <a:prstGeom prst="rect">
             <a:avLst/>
@@ -23887,8 +23953,8 @@
         </p:nvSpPr>
         <p:spPr>
           <a:xfrm>
-            <a:off x="2677363" y="4169664"/>
-            <a:ext cx="676656" cy="384048"/>
+            <a:off x="2605209" y="4169664"/>
+            <a:ext cx="603504" cy="384048"/>
           </a:xfrm>
           <a:prstGeom prst="rect">
             <a:avLst>
@@ -23914,8 +23980,8 @@
         </p:nvSpPr>
         <p:spPr>
           <a:xfrm>
-            <a:off x="2677363" y="4169664"/>
-            <a:ext cx="676656" cy="384048"/>
+            <a:off x="2605209" y="4169664"/>
+            <a:ext cx="603504" cy="384048"/>
           </a:xfrm>
           <a:prstGeom prst="rect">
             <a:avLst/>
@@ -23953,8 +24019,8 @@
         </p:nvSpPr>
         <p:spPr>
           <a:xfrm>
-            <a:off x="3403397" y="4169664"/>
-            <a:ext cx="676656" cy="384048"/>
+            <a:off x="3258589" y="4169664"/>
+            <a:ext cx="603504" cy="384048"/>
           </a:xfrm>
           <a:prstGeom prst="rect">
             <a:avLst>
@@ -23980,8 +24046,8 @@
         </p:nvSpPr>
         <p:spPr>
           <a:xfrm>
-            <a:off x="3403397" y="4169664"/>
-            <a:ext cx="676656" cy="384048"/>
+            <a:off x="3258589" y="4169664"/>
+            <a:ext cx="603504" cy="384048"/>
           </a:xfrm>
           <a:prstGeom prst="rect">
             <a:avLst/>
@@ -24019,8 +24085,8 @@
         </p:nvSpPr>
         <p:spPr>
           <a:xfrm>
-            <a:off x="4129430" y="4169664"/>
-            <a:ext cx="676656" cy="384048"/>
+            <a:off x="3911969" y="4169664"/>
+            <a:ext cx="603504" cy="384048"/>
           </a:xfrm>
           <a:prstGeom prst="rect">
             <a:avLst>
@@ -24046,8 +24112,8 @@
         </p:nvSpPr>
         <p:spPr>
           <a:xfrm>
-            <a:off x="4129430" y="4169664"/>
-            <a:ext cx="676656" cy="384048"/>
+            <a:off x="3911969" y="4169664"/>
+            <a:ext cx="603504" cy="384048"/>
           </a:xfrm>
           <a:prstGeom prst="rect">
             <a:avLst/>
@@ -24085,8 +24151,8 @@
         </p:nvSpPr>
         <p:spPr>
           <a:xfrm>
-            <a:off x="4855464" y="4169664"/>
-            <a:ext cx="676656" cy="384048"/>
+            <a:off x="4565350" y="4169664"/>
+            <a:ext cx="603504" cy="384048"/>
           </a:xfrm>
           <a:prstGeom prst="rect">
             <a:avLst>
@@ -24112,8 +24178,8 @@
         </p:nvSpPr>
         <p:spPr>
           <a:xfrm>
-            <a:off x="4855464" y="4169664"/>
-            <a:ext cx="676656" cy="384048"/>
+            <a:off x="4565350" y="4169664"/>
+            <a:ext cx="603504" cy="384048"/>
           </a:xfrm>
           <a:prstGeom prst="rect">
             <a:avLst/>
@@ -24151,8 +24217,8 @@
         </p:nvSpPr>
         <p:spPr>
           <a:xfrm>
-            <a:off x="5581498" y="4169664"/>
-            <a:ext cx="676656" cy="384048"/>
+            <a:off x="5218730" y="4169664"/>
+            <a:ext cx="603504" cy="384048"/>
           </a:xfrm>
           <a:prstGeom prst="rect">
             <a:avLst>
@@ -24178,8 +24244,8 @@
         </p:nvSpPr>
         <p:spPr>
           <a:xfrm>
-            <a:off x="5581498" y="4169664"/>
-            <a:ext cx="676656" cy="384048"/>
+            <a:off x="5218730" y="4169664"/>
+            <a:ext cx="603504" cy="384048"/>
           </a:xfrm>
           <a:prstGeom prst="rect">
             <a:avLst/>
@@ -24217,8 +24283,8 @@
         </p:nvSpPr>
         <p:spPr>
           <a:xfrm>
-            <a:off x="6307531" y="4169664"/>
-            <a:ext cx="676656" cy="384048"/>
+            <a:off x="5872111" y="4169664"/>
+            <a:ext cx="603504" cy="384048"/>
           </a:xfrm>
           <a:prstGeom prst="rect">
             <a:avLst>
@@ -24244,8 +24310,8 @@
         </p:nvSpPr>
         <p:spPr>
           <a:xfrm>
-            <a:off x="6307531" y="4169664"/>
-            <a:ext cx="676656" cy="384048"/>
+            <a:off x="5872111" y="4169664"/>
+            <a:ext cx="603504" cy="384048"/>
           </a:xfrm>
           <a:prstGeom prst="rect">
             <a:avLst/>
@@ -24283,8 +24349,8 @@
         </p:nvSpPr>
         <p:spPr>
           <a:xfrm>
-            <a:off x="7033565" y="4169664"/>
-            <a:ext cx="676656" cy="384048"/>
+            <a:off x="6525491" y="4169664"/>
+            <a:ext cx="603504" cy="384048"/>
           </a:xfrm>
           <a:prstGeom prst="rect">
             <a:avLst>
@@ -24310,8 +24376,8 @@
         </p:nvSpPr>
         <p:spPr>
           <a:xfrm>
-            <a:off x="7033565" y="4169664"/>
-            <a:ext cx="676656" cy="384048"/>
+            <a:off x="6525491" y="4169664"/>
+            <a:ext cx="603504" cy="384048"/>
           </a:xfrm>
           <a:prstGeom prst="rect">
             <a:avLst/>
@@ -24349,8 +24415,8 @@
         </p:nvSpPr>
         <p:spPr>
           <a:xfrm>
-            <a:off x="7759598" y="4169664"/>
-            <a:ext cx="676656" cy="384048"/>
+            <a:off x="7178871" y="4169664"/>
+            <a:ext cx="603504" cy="384048"/>
           </a:xfrm>
           <a:prstGeom prst="rect">
             <a:avLst>
@@ -24376,8 +24442,8 @@
         </p:nvSpPr>
         <p:spPr>
           <a:xfrm>
-            <a:off x="7759598" y="4169664"/>
-            <a:ext cx="676656" cy="384048"/>
+            <a:off x="7178871" y="4169664"/>
+            <a:ext cx="603504" cy="384048"/>
           </a:xfrm>
           <a:prstGeom prst="rect">
             <a:avLst/>
@@ -24401,7 +24467,7 @@
                 <a:ea typeface="Trebuchet MS" pitchFamily="34" charset="-122"/>
                 <a:cs typeface="Trebuchet MS" pitchFamily="34" charset="-120"/>
               </a:rPr>
-              <a:t>ve</a:t>
+              <a:t>v</a:t>
             </a:r>
             <a:endParaRPr lang="en-US" sz="900" dirty="0"/>
           </a:p>
@@ -24409,14 +24475,80 @@
       </p:sp>
       <p:sp>
         <p:nvSpPr>
-          <p:cNvPr id="64" name="Text 62"/>
-          <p:cNvSpPr/>
-          <p:nvPr/>
-        </p:nvSpPr>
-        <p:spPr>
-          <a:xfrm>
-            <a:off x="7759598" y="4572000"/>
-            <a:ext cx="676656" cy="219456"/>
+          <p:cNvPr id="64" name="Shape 62"/>
+          <p:cNvSpPr/>
+          <p:nvPr/>
+        </p:nvSpPr>
+        <p:spPr>
+          <a:xfrm>
+            <a:off x="7832252" y="4169664"/>
+            <a:ext cx="603504" cy="384048"/>
+          </a:xfrm>
+          <a:prstGeom prst="rect">
+            <a:avLst>
+              <a:gd name="adj" fmla="val 9524"/>
+            </a:avLst>
+          </a:prstGeom>
+          <a:solidFill>
+            <a:srgbClr val="FFFFFF"/>
+          </a:solidFill>
+          <a:ln w="12700">
+            <a:solidFill>
+              <a:srgbClr val="DB2777"/>
+            </a:solidFill>
+            <a:prstDash val="solid"/>
+          </a:ln>
+        </p:spPr>
+      </p:sp>
+      <p:sp>
+        <p:nvSpPr>
+          <p:cNvPr id="65" name="Text 63"/>
+          <p:cNvSpPr/>
+          <p:nvPr/>
+        </p:nvSpPr>
+        <p:spPr>
+          <a:xfrm>
+            <a:off x="7832252" y="4169664"/>
+            <a:ext cx="603504" cy="384048"/>
+          </a:xfrm>
+          <a:prstGeom prst="rect">
+            <a:avLst/>
+          </a:prstGeom>
+          <a:noFill/>
+          <a:ln/>
+        </p:spPr>
+        <p:txBody>
+          <a:bodyPr wrap="square" lIns="0" tIns="0" rIns="0" bIns="0" rtlCol="0" anchor="ctr"/>
+          <a:lstStyle/>
+          <a:p>
+            <a:pPr algn="ctr" indent="0" marL="0">
+              <a:buNone/>
+            </a:pPr>
+            <a:r>
+              <a:rPr lang="en-US" sz="900" b="1" dirty="0">
+                <a:solidFill>
+                  <a:srgbClr val="9D174D"/>
+                </a:solidFill>
+                <a:latin typeface="Trebuchet MS" pitchFamily="34" charset="0"/>
+                <a:ea typeface="Trebuchet MS" pitchFamily="34" charset="-122"/>
+                <a:cs typeface="Trebuchet MS" pitchFamily="34" charset="-120"/>
+              </a:rPr>
+              <a:t>e</a:t>
+            </a:r>
+            <a:endParaRPr lang="en-US" sz="900" dirty="0"/>
+          </a:p>
+        </p:txBody>
+      </p:sp>
+      <p:sp>
+        <p:nvSpPr>
+          <p:cNvPr id="66" name="Text 64"/>
+          <p:cNvSpPr/>
+          <p:nvPr/>
+        </p:nvSpPr>
+        <p:spPr>
+          <a:xfrm>
+            <a:off x="7832252" y="4572000"/>
+            <a:ext cx="603504" cy="219456"/>
           </a:xfrm>
           <a:prstGeom prst="rect">
             <a:avLst/>
@@ -24440,7 +24572,7 @@
                 <a:ea typeface="Calibri" pitchFamily="34" charset="-122"/>
                 <a:cs typeface="Calibri" pitchFamily="34" charset="-120"/>
               </a:rPr>
-              <a:t>/v/</a:t>
+              <a:t>silent</a:t>
             </a:r>
             <a:endParaRPr lang="en-US" sz="750" dirty="0"/>
           </a:p>
@@ -24871,7 +25003,7 @@
                 <a:ea typeface="Trebuchet MS" pitchFamily="34" charset="-122"/>
                 <a:cs typeface="Trebuchet MS" pitchFamily="34" charset="-120"/>
               </a:rPr>
-              <a:t>creative</a:t>
+              <a:t>talkative</a:t>
             </a:r>
             <a:endParaRPr lang="en-US" sz="2800" dirty="0"/>
           </a:p>
@@ -25698,7 +25830,7 @@
                 <a:ea typeface="Trebuchet MS" pitchFamily="34" charset="-122"/>
                 <a:cs typeface="Trebuchet MS" pitchFamily="34" charset="-120"/>
               </a:rPr>
-              <a:t>creative</a:t>
+              <a:t>talkative</a:t>
             </a:r>
             <a:endParaRPr lang="en-US" sz="2800" dirty="0"/>
           </a:p>
@@ -25837,7 +25969,7 @@
                 <a:ea typeface="Trebuchet MS" pitchFamily="34" charset="-122"/>
                 <a:cs typeface="Trebuchet MS" pitchFamily="34" charset="-120"/>
               </a:rPr>
-              <a:t>creat</a:t>
+              <a:t>talk</a:t>
             </a:r>
             <a:endParaRPr lang="en-US" sz="1300" dirty="0"/>
           </a:p>
@@ -25876,7 +26008,7 @@
                 <a:ea typeface="Calibri" pitchFamily="34" charset="-122"/>
                 <a:cs typeface="Calibri" pitchFamily="34" charset="-120"/>
               </a:rPr>
-              <a:t>to make</a:t>
+              <a:t>to speak</a:t>
             </a:r>
             <a:endParaRPr lang="en-US" sz="850" dirty="0"/>
           </a:p>
@@ -25884,46 +26016,7 @@
       </p:sp>
       <p:sp>
         <p:nvSpPr>
-          <p:cNvPr id="19" name="Text 17"/>
-          <p:cNvSpPr/>
-          <p:nvPr/>
-        </p:nvSpPr>
-        <p:spPr>
-          <a:xfrm>
-            <a:off x="2938272" y="2752344"/>
-            <a:ext cx="1828800" cy="182880"/>
-          </a:xfrm>
-          <a:prstGeom prst="rect">
-            <a:avLst/>
-          </a:prstGeom>
-          <a:noFill/>
-          <a:ln/>
-        </p:spPr>
-        <p:txBody>
-          <a:bodyPr wrap="square" lIns="0" tIns="0" rIns="0" bIns="0" rtlCol="0" anchor="t"/>
-          <a:lstStyle/>
-          <a:p>
-            <a:pPr algn="ctr" indent="0" marL="0">
-              <a:buNone/>
-            </a:pPr>
-            <a:r>
-              <a:rPr lang="en-US" sz="700" i="1" dirty="0">
-                <a:solidFill>
-                  <a:srgbClr val="94A3B8"/>
-                </a:solidFill>
-                <a:latin typeface="Calibri" pitchFamily="34" charset="0"/>
-                <a:ea typeface="Calibri" pitchFamily="34" charset="-122"/>
-                <a:cs typeface="Calibri" pitchFamily="34" charset="-120"/>
-              </a:rPr>
-              <a:t>'e' dropped before vowel suffix</a:t>
-            </a:r>
-            <a:endParaRPr lang="en-US" sz="700" dirty="0"/>
-          </a:p>
-        </p:txBody>
-      </p:sp>
-      <p:sp>
-        <p:nvSpPr>
-          <p:cNvPr id="20" name="Shape 18"/>
+          <p:cNvPr id="19" name="Shape 17"/>
           <p:cNvSpPr/>
           <p:nvPr/>
         </p:nvSpPr>
@@ -25957,7 +26050,7 @@
       </p:sp>
       <p:sp>
         <p:nvSpPr>
-          <p:cNvPr id="21" name="Text 19"/>
+          <p:cNvPr id="20" name="Text 18"/>
           <p:cNvSpPr/>
           <p:nvPr/>
         </p:nvSpPr>
@@ -25996,7 +26089,7 @@
       </p:sp>
       <p:sp>
         <p:nvSpPr>
-          <p:cNvPr id="22" name="Text 20"/>
+          <p:cNvPr id="21" name="Text 19"/>
           <p:cNvSpPr/>
           <p:nvPr/>
         </p:nvSpPr>
@@ -26027,7 +26120,7 @@
                 <a:ea typeface="Calibri" pitchFamily="34" charset="-122"/>
                 <a:cs typeface="Calibri" pitchFamily="34" charset="-120"/>
               </a:rPr>
-              <a:t>tending to</a:t>
+              <a:t>tending to, relating to</a:t>
             </a:r>
             <a:endParaRPr lang="en-US" sz="850" dirty="0"/>
           </a:p>
@@ -26035,7 +26128,7 @@
       </p:sp>
       <p:sp>
         <p:nvSpPr>
-          <p:cNvPr id="23" name="Shape 21"/>
+          <p:cNvPr id="22" name="Shape 20"/>
           <p:cNvSpPr/>
           <p:nvPr/>
         </p:nvSpPr>
@@ -26062,7 +26155,7 @@
       </p:sp>
       <p:sp>
         <p:nvSpPr>
-          <p:cNvPr id="24" name="Text 22"/>
+          <p:cNvPr id="23" name="Text 21"/>
           <p:cNvSpPr/>
           <p:nvPr/>
         </p:nvSpPr>
@@ -26101,7 +26194,7 @@
       </p:sp>
       <p:sp>
         <p:nvSpPr>
-          <p:cNvPr id="25" name="Shape 23"/>
+          <p:cNvPr id="24" name="Shape 22"/>
           <p:cNvSpPr/>
           <p:nvPr/>
         </p:nvSpPr>
@@ -26128,7 +26221,7 @@
       </p:sp>
       <p:sp>
         <p:nvSpPr>
-          <p:cNvPr id="26" name="Text 24"/>
+          <p:cNvPr id="25" name="Text 23"/>
           <p:cNvSpPr/>
           <p:nvPr/>
         </p:nvSpPr>
@@ -26167,7 +26260,7 @@
       </p:sp>
       <p:sp>
         <p:nvSpPr>
-          <p:cNvPr id="27" name="Shape 25"/>
+          <p:cNvPr id="26" name="Shape 24"/>
           <p:cNvSpPr/>
           <p:nvPr/>
         </p:nvSpPr>
@@ -26194,7 +26287,7 @@
       </p:sp>
       <p:sp>
         <p:nvSpPr>
-          <p:cNvPr id="28" name="Text 26"/>
+          <p:cNvPr id="27" name="Text 25"/>
           <p:cNvSpPr/>
           <p:nvPr/>
         </p:nvSpPr>
@@ -26233,7 +26326,7 @@
       </p:sp>
       <p:sp>
         <p:nvSpPr>
-          <p:cNvPr id="29" name="Shape 27"/>
+          <p:cNvPr id="28" name="Shape 26"/>
           <p:cNvSpPr/>
           <p:nvPr/>
         </p:nvSpPr>
@@ -26260,7 +26353,7 @@
       </p:sp>
       <p:sp>
         <p:nvSpPr>
-          <p:cNvPr id="30" name="Text 28"/>
+          <p:cNvPr id="29" name="Text 27"/>
           <p:cNvSpPr/>
           <p:nvPr/>
         </p:nvSpPr>
@@ -27441,7 +27534,7 @@
                 <a:ea typeface="Trebuchet MS" pitchFamily="34" charset="-122"/>
                 <a:cs typeface="Trebuchet MS" pitchFamily="34" charset="-120"/>
               </a:rPr>
-              <a:t>creative</a:t>
+              <a:t>talkative</a:t>
             </a:r>
             <a:endParaRPr lang="en-US" sz="2800" dirty="0"/>
           </a:p>
@@ -27580,7 +27673,7 @@
                 <a:ea typeface="Trebuchet MS" pitchFamily="34" charset="-122"/>
                 <a:cs typeface="Trebuchet MS" pitchFamily="34" charset="-120"/>
               </a:rPr>
-              <a:t>creat</a:t>
+              <a:t>talk</a:t>
             </a:r>
             <a:endParaRPr lang="en-US" sz="1300" dirty="0"/>
           </a:p>
@@ -27619,7 +27712,7 @@
                 <a:ea typeface="Calibri" pitchFamily="34" charset="-122"/>
                 <a:cs typeface="Calibri" pitchFamily="34" charset="-120"/>
               </a:rPr>
-              <a:t>to make</a:t>
+              <a:t>to speak</a:t>
             </a:r>
             <a:endParaRPr lang="en-US" sz="850" dirty="0"/>
           </a:p>
@@ -27627,46 +27720,7 @@
       </p:sp>
       <p:sp>
         <p:nvSpPr>
-          <p:cNvPr id="19" name="Text 17"/>
-          <p:cNvSpPr/>
-          <p:nvPr/>
-        </p:nvSpPr>
-        <p:spPr>
-          <a:xfrm>
-            <a:off x="2938272" y="2752344"/>
-            <a:ext cx="1828800" cy="182880"/>
-          </a:xfrm>
-          <a:prstGeom prst="rect">
-            <a:avLst/>
-          </a:prstGeom>
-          <a:noFill/>
-          <a:ln/>
-        </p:spPr>
-        <p:txBody>
-          <a:bodyPr wrap="square" lIns="0" tIns="0" rIns="0" bIns="0" rtlCol="0" anchor="t"/>
-          <a:lstStyle/>
-          <a:p>
-            <a:pPr algn="ctr" indent="0" marL="0">
-              <a:buNone/>
-            </a:pPr>
-            <a:r>
-              <a:rPr lang="en-US" sz="700" i="1" dirty="0">
-                <a:solidFill>
-                  <a:srgbClr val="94A3B8"/>
-                </a:solidFill>
-                <a:latin typeface="Calibri" pitchFamily="34" charset="0"/>
-                <a:ea typeface="Calibri" pitchFamily="34" charset="-122"/>
-                <a:cs typeface="Calibri" pitchFamily="34" charset="-120"/>
-              </a:rPr>
-              <a:t>'e' dropped before vowel suffix</a:t>
-            </a:r>
-            <a:endParaRPr lang="en-US" sz="700" dirty="0"/>
-          </a:p>
-        </p:txBody>
-      </p:sp>
-      <p:sp>
-        <p:nvSpPr>
-          <p:cNvPr id="20" name="Shape 18"/>
+          <p:cNvPr id="19" name="Shape 17"/>
           <p:cNvSpPr/>
           <p:nvPr/>
         </p:nvSpPr>
@@ -27700,7 +27754,7 @@
       </p:sp>
       <p:sp>
         <p:nvSpPr>
-          <p:cNvPr id="21" name="Text 19"/>
+          <p:cNvPr id="20" name="Text 18"/>
           <p:cNvSpPr/>
           <p:nvPr/>
         </p:nvSpPr>
@@ -27739,7 +27793,7 @@
       </p:sp>
       <p:sp>
         <p:nvSpPr>
-          <p:cNvPr id="22" name="Text 20"/>
+          <p:cNvPr id="21" name="Text 19"/>
           <p:cNvSpPr/>
           <p:nvPr/>
         </p:nvSpPr>
@@ -27770,7 +27824,7 @@
                 <a:ea typeface="Calibri" pitchFamily="34" charset="-122"/>
                 <a:cs typeface="Calibri" pitchFamily="34" charset="-120"/>
               </a:rPr>
-              <a:t>tending to</a:t>
+              <a:t>tending to, relating to</a:t>
             </a:r>
             <a:endParaRPr lang="en-US" sz="850" dirty="0"/>
           </a:p>
@@ -27778,7 +27832,7 @@
       </p:sp>
       <p:sp>
         <p:nvSpPr>
-          <p:cNvPr id="23" name="Shape 21"/>
+          <p:cNvPr id="22" name="Shape 20"/>
           <p:cNvSpPr/>
           <p:nvPr/>
         </p:nvSpPr>
@@ -27805,7 +27859,7 @@
       </p:sp>
       <p:sp>
         <p:nvSpPr>
-          <p:cNvPr id="24" name="Text 22"/>
+          <p:cNvPr id="23" name="Text 21"/>
           <p:cNvSpPr/>
           <p:nvPr/>
         </p:nvSpPr>
@@ -27844,7 +27898,7 @@
       </p:sp>
       <p:sp>
         <p:nvSpPr>
-          <p:cNvPr id="25" name="Shape 23"/>
+          <p:cNvPr id="24" name="Shape 22"/>
           <p:cNvSpPr/>
           <p:nvPr/>
         </p:nvSpPr>
@@ -27871,7 +27925,7 @@
       </p:sp>
       <p:sp>
         <p:nvSpPr>
-          <p:cNvPr id="26" name="Shape 24"/>
+          <p:cNvPr id="25" name="Shape 23"/>
           <p:cNvSpPr/>
           <p:nvPr/>
         </p:nvSpPr>
@@ -27898,7 +27952,7 @@
       </p:sp>
       <p:sp>
         <p:nvSpPr>
-          <p:cNvPr id="27" name="Text 25"/>
+          <p:cNvPr id="26" name="Text 24"/>
           <p:cNvSpPr/>
           <p:nvPr/>
         </p:nvSpPr>
@@ -27929,7 +27983,7 @@
                 <a:ea typeface="Trebuchet MS" pitchFamily="34" charset="-122"/>
                 <a:cs typeface="Trebuchet MS" pitchFamily="34" charset="-120"/>
               </a:rPr>
-              <a:t>cre</a:t>
+              <a:t>talk</a:t>
             </a:r>
             <a:endParaRPr lang="en-US" sz="1400" dirty="0"/>
           </a:p>
@@ -27937,7 +27991,7 @@
       </p:sp>
       <p:sp>
         <p:nvSpPr>
-          <p:cNvPr id="28" name="Text 26"/>
+          <p:cNvPr id="27" name="Text 25"/>
           <p:cNvSpPr/>
           <p:nvPr/>
         </p:nvSpPr>
@@ -27976,7 +28030,7 @@
       </p:sp>
       <p:sp>
         <p:nvSpPr>
-          <p:cNvPr id="29" name="Shape 27"/>
+          <p:cNvPr id="28" name="Shape 26"/>
           <p:cNvSpPr/>
           <p:nvPr/>
         </p:nvSpPr>
@@ -28003,7 +28057,7 @@
       </p:sp>
       <p:sp>
         <p:nvSpPr>
-          <p:cNvPr id="30" name="Text 28"/>
+          <p:cNvPr id="29" name="Text 27"/>
           <p:cNvSpPr/>
           <p:nvPr/>
         </p:nvSpPr>
@@ -28042,7 +28096,7 @@
       </p:sp>
       <p:sp>
         <p:nvSpPr>
-          <p:cNvPr id="31" name="Text 29"/>
+          <p:cNvPr id="30" name="Text 28"/>
           <p:cNvSpPr/>
           <p:nvPr/>
         </p:nvSpPr>
@@ -28081,7 +28135,7 @@
       </p:sp>
       <p:sp>
         <p:nvSpPr>
-          <p:cNvPr id="32" name="Shape 30"/>
+          <p:cNvPr id="31" name="Shape 29"/>
           <p:cNvSpPr/>
           <p:nvPr/>
         </p:nvSpPr>
@@ -28108,7 +28162,7 @@
       </p:sp>
       <p:sp>
         <p:nvSpPr>
-          <p:cNvPr id="33" name="Text 31"/>
+          <p:cNvPr id="32" name="Text 30"/>
           <p:cNvSpPr/>
           <p:nvPr/>
         </p:nvSpPr>
@@ -28147,7 +28201,7 @@
       </p:sp>
       <p:sp>
         <p:nvSpPr>
-          <p:cNvPr id="34" name="Shape 32"/>
+          <p:cNvPr id="33" name="Shape 31"/>
           <p:cNvSpPr/>
           <p:nvPr/>
         </p:nvSpPr>
@@ -28174,7 +28228,7 @@
       </p:sp>
       <p:sp>
         <p:nvSpPr>
-          <p:cNvPr id="35" name="Text 33"/>
+          <p:cNvPr id="34" name="Text 32"/>
           <p:cNvSpPr/>
           <p:nvPr/>
         </p:nvSpPr>
@@ -28213,7 +28267,7 @@
       </p:sp>
       <p:sp>
         <p:nvSpPr>
-          <p:cNvPr id="36" name="Shape 34"/>
+          <p:cNvPr id="35" name="Shape 33"/>
           <p:cNvSpPr/>
           <p:nvPr/>
         </p:nvSpPr>
@@ -28240,7 +28294,7 @@
       </p:sp>
       <p:sp>
         <p:nvSpPr>
-          <p:cNvPr id="37" name="Text 35"/>
+          <p:cNvPr id="36" name="Text 34"/>
           <p:cNvSpPr/>
           <p:nvPr/>
         </p:nvSpPr>
@@ -28702,7 +28756,7 @@
                 <a:ea typeface="Trebuchet MS" pitchFamily="34" charset="-122"/>
                 <a:cs typeface="Trebuchet MS" pitchFamily="34" charset="-120"/>
               </a:rPr>
-              <a:t>creative</a:t>
+              <a:t>talkative</a:t>
             </a:r>
             <a:endParaRPr lang="en-US" sz="2800" dirty="0"/>
           </a:p>
@@ -28841,7 +28895,7 @@
                 <a:ea typeface="Trebuchet MS" pitchFamily="34" charset="-122"/>
                 <a:cs typeface="Trebuchet MS" pitchFamily="34" charset="-120"/>
               </a:rPr>
-              <a:t>creat</a:t>
+              <a:t>talk</a:t>
             </a:r>
             <a:endParaRPr lang="en-US" sz="1300" dirty="0"/>
           </a:p>
@@ -28880,7 +28934,7 @@
                 <a:ea typeface="Calibri" pitchFamily="34" charset="-122"/>
                 <a:cs typeface="Calibri" pitchFamily="34" charset="-120"/>
               </a:rPr>
-              <a:t>to make</a:t>
+              <a:t>to speak</a:t>
             </a:r>
             <a:endParaRPr lang="en-US" sz="850" dirty="0"/>
           </a:p>
@@ -28888,46 +28942,7 @@
       </p:sp>
       <p:sp>
         <p:nvSpPr>
-          <p:cNvPr id="19" name="Text 17"/>
-          <p:cNvSpPr/>
-          <p:nvPr/>
-        </p:nvSpPr>
-        <p:spPr>
-          <a:xfrm>
-            <a:off x="2938272" y="2752344"/>
-            <a:ext cx="1828800" cy="182880"/>
-          </a:xfrm>
-          <a:prstGeom prst="rect">
-            <a:avLst/>
-          </a:prstGeom>
-          <a:noFill/>
-          <a:ln/>
-        </p:spPr>
-        <p:txBody>
-          <a:bodyPr wrap="square" lIns="0" tIns="0" rIns="0" bIns="0" rtlCol="0" anchor="t"/>
-          <a:lstStyle/>
-          <a:p>
-            <a:pPr algn="ctr" indent="0" marL="0">
-              <a:buNone/>
-            </a:pPr>
-            <a:r>
-              <a:rPr lang="en-US" sz="700" i="1" dirty="0">
-                <a:solidFill>
-                  <a:srgbClr val="94A3B8"/>
-                </a:solidFill>
-                <a:latin typeface="Calibri" pitchFamily="34" charset="0"/>
-                <a:ea typeface="Calibri" pitchFamily="34" charset="-122"/>
-                <a:cs typeface="Calibri" pitchFamily="34" charset="-120"/>
-              </a:rPr>
-              <a:t>'e' dropped before vowel suffix</a:t>
-            </a:r>
-            <a:endParaRPr lang="en-US" sz="700" dirty="0"/>
-          </a:p>
-        </p:txBody>
-      </p:sp>
-      <p:sp>
-        <p:nvSpPr>
-          <p:cNvPr id="20" name="Shape 18"/>
+          <p:cNvPr id="19" name="Shape 17"/>
           <p:cNvSpPr/>
           <p:nvPr/>
         </p:nvSpPr>
@@ -28961,7 +28976,7 @@
       </p:sp>
       <p:sp>
         <p:nvSpPr>
-          <p:cNvPr id="21" name="Text 19"/>
+          <p:cNvPr id="20" name="Text 18"/>
           <p:cNvSpPr/>
           <p:nvPr/>
         </p:nvSpPr>
@@ -29000,7 +29015,7 @@
       </p:sp>
       <p:sp>
         <p:nvSpPr>
-          <p:cNvPr id="22" name="Text 20"/>
+          <p:cNvPr id="21" name="Text 19"/>
           <p:cNvSpPr/>
           <p:nvPr/>
         </p:nvSpPr>
@@ -29031,7 +29046,7 @@
                 <a:ea typeface="Calibri" pitchFamily="34" charset="-122"/>
                 <a:cs typeface="Calibri" pitchFamily="34" charset="-120"/>
               </a:rPr>
-              <a:t>tending to</a:t>
+              <a:t>tending to, relating to</a:t>
             </a:r>
             <a:endParaRPr lang="en-US" sz="850" dirty="0"/>
           </a:p>
@@ -29039,7 +29054,7 @@
       </p:sp>
       <p:sp>
         <p:nvSpPr>
-          <p:cNvPr id="23" name="Shape 21"/>
+          <p:cNvPr id="22" name="Shape 20"/>
           <p:cNvSpPr/>
           <p:nvPr/>
         </p:nvSpPr>
@@ -29066,7 +29081,7 @@
       </p:sp>
       <p:sp>
         <p:nvSpPr>
-          <p:cNvPr id="24" name="Text 22"/>
+          <p:cNvPr id="23" name="Text 21"/>
           <p:cNvSpPr/>
           <p:nvPr/>
         </p:nvSpPr>
@@ -29105,7 +29120,7 @@
       </p:sp>
       <p:sp>
         <p:nvSpPr>
-          <p:cNvPr id="25" name="Shape 23"/>
+          <p:cNvPr id="24" name="Shape 22"/>
           <p:cNvSpPr/>
           <p:nvPr/>
         </p:nvSpPr>
@@ -29132,7 +29147,7 @@
       </p:sp>
       <p:sp>
         <p:nvSpPr>
-          <p:cNvPr id="26" name="Shape 24"/>
+          <p:cNvPr id="25" name="Shape 23"/>
           <p:cNvSpPr/>
           <p:nvPr/>
         </p:nvSpPr>
@@ -29159,7 +29174,7 @@
       </p:sp>
       <p:sp>
         <p:nvSpPr>
-          <p:cNvPr id="27" name="Text 25"/>
+          <p:cNvPr id="26" name="Text 24"/>
           <p:cNvSpPr/>
           <p:nvPr/>
         </p:nvSpPr>
@@ -29190,7 +29205,7 @@
                 <a:ea typeface="Trebuchet MS" pitchFamily="34" charset="-122"/>
                 <a:cs typeface="Trebuchet MS" pitchFamily="34" charset="-120"/>
               </a:rPr>
-              <a:t>cre</a:t>
+              <a:t>talk</a:t>
             </a:r>
             <a:endParaRPr lang="en-US" sz="1400" dirty="0"/>
           </a:p>
@@ -29198,7 +29213,7 @@
       </p:sp>
       <p:sp>
         <p:nvSpPr>
-          <p:cNvPr id="28" name="Text 26"/>
+          <p:cNvPr id="27" name="Text 25"/>
           <p:cNvSpPr/>
           <p:nvPr/>
         </p:nvSpPr>
@@ -29237,7 +29252,7 @@
       </p:sp>
       <p:sp>
         <p:nvSpPr>
-          <p:cNvPr id="29" name="Shape 27"/>
+          <p:cNvPr id="28" name="Shape 26"/>
           <p:cNvSpPr/>
           <p:nvPr/>
         </p:nvSpPr>
@@ -29264,7 +29279,7 @@
       </p:sp>
       <p:sp>
         <p:nvSpPr>
-          <p:cNvPr id="30" name="Text 28"/>
+          <p:cNvPr id="29" name="Text 27"/>
           <p:cNvSpPr/>
           <p:nvPr/>
         </p:nvSpPr>
@@ -29303,7 +29318,7 @@
       </p:sp>
       <p:sp>
         <p:nvSpPr>
-          <p:cNvPr id="31" name="Text 29"/>
+          <p:cNvPr id="30" name="Text 28"/>
           <p:cNvSpPr/>
           <p:nvPr/>
         </p:nvSpPr>
@@ -29342,7 +29357,7 @@
       </p:sp>
       <p:sp>
         <p:nvSpPr>
-          <p:cNvPr id="32" name="Shape 30"/>
+          <p:cNvPr id="31" name="Shape 29"/>
           <p:cNvSpPr/>
           <p:nvPr/>
         </p:nvSpPr>
@@ -29369,7 +29384,7 @@
       </p:sp>
       <p:sp>
         <p:nvSpPr>
-          <p:cNvPr id="33" name="Text 31"/>
+          <p:cNvPr id="32" name="Text 30"/>
           <p:cNvSpPr/>
           <p:nvPr/>
         </p:nvSpPr>
@@ -29408,7 +29423,7 @@
       </p:sp>
       <p:sp>
         <p:nvSpPr>
-          <p:cNvPr id="34" name="Shape 32"/>
+          <p:cNvPr id="33" name="Shape 31"/>
           <p:cNvSpPr/>
           <p:nvPr/>
         </p:nvSpPr>
@@ -29435,7 +29450,7 @@
       </p:sp>
       <p:sp>
         <p:nvSpPr>
-          <p:cNvPr id="35" name="Text 33"/>
+          <p:cNvPr id="34" name="Text 32"/>
           <p:cNvSpPr/>
           <p:nvPr/>
         </p:nvSpPr>
@@ -29474,7 +29489,7 @@
       </p:sp>
       <p:sp>
         <p:nvSpPr>
-          <p:cNvPr id="36" name="Shape 34"/>
+          <p:cNvPr id="35" name="Shape 33"/>
           <p:cNvSpPr/>
           <p:nvPr/>
         </p:nvSpPr>
@@ -29501,14 +29516,14 @@
       </p:sp>
       <p:sp>
         <p:nvSpPr>
-          <p:cNvPr id="37" name="Shape 35"/>
-          <p:cNvSpPr/>
-          <p:nvPr/>
-        </p:nvSpPr>
-        <p:spPr>
-          <a:xfrm>
-            <a:off x="2254649" y="4169664"/>
-            <a:ext cx="685800" cy="384048"/>
+          <p:cNvPr id="36" name="Shape 34"/>
+          <p:cNvSpPr/>
+          <p:nvPr/>
+        </p:nvSpPr>
+        <p:spPr>
+          <a:xfrm>
+            <a:off x="1951330" y="4169664"/>
+            <a:ext cx="676656" cy="384048"/>
           </a:xfrm>
           <a:prstGeom prst="rect">
             <a:avLst>
@@ -29528,14 +29543,14 @@
       </p:sp>
       <p:sp>
         <p:nvSpPr>
-          <p:cNvPr id="38" name="Text 36"/>
-          <p:cNvSpPr/>
-          <p:nvPr/>
-        </p:nvSpPr>
-        <p:spPr>
-          <a:xfrm>
-            <a:off x="2254649" y="4169664"/>
-            <a:ext cx="685800" cy="384048"/>
+          <p:cNvPr id="37" name="Text 35"/>
+          <p:cNvSpPr/>
+          <p:nvPr/>
+        </p:nvSpPr>
+        <p:spPr>
+          <a:xfrm>
+            <a:off x="1951330" y="4169664"/>
+            <a:ext cx="676656" cy="384048"/>
           </a:xfrm>
           <a:prstGeom prst="rect">
             <a:avLst/>
@@ -29559,7 +29574,7 @@
                 <a:ea typeface="Trebuchet MS" pitchFamily="34" charset="-122"/>
                 <a:cs typeface="Trebuchet MS" pitchFamily="34" charset="-120"/>
               </a:rPr>
-              <a:t>cr</a:t>
+              <a:t>t</a:t>
             </a:r>
             <a:endParaRPr lang="en-US" sz="900" dirty="0"/>
           </a:p>
@@ -29567,14 +29582,14 @@
       </p:sp>
       <p:sp>
         <p:nvSpPr>
-          <p:cNvPr id="39" name="Shape 37"/>
-          <p:cNvSpPr/>
-          <p:nvPr/>
-        </p:nvSpPr>
-        <p:spPr>
-          <a:xfrm>
-            <a:off x="3293146" y="4169664"/>
-            <a:ext cx="685800" cy="384048"/>
+          <p:cNvPr id="38" name="Shape 36"/>
+          <p:cNvSpPr/>
+          <p:nvPr/>
+        </p:nvSpPr>
+        <p:spPr>
+          <a:xfrm>
+            <a:off x="2677363" y="4169664"/>
+            <a:ext cx="676656" cy="384048"/>
           </a:xfrm>
           <a:prstGeom prst="rect">
             <a:avLst>
@@ -29594,14 +29609,14 @@
       </p:sp>
       <p:sp>
         <p:nvSpPr>
-          <p:cNvPr id="40" name="Text 38"/>
-          <p:cNvSpPr/>
-          <p:nvPr/>
-        </p:nvSpPr>
-        <p:spPr>
-          <a:xfrm>
-            <a:off x="3293146" y="4169664"/>
-            <a:ext cx="685800" cy="384048"/>
+          <p:cNvPr id="39" name="Text 37"/>
+          <p:cNvSpPr/>
+          <p:nvPr/>
+        </p:nvSpPr>
+        <p:spPr>
+          <a:xfrm>
+            <a:off x="2677363" y="4169664"/>
+            <a:ext cx="676656" cy="384048"/>
           </a:xfrm>
           <a:prstGeom prst="rect">
             <a:avLst/>
@@ -29625,7 +29640,7 @@
                 <a:ea typeface="Trebuchet MS" pitchFamily="34" charset="-122"/>
                 <a:cs typeface="Trebuchet MS" pitchFamily="34" charset="-120"/>
               </a:rPr>
-              <a:t>e</a:t>
+              <a:t>a</a:t>
             </a:r>
             <a:endParaRPr lang="en-US" sz="900" dirty="0"/>
           </a:p>
@@ -29633,14 +29648,14 @@
       </p:sp>
       <p:sp>
         <p:nvSpPr>
-          <p:cNvPr id="41" name="Shape 39"/>
-          <p:cNvSpPr/>
-          <p:nvPr/>
-        </p:nvSpPr>
-        <p:spPr>
-          <a:xfrm>
-            <a:off x="4331643" y="4169664"/>
-            <a:ext cx="685800" cy="384048"/>
+          <p:cNvPr id="40" name="Shape 38"/>
+          <p:cNvSpPr/>
+          <p:nvPr/>
+        </p:nvSpPr>
+        <p:spPr>
+          <a:xfrm>
+            <a:off x="3403397" y="4169664"/>
+            <a:ext cx="676656" cy="384048"/>
           </a:xfrm>
           <a:prstGeom prst="rect">
             <a:avLst>
@@ -29660,14 +29675,14 @@
       </p:sp>
       <p:sp>
         <p:nvSpPr>
-          <p:cNvPr id="42" name="Text 40"/>
-          <p:cNvSpPr/>
-          <p:nvPr/>
-        </p:nvSpPr>
-        <p:spPr>
-          <a:xfrm>
-            <a:off x="4331643" y="4169664"/>
-            <a:ext cx="685800" cy="384048"/>
+          <p:cNvPr id="41" name="Text 39"/>
+          <p:cNvSpPr/>
+          <p:nvPr/>
+        </p:nvSpPr>
+        <p:spPr>
+          <a:xfrm>
+            <a:off x="3403397" y="4169664"/>
+            <a:ext cx="676656" cy="384048"/>
           </a:xfrm>
           <a:prstGeom prst="rect">
             <a:avLst/>
@@ -29691,7 +29706,7 @@
                 <a:ea typeface="Trebuchet MS" pitchFamily="34" charset="-122"/>
                 <a:cs typeface="Trebuchet MS" pitchFamily="34" charset="-120"/>
               </a:rPr>
-              <a:t>a</a:t>
+              <a:t>l</a:t>
             </a:r>
             <a:endParaRPr lang="en-US" sz="900" dirty="0"/>
           </a:p>
@@ -29699,14 +29714,53 @@
       </p:sp>
       <p:sp>
         <p:nvSpPr>
+          <p:cNvPr id="42" name="Text 40"/>
+          <p:cNvSpPr/>
+          <p:nvPr/>
+        </p:nvSpPr>
+        <p:spPr>
+          <a:xfrm>
+            <a:off x="3403397" y="4572000"/>
+            <a:ext cx="676656" cy="219456"/>
+          </a:xfrm>
+          <a:prstGeom prst="rect">
+            <a:avLst/>
+          </a:prstGeom>
+          <a:noFill/>
+          <a:ln/>
+        </p:spPr>
+        <p:txBody>
+          <a:bodyPr wrap="square" lIns="0" tIns="0" rIns="0" bIns="0" rtlCol="0" anchor="t"/>
+          <a:lstStyle/>
+          <a:p>
+            <a:pPr algn="ctr" indent="0" marL="0">
+              <a:buNone/>
+            </a:pPr>
+            <a:r>
+              <a:rPr lang="en-US" sz="750" i="1" dirty="0">
+                <a:solidFill>
+                  <a:srgbClr val="94A3B8"/>
+                </a:solidFill>
+                <a:latin typeface="Calibri" pitchFamily="34" charset="0"/>
+                <a:ea typeface="Calibri" pitchFamily="34" charset="-122"/>
+                <a:cs typeface="Calibri" pitchFamily="34" charset="-120"/>
+              </a:rPr>
+              <a:t>silent</a:t>
+            </a:r>
+            <a:endParaRPr lang="en-US" sz="750" dirty="0"/>
+          </a:p>
+        </p:txBody>
+      </p:sp>
+      <p:sp>
+        <p:nvSpPr>
           <p:cNvPr id="43" name="Shape 41"/>
           <p:cNvSpPr/>
           <p:nvPr/>
         </p:nvSpPr>
         <p:spPr>
           <a:xfrm>
-            <a:off x="5370141" y="4169664"/>
-            <a:ext cx="685800" cy="384048"/>
+            <a:off x="4129430" y="4169664"/>
+            <a:ext cx="676656" cy="384048"/>
           </a:xfrm>
           <a:prstGeom prst="rect">
             <a:avLst>
@@ -29732,8 +29786,8 @@
         </p:nvSpPr>
         <p:spPr>
           <a:xfrm>
-            <a:off x="5370141" y="4169664"/>
-            <a:ext cx="685800" cy="384048"/>
+            <a:off x="4129430" y="4169664"/>
+            <a:ext cx="676656" cy="384048"/>
           </a:xfrm>
           <a:prstGeom prst="rect">
             <a:avLst/>
@@ -29757,7 +29811,7 @@
                 <a:ea typeface="Trebuchet MS" pitchFamily="34" charset="-122"/>
                 <a:cs typeface="Trebuchet MS" pitchFamily="34" charset="-120"/>
               </a:rPr>
-              <a:t>t</a:t>
+              <a:t>k</a:t>
             </a:r>
             <a:endParaRPr lang="en-US" sz="900" dirty="0"/>
           </a:p>
@@ -29771,8 +29825,8 @@
         </p:nvSpPr>
         <p:spPr>
           <a:xfrm>
-            <a:off x="6408638" y="4169664"/>
-            <a:ext cx="685800" cy="384048"/>
+            <a:off x="4855464" y="4169664"/>
+            <a:ext cx="676656" cy="384048"/>
           </a:xfrm>
           <a:prstGeom prst="rect">
             <a:avLst>
@@ -29798,8 +29852,8 @@
         </p:nvSpPr>
         <p:spPr>
           <a:xfrm>
-            <a:off x="6408638" y="4169664"/>
-            <a:ext cx="685800" cy="384048"/>
+            <a:off x="4855464" y="4169664"/>
+            <a:ext cx="676656" cy="384048"/>
           </a:xfrm>
           <a:prstGeom prst="rect">
             <a:avLst/>
@@ -29823,7 +29877,7 @@
                 <a:ea typeface="Trebuchet MS" pitchFamily="34" charset="-122"/>
                 <a:cs typeface="Trebuchet MS" pitchFamily="34" charset="-120"/>
               </a:rPr>
-              <a:t>i</a:t>
+              <a:t>a</a:t>
             </a:r>
             <a:endParaRPr lang="en-US" sz="900" dirty="0"/>
           </a:p>
@@ -29837,8 +29891,8 @@
         </p:nvSpPr>
         <p:spPr>
           <a:xfrm>
-            <a:off x="7447135" y="4169664"/>
-            <a:ext cx="685800" cy="384048"/>
+            <a:off x="5581498" y="4169664"/>
+            <a:ext cx="676656" cy="384048"/>
           </a:xfrm>
           <a:prstGeom prst="rect">
             <a:avLst>
@@ -29864,8 +29918,8 @@
         </p:nvSpPr>
         <p:spPr>
           <a:xfrm>
-            <a:off x="7447135" y="4169664"/>
-            <a:ext cx="685800" cy="384048"/>
+            <a:off x="5581498" y="4169664"/>
+            <a:ext cx="676656" cy="384048"/>
           </a:xfrm>
           <a:prstGeom prst="rect">
             <a:avLst/>
@@ -29889,7 +29943,7 @@
                 <a:ea typeface="Trebuchet MS" pitchFamily="34" charset="-122"/>
                 <a:cs typeface="Trebuchet MS" pitchFamily="34" charset="-120"/>
               </a:rPr>
-              <a:t>ve</a:t>
+              <a:t>t</a:t>
             </a:r>
             <a:endParaRPr lang="en-US" sz="900" dirty="0"/>
           </a:p>
@@ -29897,14 +29951,212 @@
       </p:sp>
       <p:sp>
         <p:nvSpPr>
-          <p:cNvPr id="49" name="Text 47"/>
-          <p:cNvSpPr/>
-          <p:nvPr/>
-        </p:nvSpPr>
-        <p:spPr>
-          <a:xfrm>
-            <a:off x="7447135" y="4572000"/>
-            <a:ext cx="685800" cy="219456"/>
+          <p:cNvPr id="49" name="Shape 47"/>
+          <p:cNvSpPr/>
+          <p:nvPr/>
+        </p:nvSpPr>
+        <p:spPr>
+          <a:xfrm>
+            <a:off x="6307531" y="4169664"/>
+            <a:ext cx="676656" cy="384048"/>
+          </a:xfrm>
+          <a:prstGeom prst="rect">
+            <a:avLst>
+              <a:gd name="adj" fmla="val 9524"/>
+            </a:avLst>
+          </a:prstGeom>
+          <a:solidFill>
+            <a:srgbClr val="FFFFFF"/>
+          </a:solidFill>
+          <a:ln w="12700">
+            <a:solidFill>
+              <a:srgbClr val="DB2777"/>
+            </a:solidFill>
+            <a:prstDash val="solid"/>
+          </a:ln>
+        </p:spPr>
+      </p:sp>
+      <p:sp>
+        <p:nvSpPr>
+          <p:cNvPr id="50" name="Text 48"/>
+          <p:cNvSpPr/>
+          <p:nvPr/>
+        </p:nvSpPr>
+        <p:spPr>
+          <a:xfrm>
+            <a:off x="6307531" y="4169664"/>
+            <a:ext cx="676656" cy="384048"/>
+          </a:xfrm>
+          <a:prstGeom prst="rect">
+            <a:avLst/>
+          </a:prstGeom>
+          <a:noFill/>
+          <a:ln/>
+        </p:spPr>
+        <p:txBody>
+          <a:bodyPr wrap="square" lIns="0" tIns="0" rIns="0" bIns="0" rtlCol="0" anchor="ctr"/>
+          <a:lstStyle/>
+          <a:p>
+            <a:pPr algn="ctr" indent="0" marL="0">
+              <a:buNone/>
+            </a:pPr>
+            <a:r>
+              <a:rPr lang="en-US" sz="900" b="1" dirty="0">
+                <a:solidFill>
+                  <a:srgbClr val="9D174D"/>
+                </a:solidFill>
+                <a:latin typeface="Trebuchet MS" pitchFamily="34" charset="0"/>
+                <a:ea typeface="Trebuchet MS" pitchFamily="34" charset="-122"/>
+                <a:cs typeface="Trebuchet MS" pitchFamily="34" charset="-120"/>
+              </a:rPr>
+              <a:t>i</a:t>
+            </a:r>
+            <a:endParaRPr lang="en-US" sz="900" dirty="0"/>
+          </a:p>
+        </p:txBody>
+      </p:sp>
+      <p:sp>
+        <p:nvSpPr>
+          <p:cNvPr id="51" name="Shape 49"/>
+          <p:cNvSpPr/>
+          <p:nvPr/>
+        </p:nvSpPr>
+        <p:spPr>
+          <a:xfrm>
+            <a:off x="7033565" y="4169664"/>
+            <a:ext cx="676656" cy="384048"/>
+          </a:xfrm>
+          <a:prstGeom prst="rect">
+            <a:avLst>
+              <a:gd name="adj" fmla="val 9524"/>
+            </a:avLst>
+          </a:prstGeom>
+          <a:solidFill>
+            <a:srgbClr val="FFFFFF"/>
+          </a:solidFill>
+          <a:ln w="12700">
+            <a:solidFill>
+              <a:srgbClr val="DB2777"/>
+            </a:solidFill>
+            <a:prstDash val="solid"/>
+          </a:ln>
+        </p:spPr>
+      </p:sp>
+      <p:sp>
+        <p:nvSpPr>
+          <p:cNvPr id="52" name="Text 50"/>
+          <p:cNvSpPr/>
+          <p:nvPr/>
+        </p:nvSpPr>
+        <p:spPr>
+          <a:xfrm>
+            <a:off x="7033565" y="4169664"/>
+            <a:ext cx="676656" cy="384048"/>
+          </a:xfrm>
+          <a:prstGeom prst="rect">
+            <a:avLst/>
+          </a:prstGeom>
+          <a:noFill/>
+          <a:ln/>
+        </p:spPr>
+        <p:txBody>
+          <a:bodyPr wrap="square" lIns="0" tIns="0" rIns="0" bIns="0" rtlCol="0" anchor="ctr"/>
+          <a:lstStyle/>
+          <a:p>
+            <a:pPr algn="ctr" indent="0" marL="0">
+              <a:buNone/>
+            </a:pPr>
+            <a:r>
+              <a:rPr lang="en-US" sz="900" b="1" dirty="0">
+                <a:solidFill>
+                  <a:srgbClr val="9D174D"/>
+                </a:solidFill>
+                <a:latin typeface="Trebuchet MS" pitchFamily="34" charset="0"/>
+                <a:ea typeface="Trebuchet MS" pitchFamily="34" charset="-122"/>
+                <a:cs typeface="Trebuchet MS" pitchFamily="34" charset="-120"/>
+              </a:rPr>
+              <a:t>v</a:t>
+            </a:r>
+            <a:endParaRPr lang="en-US" sz="900" dirty="0"/>
+          </a:p>
+        </p:txBody>
+      </p:sp>
+      <p:sp>
+        <p:nvSpPr>
+          <p:cNvPr id="53" name="Shape 51"/>
+          <p:cNvSpPr/>
+          <p:nvPr/>
+        </p:nvSpPr>
+        <p:spPr>
+          <a:xfrm>
+            <a:off x="7759598" y="4169664"/>
+            <a:ext cx="676656" cy="384048"/>
+          </a:xfrm>
+          <a:prstGeom prst="rect">
+            <a:avLst>
+              <a:gd name="adj" fmla="val 9524"/>
+            </a:avLst>
+          </a:prstGeom>
+          <a:solidFill>
+            <a:srgbClr val="FFFFFF"/>
+          </a:solidFill>
+          <a:ln w="12700">
+            <a:solidFill>
+              <a:srgbClr val="DB2777"/>
+            </a:solidFill>
+            <a:prstDash val="solid"/>
+          </a:ln>
+        </p:spPr>
+      </p:sp>
+      <p:sp>
+        <p:nvSpPr>
+          <p:cNvPr id="54" name="Text 52"/>
+          <p:cNvSpPr/>
+          <p:nvPr/>
+        </p:nvSpPr>
+        <p:spPr>
+          <a:xfrm>
+            <a:off x="7759598" y="4169664"/>
+            <a:ext cx="676656" cy="384048"/>
+          </a:xfrm>
+          <a:prstGeom prst="rect">
+            <a:avLst/>
+          </a:prstGeom>
+          <a:noFill/>
+          <a:ln/>
+        </p:spPr>
+        <p:txBody>
+          <a:bodyPr wrap="square" lIns="0" tIns="0" rIns="0" bIns="0" rtlCol="0" anchor="ctr"/>
+          <a:lstStyle/>
+          <a:p>
+            <a:pPr algn="ctr" indent="0" marL="0">
+              <a:buNone/>
+            </a:pPr>
+            <a:r>
+              <a:rPr lang="en-US" sz="900" b="1" dirty="0">
+                <a:solidFill>
+                  <a:srgbClr val="9D174D"/>
+                </a:solidFill>
+                <a:latin typeface="Trebuchet MS" pitchFamily="34" charset="0"/>
+                <a:ea typeface="Trebuchet MS" pitchFamily="34" charset="-122"/>
+                <a:cs typeface="Trebuchet MS" pitchFamily="34" charset="-120"/>
+              </a:rPr>
+              <a:t>e</a:t>
+            </a:r>
+            <a:endParaRPr lang="en-US" sz="900" dirty="0"/>
+          </a:p>
+        </p:txBody>
+      </p:sp>
+      <p:sp>
+        <p:nvSpPr>
+          <p:cNvPr id="55" name="Text 53"/>
+          <p:cNvSpPr/>
+          <p:nvPr/>
+        </p:nvSpPr>
+        <p:spPr>
+          <a:xfrm>
+            <a:off x="7759598" y="4572000"/>
+            <a:ext cx="676656" cy="219456"/>
           </a:xfrm>
           <a:prstGeom prst="rect">
             <a:avLst/>
@@ -29928,7 +30180,7 @@
                 <a:ea typeface="Calibri" pitchFamily="34" charset="-122"/>
                 <a:cs typeface="Calibri" pitchFamily="34" charset="-120"/>
               </a:rPr>
-              <a:t>/v/</a:t>
+              <a:t>silent</a:t>
             </a:r>
             <a:endParaRPr lang="en-US" sz="750" dirty="0"/>
           </a:p>
@@ -30359,7 +30611,7 @@
                 <a:ea typeface="Trebuchet MS" pitchFamily="34" charset="-122"/>
                 <a:cs typeface="Trebuchet MS" pitchFamily="34" charset="-120"/>
               </a:rPr>
-              <a:t>narrative</a:t>
+              <a:t>informative</a:t>
             </a:r>
             <a:endParaRPr lang="en-US" sz="2800" dirty="0"/>
           </a:p>
@@ -31186,7 +31438,7 @@
                 <a:ea typeface="Trebuchet MS" pitchFamily="34" charset="-122"/>
                 <a:cs typeface="Trebuchet MS" pitchFamily="34" charset="-120"/>
               </a:rPr>
-              <a:t>narrative</a:t>
+              <a:t>informative</a:t>
             </a:r>
             <a:endParaRPr lang="en-US" sz="2800" dirty="0"/>
           </a:p>
@@ -31266,7 +31518,7 @@
         </p:nvSpPr>
         <p:spPr>
           <a:xfrm>
-            <a:off x="2938272" y="2258568"/>
+            <a:off x="2221992" y="2258568"/>
             <a:ext cx="1828800" cy="292608"/>
           </a:xfrm>
           <a:prstGeom prst="rect">
@@ -31300,7 +31552,7 @@
         </p:nvSpPr>
         <p:spPr>
           <a:xfrm>
-            <a:off x="2938272" y="2258568"/>
+            <a:off x="2221992" y="2258568"/>
             <a:ext cx="1828800" cy="292608"/>
           </a:xfrm>
           <a:prstGeom prst="rect">
@@ -31325,7 +31577,7 @@
                 <a:ea typeface="Trebuchet MS" pitchFamily="34" charset="-122"/>
                 <a:cs typeface="Trebuchet MS" pitchFamily="34" charset="-120"/>
               </a:rPr>
-              <a:t>narr</a:t>
+              <a:t>in</a:t>
             </a:r>
             <a:endParaRPr lang="en-US" sz="1300" dirty="0"/>
           </a:p>
@@ -31339,7 +31591,7 @@
         </p:nvSpPr>
         <p:spPr>
           <a:xfrm>
-            <a:off x="2938272" y="2569464"/>
+            <a:off x="2221992" y="2569464"/>
             <a:ext cx="1828800" cy="201168"/>
           </a:xfrm>
           <a:prstGeom prst="rect">
@@ -31364,7 +31616,7 @@
                 <a:ea typeface="Calibri" pitchFamily="34" charset="-122"/>
                 <a:cs typeface="Calibri" pitchFamily="34" charset="-120"/>
               </a:rPr>
-              <a:t>to tell a story</a:t>
+              <a:t>into, upon</a:t>
             </a:r>
             <a:endParaRPr lang="en-US" sz="850" dirty="0"/>
           </a:p>
@@ -31378,7 +31630,7 @@
         </p:nvSpPr>
         <p:spPr>
           <a:xfrm>
-            <a:off x="5803392" y="2258568"/>
+            <a:off x="4370832" y="2258568"/>
             <a:ext cx="1828800" cy="292608"/>
           </a:xfrm>
           <a:prstGeom prst="rect">
@@ -31387,11 +31639,11 @@
             </a:avLst>
           </a:prstGeom>
           <a:solidFill>
-            <a:srgbClr val="CCFBF1"/>
+            <a:srgbClr val="FCE7F3"/>
           </a:solidFill>
           <a:ln w="19050">
             <a:solidFill>
-              <a:srgbClr val="0D9488"/>
+              <a:srgbClr val="DB2777"/>
             </a:solidFill>
             <a:prstDash val="solid"/>
           </a:ln>
@@ -31412,7 +31664,7 @@
         </p:nvSpPr>
         <p:spPr>
           <a:xfrm>
-            <a:off x="5803392" y="2258568"/>
+            <a:off x="4370832" y="2258568"/>
             <a:ext cx="1828800" cy="292608"/>
           </a:xfrm>
           <a:prstGeom prst="rect">
@@ -31431,13 +31683,13 @@
             <a:r>
               <a:rPr lang="en-US" sz="1300" b="1" dirty="0">
                 <a:solidFill>
-                  <a:srgbClr val="0F766E"/>
+                  <a:srgbClr val="9D174D"/>
                 </a:solidFill>
                 <a:latin typeface="Trebuchet MS" pitchFamily="34" charset="0"/>
                 <a:ea typeface="Trebuchet MS" pitchFamily="34" charset="-122"/>
                 <a:cs typeface="Trebuchet MS" pitchFamily="34" charset="-120"/>
               </a:rPr>
-              <a:t>ative</a:t>
+              <a:t>form</a:t>
             </a:r>
             <a:endParaRPr lang="en-US" sz="1300" dirty="0"/>
           </a:p>
@@ -31451,7 +31703,7 @@
         </p:nvSpPr>
         <p:spPr>
           <a:xfrm>
-            <a:off x="5803392" y="2569464"/>
+            <a:off x="4370832" y="2569464"/>
             <a:ext cx="1828800" cy="201168"/>
           </a:xfrm>
           <a:prstGeom prst="rect">
@@ -31476,7 +31728,7 @@
                 <a:ea typeface="Calibri" pitchFamily="34" charset="-122"/>
                 <a:cs typeface="Calibri" pitchFamily="34" charset="-120"/>
               </a:rPr>
-              <a:t>relating to</a:t>
+              <a:t>shape, knowledge</a:t>
             </a:r>
             <a:endParaRPr lang="en-US" sz="850" dirty="0"/>
           </a:p>
@@ -31485,6 +31737,118 @@
       <p:sp>
         <p:nvSpPr>
           <p:cNvPr id="22" name="Shape 20"/>
+          <p:cNvSpPr/>
+          <p:nvPr/>
+        </p:nvSpPr>
+        <p:spPr>
+          <a:xfrm>
+            <a:off x="6519672" y="2258568"/>
+            <a:ext cx="1828800" cy="292608"/>
+          </a:xfrm>
+          <a:prstGeom prst="rect">
+            <a:avLst>
+              <a:gd name="adj" fmla="val 25000"/>
+            </a:avLst>
+          </a:prstGeom>
+          <a:solidFill>
+            <a:srgbClr val="CCFBF1"/>
+          </a:solidFill>
+          <a:ln w="19050">
+            <a:solidFill>
+              <a:srgbClr val="0D9488"/>
+            </a:solidFill>
+            <a:prstDash val="solid"/>
+          </a:ln>
+          <a:effectLst>
+            <a:outerShdw sx="100000" sy="100000" kx="0" ky="0" algn="bl" rotWithShape="0" blurRad="101600" dist="38100" dir="8100000">
+              <a:srgbClr val="000000">
+                <a:alpha val="12000"/>
+              </a:srgbClr>
+            </a:outerShdw>
+          </a:effectLst>
+        </p:spPr>
+      </p:sp>
+      <p:sp>
+        <p:nvSpPr>
+          <p:cNvPr id="23" name="Text 21"/>
+          <p:cNvSpPr/>
+          <p:nvPr/>
+        </p:nvSpPr>
+        <p:spPr>
+          <a:xfrm>
+            <a:off x="6519672" y="2258568"/>
+            <a:ext cx="1828800" cy="292608"/>
+          </a:xfrm>
+          <a:prstGeom prst="rect">
+            <a:avLst/>
+          </a:prstGeom>
+          <a:noFill/>
+          <a:ln/>
+        </p:spPr>
+        <p:txBody>
+          <a:bodyPr wrap="square" lIns="0" tIns="0" rIns="0" bIns="0" rtlCol="0" anchor="ctr"/>
+          <a:lstStyle/>
+          <a:p>
+            <a:pPr algn="ctr" indent="0" marL="0">
+              <a:buNone/>
+            </a:pPr>
+            <a:r>
+              <a:rPr lang="en-US" sz="1300" b="1" dirty="0">
+                <a:solidFill>
+                  <a:srgbClr val="0F766E"/>
+                </a:solidFill>
+                <a:latin typeface="Trebuchet MS" pitchFamily="34" charset="0"/>
+                <a:ea typeface="Trebuchet MS" pitchFamily="34" charset="-122"/>
+                <a:cs typeface="Trebuchet MS" pitchFamily="34" charset="-120"/>
+              </a:rPr>
+              <a:t>ative</a:t>
+            </a:r>
+            <a:endParaRPr lang="en-US" sz="1300" dirty="0"/>
+          </a:p>
+        </p:txBody>
+      </p:sp>
+      <p:sp>
+        <p:nvSpPr>
+          <p:cNvPr id="24" name="Text 22"/>
+          <p:cNvSpPr/>
+          <p:nvPr/>
+        </p:nvSpPr>
+        <p:spPr>
+          <a:xfrm>
+            <a:off x="6519672" y="2569464"/>
+            <a:ext cx="1828800" cy="201168"/>
+          </a:xfrm>
+          <a:prstGeom prst="rect">
+            <a:avLst/>
+          </a:prstGeom>
+          <a:noFill/>
+          <a:ln/>
+        </p:spPr>
+        <p:txBody>
+          <a:bodyPr wrap="square" lIns="0" tIns="0" rIns="0" bIns="0" rtlCol="0" anchor="t"/>
+          <a:lstStyle/>
+          <a:p>
+            <a:pPr algn="ctr" indent="0" marL="0">
+              <a:buNone/>
+            </a:pPr>
+            <a:r>
+              <a:rPr lang="en-US" sz="850" dirty="0">
+                <a:solidFill>
+                  <a:srgbClr val="475569"/>
+                </a:solidFill>
+                <a:latin typeface="Calibri" pitchFamily="34" charset="0"/>
+                <a:ea typeface="Calibri" pitchFamily="34" charset="-122"/>
+                <a:cs typeface="Calibri" pitchFamily="34" charset="-120"/>
+              </a:rPr>
+              <a:t>tending to, relating to</a:t>
+            </a:r>
+            <a:endParaRPr lang="en-US" sz="850" dirty="0"/>
+          </a:p>
+        </p:txBody>
+      </p:sp>
+      <p:sp>
+        <p:nvSpPr>
+          <p:cNvPr id="25" name="Shape 23"/>
           <p:cNvSpPr/>
           <p:nvPr/>
         </p:nvSpPr>
@@ -31511,7 +31875,7 @@
       </p:sp>
       <p:sp>
         <p:nvSpPr>
-          <p:cNvPr id="23" name="Text 21"/>
+          <p:cNvPr id="26" name="Text 24"/>
           <p:cNvSpPr/>
           <p:nvPr/>
         </p:nvSpPr>
@@ -31550,7 +31914,7 @@
       </p:sp>
       <p:sp>
         <p:nvSpPr>
-          <p:cNvPr id="24" name="Shape 22"/>
+          <p:cNvPr id="27" name="Shape 25"/>
           <p:cNvSpPr/>
           <p:nvPr/>
         </p:nvSpPr>
@@ -31577,7 +31941,7 @@
       </p:sp>
       <p:sp>
         <p:nvSpPr>
-          <p:cNvPr id="25" name="Text 23"/>
+          <p:cNvPr id="28" name="Text 26"/>
           <p:cNvSpPr/>
           <p:nvPr/>
         </p:nvSpPr>
@@ -31616,7 +31980,7 @@
       </p:sp>
       <p:sp>
         <p:nvSpPr>
-          <p:cNvPr id="26" name="Shape 24"/>
+          <p:cNvPr id="29" name="Shape 27"/>
           <p:cNvSpPr/>
           <p:nvPr/>
         </p:nvSpPr>
@@ -31643,7 +32007,7 @@
       </p:sp>
       <p:sp>
         <p:nvSpPr>
-          <p:cNvPr id="27" name="Text 25"/>
+          <p:cNvPr id="30" name="Text 28"/>
           <p:cNvSpPr/>
           <p:nvPr/>
         </p:nvSpPr>
@@ -31682,7 +32046,7 @@
       </p:sp>
       <p:sp>
         <p:nvSpPr>
-          <p:cNvPr id="28" name="Shape 26"/>
+          <p:cNvPr id="31" name="Shape 29"/>
           <p:cNvSpPr/>
           <p:nvPr/>
         </p:nvSpPr>
@@ -31709,7 +32073,7 @@
       </p:sp>
       <p:sp>
         <p:nvSpPr>
-          <p:cNvPr id="29" name="Text 27"/>
+          <p:cNvPr id="32" name="Text 30"/>
           <p:cNvSpPr/>
           <p:nvPr/>
         </p:nvSpPr>
@@ -32171,7 +32535,7 @@
                 <a:ea typeface="Trebuchet MS" pitchFamily="34" charset="-122"/>
                 <a:cs typeface="Trebuchet MS" pitchFamily="34" charset="-120"/>
               </a:rPr>
-              <a:t>narrative</a:t>
+              <a:t>informative</a:t>
             </a:r>
             <a:endParaRPr lang="en-US" sz="2800" dirty="0"/>
           </a:p>
@@ -32251,7 +32615,7 @@
         </p:nvSpPr>
         <p:spPr>
           <a:xfrm>
-            <a:off x="2938272" y="2258568"/>
+            <a:off x="2221992" y="2258568"/>
             <a:ext cx="1828800" cy="292608"/>
           </a:xfrm>
           <a:prstGeom prst="rect">
@@ -32285,7 +32649,7 @@
         </p:nvSpPr>
         <p:spPr>
           <a:xfrm>
-            <a:off x="2938272" y="2258568"/>
+            <a:off x="2221992" y="2258568"/>
             <a:ext cx="1828800" cy="292608"/>
           </a:xfrm>
           <a:prstGeom prst="rect">
@@ -32310,7 +32674,7 @@
                 <a:ea typeface="Trebuchet MS" pitchFamily="34" charset="-122"/>
                 <a:cs typeface="Trebuchet MS" pitchFamily="34" charset="-120"/>
               </a:rPr>
-              <a:t>narr</a:t>
+              <a:t>in</a:t>
             </a:r>
             <a:endParaRPr lang="en-US" sz="1300" dirty="0"/>
           </a:p>
@@ -32324,7 +32688,7 @@
         </p:nvSpPr>
         <p:spPr>
           <a:xfrm>
-            <a:off x="2938272" y="2569464"/>
+            <a:off x="2221992" y="2569464"/>
             <a:ext cx="1828800" cy="201168"/>
           </a:xfrm>
           <a:prstGeom prst="rect">
@@ -32349,7 +32713,7 @@
                 <a:ea typeface="Calibri" pitchFamily="34" charset="-122"/>
                 <a:cs typeface="Calibri" pitchFamily="34" charset="-120"/>
               </a:rPr>
-              <a:t>to tell a story</a:t>
+              <a:t>into, upon</a:t>
             </a:r>
             <a:endParaRPr lang="en-US" sz="850" dirty="0"/>
           </a:p>
@@ -32363,7 +32727,7 @@
         </p:nvSpPr>
         <p:spPr>
           <a:xfrm>
-            <a:off x="5803392" y="2258568"/>
+            <a:off x="4370832" y="2258568"/>
             <a:ext cx="1828800" cy="292608"/>
           </a:xfrm>
           <a:prstGeom prst="rect">
@@ -32372,11 +32736,11 @@
             </a:avLst>
           </a:prstGeom>
           <a:solidFill>
-            <a:srgbClr val="CCFBF1"/>
+            <a:srgbClr val="FCE7F3"/>
           </a:solidFill>
           <a:ln w="19050">
             <a:solidFill>
-              <a:srgbClr val="0D9488"/>
+              <a:srgbClr val="DB2777"/>
             </a:solidFill>
             <a:prstDash val="solid"/>
           </a:ln>
@@ -32397,7 +32761,7 @@
         </p:nvSpPr>
         <p:spPr>
           <a:xfrm>
-            <a:off x="5803392" y="2258568"/>
+            <a:off x="4370832" y="2258568"/>
             <a:ext cx="1828800" cy="292608"/>
           </a:xfrm>
           <a:prstGeom prst="rect">
@@ -32416,13 +32780,13 @@
             <a:r>
               <a:rPr lang="en-US" sz="1300" b="1" dirty="0">
                 <a:solidFill>
-                  <a:srgbClr val="0F766E"/>
+                  <a:srgbClr val="9D174D"/>
                 </a:solidFill>
                 <a:latin typeface="Trebuchet MS" pitchFamily="34" charset="0"/>
                 <a:ea typeface="Trebuchet MS" pitchFamily="34" charset="-122"/>
                 <a:cs typeface="Trebuchet MS" pitchFamily="34" charset="-120"/>
               </a:rPr>
-              <a:t>ative</a:t>
+              <a:t>form</a:t>
             </a:r>
             <a:endParaRPr lang="en-US" sz="1300" dirty="0"/>
           </a:p>
@@ -32436,7 +32800,7 @@
         </p:nvSpPr>
         <p:spPr>
           <a:xfrm>
-            <a:off x="5803392" y="2569464"/>
+            <a:off x="4370832" y="2569464"/>
             <a:ext cx="1828800" cy="201168"/>
           </a:xfrm>
           <a:prstGeom prst="rect">
@@ -32461,7 +32825,7 @@
                 <a:ea typeface="Calibri" pitchFamily="34" charset="-122"/>
                 <a:cs typeface="Calibri" pitchFamily="34" charset="-120"/>
               </a:rPr>
-              <a:t>relating to</a:t>
+              <a:t>shape, knowledge</a:t>
             </a:r>
             <a:endParaRPr lang="en-US" sz="850" dirty="0"/>
           </a:p>
@@ -32470,6 +32834,118 @@
       <p:sp>
         <p:nvSpPr>
           <p:cNvPr id="22" name="Shape 20"/>
+          <p:cNvSpPr/>
+          <p:nvPr/>
+        </p:nvSpPr>
+        <p:spPr>
+          <a:xfrm>
+            <a:off x="6519672" y="2258568"/>
+            <a:ext cx="1828800" cy="292608"/>
+          </a:xfrm>
+          <a:prstGeom prst="rect">
+            <a:avLst>
+              <a:gd name="adj" fmla="val 25000"/>
+            </a:avLst>
+          </a:prstGeom>
+          <a:solidFill>
+            <a:srgbClr val="CCFBF1"/>
+          </a:solidFill>
+          <a:ln w="19050">
+            <a:solidFill>
+              <a:srgbClr val="0D9488"/>
+            </a:solidFill>
+            <a:prstDash val="solid"/>
+          </a:ln>
+          <a:effectLst>
+            <a:outerShdw sx="100000" sy="100000" kx="0" ky="0" algn="bl" rotWithShape="0" blurRad="101600" dist="38100" dir="8100000">
+              <a:srgbClr val="000000">
+                <a:alpha val="12000"/>
+              </a:srgbClr>
+            </a:outerShdw>
+          </a:effectLst>
+        </p:spPr>
+      </p:sp>
+      <p:sp>
+        <p:nvSpPr>
+          <p:cNvPr id="23" name="Text 21"/>
+          <p:cNvSpPr/>
+          <p:nvPr/>
+        </p:nvSpPr>
+        <p:spPr>
+          <a:xfrm>
+            <a:off x="6519672" y="2258568"/>
+            <a:ext cx="1828800" cy="292608"/>
+          </a:xfrm>
+          <a:prstGeom prst="rect">
+            <a:avLst/>
+          </a:prstGeom>
+          <a:noFill/>
+          <a:ln/>
+        </p:spPr>
+        <p:txBody>
+          <a:bodyPr wrap="square" lIns="0" tIns="0" rIns="0" bIns="0" rtlCol="0" anchor="ctr"/>
+          <a:lstStyle/>
+          <a:p>
+            <a:pPr algn="ctr" indent="0" marL="0">
+              <a:buNone/>
+            </a:pPr>
+            <a:r>
+              <a:rPr lang="en-US" sz="1300" b="1" dirty="0">
+                <a:solidFill>
+                  <a:srgbClr val="0F766E"/>
+                </a:solidFill>
+                <a:latin typeface="Trebuchet MS" pitchFamily="34" charset="0"/>
+                <a:ea typeface="Trebuchet MS" pitchFamily="34" charset="-122"/>
+                <a:cs typeface="Trebuchet MS" pitchFamily="34" charset="-120"/>
+              </a:rPr>
+              <a:t>ative</a:t>
+            </a:r>
+            <a:endParaRPr lang="en-US" sz="1300" dirty="0"/>
+          </a:p>
+        </p:txBody>
+      </p:sp>
+      <p:sp>
+        <p:nvSpPr>
+          <p:cNvPr id="24" name="Text 22"/>
+          <p:cNvSpPr/>
+          <p:nvPr/>
+        </p:nvSpPr>
+        <p:spPr>
+          <a:xfrm>
+            <a:off x="6519672" y="2569464"/>
+            <a:ext cx="1828800" cy="201168"/>
+          </a:xfrm>
+          <a:prstGeom prst="rect">
+            <a:avLst/>
+          </a:prstGeom>
+          <a:noFill/>
+          <a:ln/>
+        </p:spPr>
+        <p:txBody>
+          <a:bodyPr wrap="square" lIns="0" tIns="0" rIns="0" bIns="0" rtlCol="0" anchor="t"/>
+          <a:lstStyle/>
+          <a:p>
+            <a:pPr algn="ctr" indent="0" marL="0">
+              <a:buNone/>
+            </a:pPr>
+            <a:r>
+              <a:rPr lang="en-US" sz="850" dirty="0">
+                <a:solidFill>
+                  <a:srgbClr val="475569"/>
+                </a:solidFill>
+                <a:latin typeface="Calibri" pitchFamily="34" charset="0"/>
+                <a:ea typeface="Calibri" pitchFamily="34" charset="-122"/>
+                <a:cs typeface="Calibri" pitchFamily="34" charset="-120"/>
+              </a:rPr>
+              <a:t>tending to, relating to</a:t>
+            </a:r>
+            <a:endParaRPr lang="en-US" sz="850" dirty="0"/>
+          </a:p>
+        </p:txBody>
+      </p:sp>
+      <p:sp>
+        <p:nvSpPr>
+          <p:cNvPr id="25" name="Shape 23"/>
           <p:cNvSpPr/>
           <p:nvPr/>
         </p:nvSpPr>
@@ -32496,7 +32972,7 @@
       </p:sp>
       <p:sp>
         <p:nvSpPr>
-          <p:cNvPr id="23" name="Text 21"/>
+          <p:cNvPr id="26" name="Text 24"/>
           <p:cNvSpPr/>
           <p:nvPr/>
         </p:nvSpPr>
@@ -32535,7 +33011,7 @@
       </p:sp>
       <p:sp>
         <p:nvSpPr>
-          <p:cNvPr id="24" name="Shape 22"/>
+          <p:cNvPr id="27" name="Shape 25"/>
           <p:cNvSpPr/>
           <p:nvPr/>
         </p:nvSpPr>
@@ -32562,14 +33038,14 @@
       </p:sp>
       <p:sp>
         <p:nvSpPr>
-          <p:cNvPr id="25" name="Shape 23"/>
-          <p:cNvSpPr/>
-          <p:nvPr/>
-        </p:nvSpPr>
-        <p:spPr>
-          <a:xfrm>
-            <a:off x="2313432" y="3364992"/>
-            <a:ext cx="1645920" cy="475488"/>
+          <p:cNvPr id="28" name="Shape 26"/>
+          <p:cNvSpPr/>
+          <p:nvPr/>
+        </p:nvSpPr>
+        <p:spPr>
+          <a:xfrm>
+            <a:off x="1975104" y="3364992"/>
+            <a:ext cx="1554480" cy="475488"/>
           </a:xfrm>
           <a:prstGeom prst="rect">
             <a:avLst>
@@ -32589,14 +33065,14 @@
       </p:sp>
       <p:sp>
         <p:nvSpPr>
-          <p:cNvPr id="26" name="Text 24"/>
-          <p:cNvSpPr/>
-          <p:nvPr/>
-        </p:nvSpPr>
-        <p:spPr>
-          <a:xfrm>
-            <a:off x="2313432" y="3364992"/>
-            <a:ext cx="1645920" cy="475488"/>
+          <p:cNvPr id="29" name="Text 27"/>
+          <p:cNvSpPr/>
+          <p:nvPr/>
+        </p:nvSpPr>
+        <p:spPr>
+          <a:xfrm>
+            <a:off x="1975104" y="3364992"/>
+            <a:ext cx="1554480" cy="475488"/>
           </a:xfrm>
           <a:prstGeom prst="rect">
             <a:avLst/>
@@ -32620,7 +33096,7 @@
                 <a:ea typeface="Trebuchet MS" pitchFamily="34" charset="-122"/>
                 <a:cs typeface="Trebuchet MS" pitchFamily="34" charset="-120"/>
               </a:rPr>
-              <a:t>nar</a:t>
+              <a:t>in</a:t>
             </a:r>
             <a:endParaRPr lang="en-US" sz="1400" dirty="0"/>
           </a:p>
@@ -32628,14 +33104,14 @@
       </p:sp>
       <p:sp>
         <p:nvSpPr>
-          <p:cNvPr id="27" name="Text 25"/>
-          <p:cNvSpPr/>
-          <p:nvPr/>
-        </p:nvSpPr>
-        <p:spPr>
-          <a:xfrm>
-            <a:off x="3959352" y="3364992"/>
-            <a:ext cx="411480" cy="475488"/>
+          <p:cNvPr id="30" name="Text 28"/>
+          <p:cNvSpPr/>
+          <p:nvPr/>
+        </p:nvSpPr>
+        <p:spPr>
+          <a:xfrm>
+            <a:off x="3529584" y="3364992"/>
+            <a:ext cx="73152" cy="475488"/>
           </a:xfrm>
           <a:prstGeom prst="rect">
             <a:avLst/>
@@ -32667,14 +33143,14 @@
       </p:sp>
       <p:sp>
         <p:nvSpPr>
-          <p:cNvPr id="28" name="Shape 26"/>
-          <p:cNvSpPr/>
-          <p:nvPr/>
-        </p:nvSpPr>
-        <p:spPr>
-          <a:xfrm>
-            <a:off x="4370832" y="3364992"/>
-            <a:ext cx="1645920" cy="475488"/>
+          <p:cNvPr id="31" name="Shape 29"/>
+          <p:cNvSpPr/>
+          <p:nvPr/>
+        </p:nvSpPr>
+        <p:spPr>
+          <a:xfrm>
+            <a:off x="3602736" y="3364992"/>
+            <a:ext cx="1554480" cy="475488"/>
           </a:xfrm>
           <a:prstGeom prst="rect">
             <a:avLst>
@@ -32694,14 +33170,14 @@
       </p:sp>
       <p:sp>
         <p:nvSpPr>
-          <p:cNvPr id="29" name="Text 27"/>
-          <p:cNvSpPr/>
-          <p:nvPr/>
-        </p:nvSpPr>
-        <p:spPr>
-          <a:xfrm>
-            <a:off x="4370832" y="3364992"/>
-            <a:ext cx="1645920" cy="475488"/>
+          <p:cNvPr id="32" name="Text 30"/>
+          <p:cNvSpPr/>
+          <p:nvPr/>
+        </p:nvSpPr>
+        <p:spPr>
+          <a:xfrm>
+            <a:off x="3602736" y="3364992"/>
+            <a:ext cx="1554480" cy="475488"/>
           </a:xfrm>
           <a:prstGeom prst="rect">
             <a:avLst/>
@@ -32725,7 +33201,7 @@
                 <a:ea typeface="Trebuchet MS" pitchFamily="34" charset="-122"/>
                 <a:cs typeface="Trebuchet MS" pitchFamily="34" charset="-120"/>
               </a:rPr>
-              <a:t>ra</a:t>
+              <a:t>form</a:t>
             </a:r>
             <a:endParaRPr lang="en-US" sz="1400" dirty="0"/>
           </a:p>
@@ -32733,14 +33209,14 @@
       </p:sp>
       <p:sp>
         <p:nvSpPr>
-          <p:cNvPr id="30" name="Text 28"/>
-          <p:cNvSpPr/>
-          <p:nvPr/>
-        </p:nvSpPr>
-        <p:spPr>
-          <a:xfrm>
-            <a:off x="6016752" y="3364992"/>
-            <a:ext cx="411480" cy="475488"/>
+          <p:cNvPr id="33" name="Text 31"/>
+          <p:cNvSpPr/>
+          <p:nvPr/>
+        </p:nvSpPr>
+        <p:spPr>
+          <a:xfrm>
+            <a:off x="5157216" y="3364992"/>
+            <a:ext cx="73152" cy="475488"/>
           </a:xfrm>
           <a:prstGeom prst="rect">
             <a:avLst/>
@@ -32772,14 +33248,14 @@
       </p:sp>
       <p:sp>
         <p:nvSpPr>
-          <p:cNvPr id="31" name="Shape 29"/>
-          <p:cNvSpPr/>
-          <p:nvPr/>
-        </p:nvSpPr>
-        <p:spPr>
-          <a:xfrm>
-            <a:off x="6428232" y="3364992"/>
-            <a:ext cx="1645920" cy="475488"/>
+          <p:cNvPr id="34" name="Shape 32"/>
+          <p:cNvSpPr/>
+          <p:nvPr/>
+        </p:nvSpPr>
+        <p:spPr>
+          <a:xfrm>
+            <a:off x="5230368" y="3364992"/>
+            <a:ext cx="1554480" cy="475488"/>
           </a:xfrm>
           <a:prstGeom prst="rect">
             <a:avLst>
@@ -32799,14 +33275,14 @@
       </p:sp>
       <p:sp>
         <p:nvSpPr>
-          <p:cNvPr id="32" name="Text 30"/>
-          <p:cNvSpPr/>
-          <p:nvPr/>
-        </p:nvSpPr>
-        <p:spPr>
-          <a:xfrm>
-            <a:off x="6428232" y="3364992"/>
-            <a:ext cx="1645920" cy="475488"/>
+          <p:cNvPr id="35" name="Text 33"/>
+          <p:cNvSpPr/>
+          <p:nvPr/>
+        </p:nvSpPr>
+        <p:spPr>
+          <a:xfrm>
+            <a:off x="5230368" y="3364992"/>
+            <a:ext cx="1554480" cy="475488"/>
           </a:xfrm>
           <a:prstGeom prst="rect">
             <a:avLst/>
@@ -32830,6 +33306,111 @@
                 <a:ea typeface="Trebuchet MS" pitchFamily="34" charset="-122"/>
                 <a:cs typeface="Trebuchet MS" pitchFamily="34" charset="-120"/>
               </a:rPr>
+              <a:t>a</a:t>
+            </a:r>
+            <a:endParaRPr lang="en-US" sz="1400" dirty="0"/>
+          </a:p>
+        </p:txBody>
+      </p:sp>
+      <p:sp>
+        <p:nvSpPr>
+          <p:cNvPr id="36" name="Text 34"/>
+          <p:cNvSpPr/>
+          <p:nvPr/>
+        </p:nvSpPr>
+        <p:spPr>
+          <a:xfrm>
+            <a:off x="6784848" y="3364992"/>
+            <a:ext cx="73152" cy="475488"/>
+          </a:xfrm>
+          <a:prstGeom prst="rect">
+            <a:avLst/>
+          </a:prstGeom>
+          <a:noFill/>
+          <a:ln/>
+        </p:spPr>
+        <p:txBody>
+          <a:bodyPr wrap="square" lIns="0" tIns="0" rIns="0" bIns="0" rtlCol="0" anchor="ctr"/>
+          <a:lstStyle/>
+          <a:p>
+            <a:pPr algn="ctr" indent="0" marL="0">
+              <a:buNone/>
+            </a:pPr>
+            <a:r>
+              <a:rPr lang="en-US" sz="1600" b="1" dirty="0">
+                <a:solidFill>
+                  <a:srgbClr val="0D9488"/>
+                </a:solidFill>
+                <a:latin typeface="Trebuchet MS" pitchFamily="34" charset="0"/>
+                <a:ea typeface="Trebuchet MS" pitchFamily="34" charset="-122"/>
+                <a:cs typeface="Trebuchet MS" pitchFamily="34" charset="-120"/>
+              </a:rPr>
+              <a:t>·</a:t>
+            </a:r>
+            <a:endParaRPr lang="en-US" sz="1600" dirty="0"/>
+          </a:p>
+        </p:txBody>
+      </p:sp>
+      <p:sp>
+        <p:nvSpPr>
+          <p:cNvPr id="37" name="Shape 35"/>
+          <p:cNvSpPr/>
+          <p:nvPr/>
+        </p:nvSpPr>
+        <p:spPr>
+          <a:xfrm>
+            <a:off x="6858000" y="3364992"/>
+            <a:ext cx="1554480" cy="475488"/>
+          </a:xfrm>
+          <a:prstGeom prst="rect">
+            <a:avLst>
+              <a:gd name="adj" fmla="val 9615"/>
+            </a:avLst>
+          </a:prstGeom>
+          <a:solidFill>
+            <a:srgbClr val="FFFFFF"/>
+          </a:solidFill>
+          <a:ln w="12700">
+            <a:solidFill>
+              <a:srgbClr val="0D9488"/>
+            </a:solidFill>
+            <a:prstDash val="solid"/>
+          </a:ln>
+        </p:spPr>
+      </p:sp>
+      <p:sp>
+        <p:nvSpPr>
+          <p:cNvPr id="38" name="Text 36"/>
+          <p:cNvSpPr/>
+          <p:nvPr/>
+        </p:nvSpPr>
+        <p:spPr>
+          <a:xfrm>
+            <a:off x="6858000" y="3364992"/>
+            <a:ext cx="1554480" cy="475488"/>
+          </a:xfrm>
+          <a:prstGeom prst="rect">
+            <a:avLst/>
+          </a:prstGeom>
+          <a:noFill/>
+          <a:ln/>
+        </p:spPr>
+        <p:txBody>
+          <a:bodyPr wrap="square" lIns="0" tIns="0" rIns="0" bIns="0" rtlCol="0" anchor="ctr"/>
+          <a:lstStyle/>
+          <a:p>
+            <a:pPr algn="ctr" indent="0" marL="0">
+              <a:buNone/>
+            </a:pPr>
+            <a:r>
+              <a:rPr lang="en-US" sz="1400" b="1" dirty="0">
+                <a:solidFill>
+                  <a:srgbClr val="0D9488"/>
+                </a:solidFill>
+                <a:latin typeface="Trebuchet MS" pitchFamily="34" charset="0"/>
+                <a:ea typeface="Trebuchet MS" pitchFamily="34" charset="-122"/>
+                <a:cs typeface="Trebuchet MS" pitchFamily="34" charset="-120"/>
+              </a:rPr>
               <a:t>tive</a:t>
             </a:r>
             <a:endParaRPr lang="en-US" sz="1400" dirty="0"/>
@@ -32838,7 +33419,7 @@
       </p:sp>
       <p:sp>
         <p:nvSpPr>
-          <p:cNvPr id="33" name="Shape 31"/>
+          <p:cNvPr id="39" name="Shape 37"/>
           <p:cNvSpPr/>
           <p:nvPr/>
         </p:nvSpPr>
@@ -32865,7 +33446,7 @@
       </p:sp>
       <p:sp>
         <p:nvSpPr>
-          <p:cNvPr id="34" name="Text 32"/>
+          <p:cNvPr id="40" name="Text 38"/>
           <p:cNvSpPr/>
           <p:nvPr/>
         </p:nvSpPr>
@@ -32904,7 +33485,7 @@
       </p:sp>
       <p:sp>
         <p:nvSpPr>
-          <p:cNvPr id="35" name="Shape 33"/>
+          <p:cNvPr id="41" name="Shape 39"/>
           <p:cNvSpPr/>
           <p:nvPr/>
         </p:nvSpPr>
@@ -32931,7 +33512,7 @@
       </p:sp>
       <p:sp>
         <p:nvSpPr>
-          <p:cNvPr id="36" name="Text 34"/>
+          <p:cNvPr id="42" name="Text 40"/>
           <p:cNvSpPr/>
           <p:nvPr/>
         </p:nvSpPr>
@@ -33393,7 +33974,7 @@
                 <a:ea typeface="Trebuchet MS" pitchFamily="34" charset="-122"/>
                 <a:cs typeface="Trebuchet MS" pitchFamily="34" charset="-120"/>
               </a:rPr>
-              <a:t>narrative</a:t>
+              <a:t>informative</a:t>
             </a:r>
             <a:endParaRPr lang="en-US" sz="2800" dirty="0"/>
           </a:p>
@@ -33473,7 +34054,7 @@
         </p:nvSpPr>
         <p:spPr>
           <a:xfrm>
-            <a:off x="2938272" y="2258568"/>
+            <a:off x="2221992" y="2258568"/>
             <a:ext cx="1828800" cy="292608"/>
           </a:xfrm>
           <a:prstGeom prst="rect">
@@ -33507,7 +34088,7 @@
         </p:nvSpPr>
         <p:spPr>
           <a:xfrm>
-            <a:off x="2938272" y="2258568"/>
+            <a:off x="2221992" y="2258568"/>
             <a:ext cx="1828800" cy="292608"/>
           </a:xfrm>
           <a:prstGeom prst="rect">
@@ -33532,7 +34113,7 @@
                 <a:ea typeface="Trebuchet MS" pitchFamily="34" charset="-122"/>
                 <a:cs typeface="Trebuchet MS" pitchFamily="34" charset="-120"/>
               </a:rPr>
-              <a:t>narr</a:t>
+              <a:t>in</a:t>
             </a:r>
             <a:endParaRPr lang="en-US" sz="1300" dirty="0"/>
           </a:p>
@@ -33546,7 +34127,7 @@
         </p:nvSpPr>
         <p:spPr>
           <a:xfrm>
-            <a:off x="2938272" y="2569464"/>
+            <a:off x="2221992" y="2569464"/>
             <a:ext cx="1828800" cy="201168"/>
           </a:xfrm>
           <a:prstGeom prst="rect">
@@ -33571,7 +34152,7 @@
                 <a:ea typeface="Calibri" pitchFamily="34" charset="-122"/>
                 <a:cs typeface="Calibri" pitchFamily="34" charset="-120"/>
               </a:rPr>
-              <a:t>to tell a story</a:t>
+              <a:t>into, upon</a:t>
             </a:r>
             <a:endParaRPr lang="en-US" sz="850" dirty="0"/>
           </a:p>
@@ -33585,7 +34166,7 @@
         </p:nvSpPr>
         <p:spPr>
           <a:xfrm>
-            <a:off x="5803392" y="2258568"/>
+            <a:off x="4370832" y="2258568"/>
             <a:ext cx="1828800" cy="292608"/>
           </a:xfrm>
           <a:prstGeom prst="rect">
@@ -33594,11 +34175,11 @@
             </a:avLst>
           </a:prstGeom>
           <a:solidFill>
-            <a:srgbClr val="CCFBF1"/>
+            <a:srgbClr val="FCE7F3"/>
           </a:solidFill>
           <a:ln w="19050">
             <a:solidFill>
-              <a:srgbClr val="0D9488"/>
+              <a:srgbClr val="DB2777"/>
             </a:solidFill>
             <a:prstDash val="solid"/>
           </a:ln>
@@ -33619,7 +34200,7 @@
         </p:nvSpPr>
         <p:spPr>
           <a:xfrm>
-            <a:off x="5803392" y="2258568"/>
+            <a:off x="4370832" y="2258568"/>
             <a:ext cx="1828800" cy="292608"/>
           </a:xfrm>
           <a:prstGeom prst="rect">
@@ -33638,13 +34219,13 @@
             <a:r>
               <a:rPr lang="en-US" sz="1300" b="1" dirty="0">
                 <a:solidFill>
-                  <a:srgbClr val="0F766E"/>
+                  <a:srgbClr val="9D174D"/>
                 </a:solidFill>
                 <a:latin typeface="Trebuchet MS" pitchFamily="34" charset="0"/>
                 <a:ea typeface="Trebuchet MS" pitchFamily="34" charset="-122"/>
                 <a:cs typeface="Trebuchet MS" pitchFamily="34" charset="-120"/>
               </a:rPr>
-              <a:t>ative</a:t>
+              <a:t>form</a:t>
             </a:r>
             <a:endParaRPr lang="en-US" sz="1300" dirty="0"/>
           </a:p>
@@ -33658,7 +34239,7 @@
         </p:nvSpPr>
         <p:spPr>
           <a:xfrm>
-            <a:off x="5803392" y="2569464"/>
+            <a:off x="4370832" y="2569464"/>
             <a:ext cx="1828800" cy="201168"/>
           </a:xfrm>
           <a:prstGeom prst="rect">
@@ -33683,7 +34264,7 @@
                 <a:ea typeface="Calibri" pitchFamily="34" charset="-122"/>
                 <a:cs typeface="Calibri" pitchFamily="34" charset="-120"/>
               </a:rPr>
-              <a:t>relating to</a:t>
+              <a:t>shape, knowledge</a:t>
             </a:r>
             <a:endParaRPr lang="en-US" sz="850" dirty="0"/>
           </a:p>
@@ -33692,6 +34273,118 @@
       <p:sp>
         <p:nvSpPr>
           <p:cNvPr id="22" name="Shape 20"/>
+          <p:cNvSpPr/>
+          <p:nvPr/>
+        </p:nvSpPr>
+        <p:spPr>
+          <a:xfrm>
+            <a:off x="6519672" y="2258568"/>
+            <a:ext cx="1828800" cy="292608"/>
+          </a:xfrm>
+          <a:prstGeom prst="rect">
+            <a:avLst>
+              <a:gd name="adj" fmla="val 25000"/>
+            </a:avLst>
+          </a:prstGeom>
+          <a:solidFill>
+            <a:srgbClr val="CCFBF1"/>
+          </a:solidFill>
+          <a:ln w="19050">
+            <a:solidFill>
+              <a:srgbClr val="0D9488"/>
+            </a:solidFill>
+            <a:prstDash val="solid"/>
+          </a:ln>
+          <a:effectLst>
+            <a:outerShdw sx="100000" sy="100000" kx="0" ky="0" algn="bl" rotWithShape="0" blurRad="101600" dist="38100" dir="8100000">
+              <a:srgbClr val="000000">
+                <a:alpha val="12000"/>
+              </a:srgbClr>
+            </a:outerShdw>
+          </a:effectLst>
+        </p:spPr>
+      </p:sp>
+      <p:sp>
+        <p:nvSpPr>
+          <p:cNvPr id="23" name="Text 21"/>
+          <p:cNvSpPr/>
+          <p:nvPr/>
+        </p:nvSpPr>
+        <p:spPr>
+          <a:xfrm>
+            <a:off x="6519672" y="2258568"/>
+            <a:ext cx="1828800" cy="292608"/>
+          </a:xfrm>
+          <a:prstGeom prst="rect">
+            <a:avLst/>
+          </a:prstGeom>
+          <a:noFill/>
+          <a:ln/>
+        </p:spPr>
+        <p:txBody>
+          <a:bodyPr wrap="square" lIns="0" tIns="0" rIns="0" bIns="0" rtlCol="0" anchor="ctr"/>
+          <a:lstStyle/>
+          <a:p>
+            <a:pPr algn="ctr" indent="0" marL="0">
+              <a:buNone/>
+            </a:pPr>
+            <a:r>
+              <a:rPr lang="en-US" sz="1300" b="1" dirty="0">
+                <a:solidFill>
+                  <a:srgbClr val="0F766E"/>
+                </a:solidFill>
+                <a:latin typeface="Trebuchet MS" pitchFamily="34" charset="0"/>
+                <a:ea typeface="Trebuchet MS" pitchFamily="34" charset="-122"/>
+                <a:cs typeface="Trebuchet MS" pitchFamily="34" charset="-120"/>
+              </a:rPr>
+              <a:t>ative</a:t>
+            </a:r>
+            <a:endParaRPr lang="en-US" sz="1300" dirty="0"/>
+          </a:p>
+        </p:txBody>
+      </p:sp>
+      <p:sp>
+        <p:nvSpPr>
+          <p:cNvPr id="24" name="Text 22"/>
+          <p:cNvSpPr/>
+          <p:nvPr/>
+        </p:nvSpPr>
+        <p:spPr>
+          <a:xfrm>
+            <a:off x="6519672" y="2569464"/>
+            <a:ext cx="1828800" cy="201168"/>
+          </a:xfrm>
+          <a:prstGeom prst="rect">
+            <a:avLst/>
+          </a:prstGeom>
+          <a:noFill/>
+          <a:ln/>
+        </p:spPr>
+        <p:txBody>
+          <a:bodyPr wrap="square" lIns="0" tIns="0" rIns="0" bIns="0" rtlCol="0" anchor="t"/>
+          <a:lstStyle/>
+          <a:p>
+            <a:pPr algn="ctr" indent="0" marL="0">
+              <a:buNone/>
+            </a:pPr>
+            <a:r>
+              <a:rPr lang="en-US" sz="850" dirty="0">
+                <a:solidFill>
+                  <a:srgbClr val="475569"/>
+                </a:solidFill>
+                <a:latin typeface="Calibri" pitchFamily="34" charset="0"/>
+                <a:ea typeface="Calibri" pitchFamily="34" charset="-122"/>
+                <a:cs typeface="Calibri" pitchFamily="34" charset="-120"/>
+              </a:rPr>
+              <a:t>tending to, relating to</a:t>
+            </a:r>
+            <a:endParaRPr lang="en-US" sz="850" dirty="0"/>
+          </a:p>
+        </p:txBody>
+      </p:sp>
+      <p:sp>
+        <p:nvSpPr>
+          <p:cNvPr id="25" name="Shape 23"/>
           <p:cNvSpPr/>
           <p:nvPr/>
         </p:nvSpPr>
@@ -33718,7 +34411,7 @@
       </p:sp>
       <p:sp>
         <p:nvSpPr>
-          <p:cNvPr id="23" name="Text 21"/>
+          <p:cNvPr id="26" name="Text 24"/>
           <p:cNvSpPr/>
           <p:nvPr/>
         </p:nvSpPr>
@@ -33757,7 +34450,7 @@
       </p:sp>
       <p:sp>
         <p:nvSpPr>
-          <p:cNvPr id="24" name="Shape 22"/>
+          <p:cNvPr id="27" name="Shape 25"/>
           <p:cNvSpPr/>
           <p:nvPr/>
         </p:nvSpPr>
@@ -33784,14 +34477,14 @@
       </p:sp>
       <p:sp>
         <p:nvSpPr>
-          <p:cNvPr id="25" name="Shape 23"/>
-          <p:cNvSpPr/>
-          <p:nvPr/>
-        </p:nvSpPr>
-        <p:spPr>
-          <a:xfrm>
-            <a:off x="2313432" y="3364992"/>
-            <a:ext cx="1645920" cy="475488"/>
+          <p:cNvPr id="28" name="Shape 26"/>
+          <p:cNvSpPr/>
+          <p:nvPr/>
+        </p:nvSpPr>
+        <p:spPr>
+          <a:xfrm>
+            <a:off x="1975104" y="3364992"/>
+            <a:ext cx="1554480" cy="475488"/>
           </a:xfrm>
           <a:prstGeom prst="rect">
             <a:avLst>
@@ -33811,14 +34504,14 @@
       </p:sp>
       <p:sp>
         <p:nvSpPr>
-          <p:cNvPr id="26" name="Text 24"/>
-          <p:cNvSpPr/>
-          <p:nvPr/>
-        </p:nvSpPr>
-        <p:spPr>
-          <a:xfrm>
-            <a:off x="2313432" y="3364992"/>
-            <a:ext cx="1645920" cy="475488"/>
+          <p:cNvPr id="29" name="Text 27"/>
+          <p:cNvSpPr/>
+          <p:nvPr/>
+        </p:nvSpPr>
+        <p:spPr>
+          <a:xfrm>
+            <a:off x="1975104" y="3364992"/>
+            <a:ext cx="1554480" cy="475488"/>
           </a:xfrm>
           <a:prstGeom prst="rect">
             <a:avLst/>
@@ -33842,7 +34535,7 @@
                 <a:ea typeface="Trebuchet MS" pitchFamily="34" charset="-122"/>
                 <a:cs typeface="Trebuchet MS" pitchFamily="34" charset="-120"/>
               </a:rPr>
-              <a:t>nar</a:t>
+              <a:t>in</a:t>
             </a:r>
             <a:endParaRPr lang="en-US" sz="1400" dirty="0"/>
           </a:p>
@@ -33850,14 +34543,14 @@
       </p:sp>
       <p:sp>
         <p:nvSpPr>
-          <p:cNvPr id="27" name="Text 25"/>
-          <p:cNvSpPr/>
-          <p:nvPr/>
-        </p:nvSpPr>
-        <p:spPr>
-          <a:xfrm>
-            <a:off x="3959352" y="3364992"/>
-            <a:ext cx="411480" cy="475488"/>
+          <p:cNvPr id="30" name="Text 28"/>
+          <p:cNvSpPr/>
+          <p:nvPr/>
+        </p:nvSpPr>
+        <p:spPr>
+          <a:xfrm>
+            <a:off x="3529584" y="3364992"/>
+            <a:ext cx="73152" cy="475488"/>
           </a:xfrm>
           <a:prstGeom prst="rect">
             <a:avLst/>
@@ -33889,14 +34582,14 @@
       </p:sp>
       <p:sp>
         <p:nvSpPr>
-          <p:cNvPr id="28" name="Shape 26"/>
-          <p:cNvSpPr/>
-          <p:nvPr/>
-        </p:nvSpPr>
-        <p:spPr>
-          <a:xfrm>
-            <a:off x="4370832" y="3364992"/>
-            <a:ext cx="1645920" cy="475488"/>
+          <p:cNvPr id="31" name="Shape 29"/>
+          <p:cNvSpPr/>
+          <p:nvPr/>
+        </p:nvSpPr>
+        <p:spPr>
+          <a:xfrm>
+            <a:off x="3602736" y="3364992"/>
+            <a:ext cx="1554480" cy="475488"/>
           </a:xfrm>
           <a:prstGeom prst="rect">
             <a:avLst>
@@ -33916,14 +34609,14 @@
       </p:sp>
       <p:sp>
         <p:nvSpPr>
-          <p:cNvPr id="29" name="Text 27"/>
-          <p:cNvSpPr/>
-          <p:nvPr/>
-        </p:nvSpPr>
-        <p:spPr>
-          <a:xfrm>
-            <a:off x="4370832" y="3364992"/>
-            <a:ext cx="1645920" cy="475488"/>
+          <p:cNvPr id="32" name="Text 30"/>
+          <p:cNvSpPr/>
+          <p:nvPr/>
+        </p:nvSpPr>
+        <p:spPr>
+          <a:xfrm>
+            <a:off x="3602736" y="3364992"/>
+            <a:ext cx="1554480" cy="475488"/>
           </a:xfrm>
           <a:prstGeom prst="rect">
             <a:avLst/>
@@ -33947,7 +34640,7 @@
                 <a:ea typeface="Trebuchet MS" pitchFamily="34" charset="-122"/>
                 <a:cs typeface="Trebuchet MS" pitchFamily="34" charset="-120"/>
               </a:rPr>
-              <a:t>ra</a:t>
+              <a:t>form</a:t>
             </a:r>
             <a:endParaRPr lang="en-US" sz="1400" dirty="0"/>
           </a:p>
@@ -33955,14 +34648,14 @@
       </p:sp>
       <p:sp>
         <p:nvSpPr>
-          <p:cNvPr id="30" name="Text 28"/>
-          <p:cNvSpPr/>
-          <p:nvPr/>
-        </p:nvSpPr>
-        <p:spPr>
-          <a:xfrm>
-            <a:off x="6016752" y="3364992"/>
-            <a:ext cx="411480" cy="475488"/>
+          <p:cNvPr id="33" name="Text 31"/>
+          <p:cNvSpPr/>
+          <p:nvPr/>
+        </p:nvSpPr>
+        <p:spPr>
+          <a:xfrm>
+            <a:off x="5157216" y="3364992"/>
+            <a:ext cx="73152" cy="475488"/>
           </a:xfrm>
           <a:prstGeom prst="rect">
             <a:avLst/>
@@ -33994,14 +34687,14 @@
       </p:sp>
       <p:sp>
         <p:nvSpPr>
-          <p:cNvPr id="31" name="Shape 29"/>
-          <p:cNvSpPr/>
-          <p:nvPr/>
-        </p:nvSpPr>
-        <p:spPr>
-          <a:xfrm>
-            <a:off x="6428232" y="3364992"/>
-            <a:ext cx="1645920" cy="475488"/>
+          <p:cNvPr id="34" name="Shape 32"/>
+          <p:cNvSpPr/>
+          <p:nvPr/>
+        </p:nvSpPr>
+        <p:spPr>
+          <a:xfrm>
+            <a:off x="5230368" y="3364992"/>
+            <a:ext cx="1554480" cy="475488"/>
           </a:xfrm>
           <a:prstGeom prst="rect">
             <a:avLst>
@@ -34021,14 +34714,14 @@
       </p:sp>
       <p:sp>
         <p:nvSpPr>
-          <p:cNvPr id="32" name="Text 30"/>
-          <p:cNvSpPr/>
-          <p:nvPr/>
-        </p:nvSpPr>
-        <p:spPr>
-          <a:xfrm>
-            <a:off x="6428232" y="3364992"/>
-            <a:ext cx="1645920" cy="475488"/>
+          <p:cNvPr id="35" name="Text 33"/>
+          <p:cNvSpPr/>
+          <p:nvPr/>
+        </p:nvSpPr>
+        <p:spPr>
+          <a:xfrm>
+            <a:off x="5230368" y="3364992"/>
+            <a:ext cx="1554480" cy="475488"/>
           </a:xfrm>
           <a:prstGeom prst="rect">
             <a:avLst/>
@@ -34052,6 +34745,111 @@
                 <a:ea typeface="Trebuchet MS" pitchFamily="34" charset="-122"/>
                 <a:cs typeface="Trebuchet MS" pitchFamily="34" charset="-120"/>
               </a:rPr>
+              <a:t>a</a:t>
+            </a:r>
+            <a:endParaRPr lang="en-US" sz="1400" dirty="0"/>
+          </a:p>
+        </p:txBody>
+      </p:sp>
+      <p:sp>
+        <p:nvSpPr>
+          <p:cNvPr id="36" name="Text 34"/>
+          <p:cNvSpPr/>
+          <p:nvPr/>
+        </p:nvSpPr>
+        <p:spPr>
+          <a:xfrm>
+            <a:off x="6784848" y="3364992"/>
+            <a:ext cx="73152" cy="475488"/>
+          </a:xfrm>
+          <a:prstGeom prst="rect">
+            <a:avLst/>
+          </a:prstGeom>
+          <a:noFill/>
+          <a:ln/>
+        </p:spPr>
+        <p:txBody>
+          <a:bodyPr wrap="square" lIns="0" tIns="0" rIns="0" bIns="0" rtlCol="0" anchor="ctr"/>
+          <a:lstStyle/>
+          <a:p>
+            <a:pPr algn="ctr" indent="0" marL="0">
+              <a:buNone/>
+            </a:pPr>
+            <a:r>
+              <a:rPr lang="en-US" sz="1600" b="1" dirty="0">
+                <a:solidFill>
+                  <a:srgbClr val="0D9488"/>
+                </a:solidFill>
+                <a:latin typeface="Trebuchet MS" pitchFamily="34" charset="0"/>
+                <a:ea typeface="Trebuchet MS" pitchFamily="34" charset="-122"/>
+                <a:cs typeface="Trebuchet MS" pitchFamily="34" charset="-120"/>
+              </a:rPr>
+              <a:t>·</a:t>
+            </a:r>
+            <a:endParaRPr lang="en-US" sz="1600" dirty="0"/>
+          </a:p>
+        </p:txBody>
+      </p:sp>
+      <p:sp>
+        <p:nvSpPr>
+          <p:cNvPr id="37" name="Shape 35"/>
+          <p:cNvSpPr/>
+          <p:nvPr/>
+        </p:nvSpPr>
+        <p:spPr>
+          <a:xfrm>
+            <a:off x="6858000" y="3364992"/>
+            <a:ext cx="1554480" cy="475488"/>
+          </a:xfrm>
+          <a:prstGeom prst="rect">
+            <a:avLst>
+              <a:gd name="adj" fmla="val 9615"/>
+            </a:avLst>
+          </a:prstGeom>
+          <a:solidFill>
+            <a:srgbClr val="FFFFFF"/>
+          </a:solidFill>
+          <a:ln w="12700">
+            <a:solidFill>
+              <a:srgbClr val="0D9488"/>
+            </a:solidFill>
+            <a:prstDash val="solid"/>
+          </a:ln>
+        </p:spPr>
+      </p:sp>
+      <p:sp>
+        <p:nvSpPr>
+          <p:cNvPr id="38" name="Text 36"/>
+          <p:cNvSpPr/>
+          <p:nvPr/>
+        </p:nvSpPr>
+        <p:spPr>
+          <a:xfrm>
+            <a:off x="6858000" y="3364992"/>
+            <a:ext cx="1554480" cy="475488"/>
+          </a:xfrm>
+          <a:prstGeom prst="rect">
+            <a:avLst/>
+          </a:prstGeom>
+          <a:noFill/>
+          <a:ln/>
+        </p:spPr>
+        <p:txBody>
+          <a:bodyPr wrap="square" lIns="0" tIns="0" rIns="0" bIns="0" rtlCol="0" anchor="ctr"/>
+          <a:lstStyle/>
+          <a:p>
+            <a:pPr algn="ctr" indent="0" marL="0">
+              <a:buNone/>
+            </a:pPr>
+            <a:r>
+              <a:rPr lang="en-US" sz="1400" b="1" dirty="0">
+                <a:solidFill>
+                  <a:srgbClr val="0D9488"/>
+                </a:solidFill>
+                <a:latin typeface="Trebuchet MS" pitchFamily="34" charset="0"/>
+                <a:ea typeface="Trebuchet MS" pitchFamily="34" charset="-122"/>
+                <a:cs typeface="Trebuchet MS" pitchFamily="34" charset="-120"/>
+              </a:rPr>
               <a:t>tive</a:t>
             </a:r>
             <a:endParaRPr lang="en-US" sz="1400" dirty="0"/>
@@ -34060,7 +34858,7 @@
       </p:sp>
       <p:sp>
         <p:nvSpPr>
-          <p:cNvPr id="33" name="Shape 31"/>
+          <p:cNvPr id="39" name="Shape 37"/>
           <p:cNvSpPr/>
           <p:nvPr/>
         </p:nvSpPr>
@@ -34087,7 +34885,7 @@
       </p:sp>
       <p:sp>
         <p:nvSpPr>
-          <p:cNvPr id="34" name="Text 32"/>
+          <p:cNvPr id="40" name="Text 38"/>
           <p:cNvSpPr/>
           <p:nvPr/>
         </p:nvSpPr>
@@ -34126,7 +34924,7 @@
       </p:sp>
       <p:sp>
         <p:nvSpPr>
-          <p:cNvPr id="35" name="Shape 33"/>
+          <p:cNvPr id="41" name="Shape 39"/>
           <p:cNvSpPr/>
           <p:nvPr/>
         </p:nvSpPr>
@@ -34153,14 +34951,14 @@
       </p:sp>
       <p:sp>
         <p:nvSpPr>
-          <p:cNvPr id="36" name="Shape 34"/>
-          <p:cNvSpPr/>
-          <p:nvPr/>
-        </p:nvSpPr>
-        <p:spPr>
-          <a:xfrm>
-            <a:off x="2124837" y="4169664"/>
-            <a:ext cx="685800" cy="384048"/>
+          <p:cNvPr id="42" name="Shape 40"/>
+          <p:cNvSpPr/>
+          <p:nvPr/>
+        </p:nvSpPr>
+        <p:spPr>
+          <a:xfrm>
+            <a:off x="1951828" y="4169664"/>
+            <a:ext cx="603504" cy="384048"/>
           </a:xfrm>
           <a:prstGeom prst="rect">
             <a:avLst>
@@ -34180,14 +34978,14 @@
       </p:sp>
       <p:sp>
         <p:nvSpPr>
-          <p:cNvPr id="37" name="Text 35"/>
-          <p:cNvSpPr/>
-          <p:nvPr/>
-        </p:nvSpPr>
-        <p:spPr>
-          <a:xfrm>
-            <a:off x="2124837" y="4169664"/>
-            <a:ext cx="685800" cy="384048"/>
+          <p:cNvPr id="43" name="Text 41"/>
+          <p:cNvSpPr/>
+          <p:nvPr/>
+        </p:nvSpPr>
+        <p:spPr>
+          <a:xfrm>
+            <a:off x="1951828" y="4169664"/>
+            <a:ext cx="603504" cy="384048"/>
           </a:xfrm>
           <a:prstGeom prst="rect">
             <a:avLst/>
@@ -34211,7 +35009,7 @@
                 <a:ea typeface="Trebuchet MS" pitchFamily="34" charset="-122"/>
                 <a:cs typeface="Trebuchet MS" pitchFamily="34" charset="-120"/>
               </a:rPr>
-              <a:t>n</a:t>
+              <a:t>i</a:t>
             </a:r>
             <a:endParaRPr lang="en-US" sz="900" dirty="0"/>
           </a:p>
@@ -34219,14 +35017,14 @@
       </p:sp>
       <p:sp>
         <p:nvSpPr>
-          <p:cNvPr id="38" name="Shape 36"/>
-          <p:cNvSpPr/>
-          <p:nvPr/>
-        </p:nvSpPr>
-        <p:spPr>
-          <a:xfrm>
-            <a:off x="3033522" y="4169664"/>
-            <a:ext cx="685800" cy="384048"/>
+          <p:cNvPr id="44" name="Shape 42"/>
+          <p:cNvSpPr/>
+          <p:nvPr/>
+        </p:nvSpPr>
+        <p:spPr>
+          <a:xfrm>
+            <a:off x="2605209" y="4169664"/>
+            <a:ext cx="603504" cy="384048"/>
           </a:xfrm>
           <a:prstGeom prst="rect">
             <a:avLst>
@@ -34246,14 +35044,14 @@
       </p:sp>
       <p:sp>
         <p:nvSpPr>
-          <p:cNvPr id="39" name="Text 37"/>
-          <p:cNvSpPr/>
-          <p:nvPr/>
-        </p:nvSpPr>
-        <p:spPr>
-          <a:xfrm>
-            <a:off x="3033522" y="4169664"/>
-            <a:ext cx="685800" cy="384048"/>
+          <p:cNvPr id="45" name="Text 43"/>
+          <p:cNvSpPr/>
+          <p:nvPr/>
+        </p:nvSpPr>
+        <p:spPr>
+          <a:xfrm>
+            <a:off x="2605209" y="4169664"/>
+            <a:ext cx="603504" cy="384048"/>
           </a:xfrm>
           <a:prstGeom prst="rect">
             <a:avLst/>
@@ -34277,7 +35075,7 @@
                 <a:ea typeface="Trebuchet MS" pitchFamily="34" charset="-122"/>
                 <a:cs typeface="Trebuchet MS" pitchFamily="34" charset="-120"/>
               </a:rPr>
-              <a:t>a</a:t>
+              <a:t>n</a:t>
             </a:r>
             <a:endParaRPr lang="en-US" sz="900" dirty="0"/>
           </a:p>
@@ -34285,14 +35083,14 @@
       </p:sp>
       <p:sp>
         <p:nvSpPr>
-          <p:cNvPr id="40" name="Shape 38"/>
-          <p:cNvSpPr/>
-          <p:nvPr/>
-        </p:nvSpPr>
-        <p:spPr>
-          <a:xfrm>
-            <a:off x="3942207" y="4169664"/>
-            <a:ext cx="685800" cy="384048"/>
+          <p:cNvPr id="46" name="Shape 44"/>
+          <p:cNvSpPr/>
+          <p:nvPr/>
+        </p:nvSpPr>
+        <p:spPr>
+          <a:xfrm>
+            <a:off x="3258589" y="4169664"/>
+            <a:ext cx="603504" cy="384048"/>
           </a:xfrm>
           <a:prstGeom prst="rect">
             <a:avLst>
@@ -34312,14 +35110,14 @@
       </p:sp>
       <p:sp>
         <p:nvSpPr>
-          <p:cNvPr id="41" name="Text 39"/>
-          <p:cNvSpPr/>
-          <p:nvPr/>
-        </p:nvSpPr>
-        <p:spPr>
-          <a:xfrm>
-            <a:off x="3942207" y="4169664"/>
-            <a:ext cx="685800" cy="384048"/>
+          <p:cNvPr id="47" name="Text 45"/>
+          <p:cNvSpPr/>
+          <p:nvPr/>
+        </p:nvSpPr>
+        <p:spPr>
+          <a:xfrm>
+            <a:off x="3258589" y="4169664"/>
+            <a:ext cx="603504" cy="384048"/>
           </a:xfrm>
           <a:prstGeom prst="rect">
             <a:avLst/>
@@ -34343,7 +35141,7 @@
                 <a:ea typeface="Trebuchet MS" pitchFamily="34" charset="-122"/>
                 <a:cs typeface="Trebuchet MS" pitchFamily="34" charset="-120"/>
               </a:rPr>
-              <a:t>rr</a:t>
+              <a:t>f</a:t>
             </a:r>
             <a:endParaRPr lang="en-US" sz="900" dirty="0"/>
           </a:p>
@@ -34351,14 +35149,14 @@
       </p:sp>
       <p:sp>
         <p:nvSpPr>
-          <p:cNvPr id="42" name="Shape 40"/>
-          <p:cNvSpPr/>
-          <p:nvPr/>
-        </p:nvSpPr>
-        <p:spPr>
-          <a:xfrm>
-            <a:off x="4850892" y="4169664"/>
-            <a:ext cx="685800" cy="384048"/>
+          <p:cNvPr id="48" name="Shape 46"/>
+          <p:cNvSpPr/>
+          <p:nvPr/>
+        </p:nvSpPr>
+        <p:spPr>
+          <a:xfrm>
+            <a:off x="3911969" y="4169664"/>
+            <a:ext cx="603504" cy="384048"/>
           </a:xfrm>
           <a:prstGeom prst="rect">
             <a:avLst>
@@ -34378,14 +35176,14 @@
       </p:sp>
       <p:sp>
         <p:nvSpPr>
-          <p:cNvPr id="43" name="Text 41"/>
-          <p:cNvSpPr/>
-          <p:nvPr/>
-        </p:nvSpPr>
-        <p:spPr>
-          <a:xfrm>
-            <a:off x="4850892" y="4169664"/>
-            <a:ext cx="685800" cy="384048"/>
+          <p:cNvPr id="49" name="Text 47"/>
+          <p:cNvSpPr/>
+          <p:nvPr/>
+        </p:nvSpPr>
+        <p:spPr>
+          <a:xfrm>
+            <a:off x="3911969" y="4169664"/>
+            <a:ext cx="603504" cy="384048"/>
           </a:xfrm>
           <a:prstGeom prst="rect">
             <a:avLst/>
@@ -34409,7 +35207,7 @@
                 <a:ea typeface="Trebuchet MS" pitchFamily="34" charset="-122"/>
                 <a:cs typeface="Trebuchet MS" pitchFamily="34" charset="-120"/>
               </a:rPr>
-              <a:t>a</a:t>
+              <a:t>or</a:t>
             </a:r>
             <a:endParaRPr lang="en-US" sz="900" dirty="0"/>
           </a:p>
@@ -34417,14 +35215,14 @@
       </p:sp>
       <p:sp>
         <p:nvSpPr>
-          <p:cNvPr id="44" name="Shape 42"/>
-          <p:cNvSpPr/>
-          <p:nvPr/>
-        </p:nvSpPr>
-        <p:spPr>
-          <a:xfrm>
-            <a:off x="5759577" y="4169664"/>
-            <a:ext cx="685800" cy="384048"/>
+          <p:cNvPr id="50" name="Shape 48"/>
+          <p:cNvSpPr/>
+          <p:nvPr/>
+        </p:nvSpPr>
+        <p:spPr>
+          <a:xfrm>
+            <a:off x="4565350" y="4169664"/>
+            <a:ext cx="603504" cy="384048"/>
           </a:xfrm>
           <a:prstGeom prst="rect">
             <a:avLst>
@@ -34444,14 +35242,14 @@
       </p:sp>
       <p:sp>
         <p:nvSpPr>
-          <p:cNvPr id="45" name="Text 43"/>
-          <p:cNvSpPr/>
-          <p:nvPr/>
-        </p:nvSpPr>
-        <p:spPr>
-          <a:xfrm>
-            <a:off x="5759577" y="4169664"/>
-            <a:ext cx="685800" cy="384048"/>
+          <p:cNvPr id="51" name="Text 49"/>
+          <p:cNvSpPr/>
+          <p:nvPr/>
+        </p:nvSpPr>
+        <p:spPr>
+          <a:xfrm>
+            <a:off x="4565350" y="4169664"/>
+            <a:ext cx="603504" cy="384048"/>
           </a:xfrm>
           <a:prstGeom prst="rect">
             <a:avLst/>
@@ -34475,7 +35273,7 @@
                 <a:ea typeface="Trebuchet MS" pitchFamily="34" charset="-122"/>
                 <a:cs typeface="Trebuchet MS" pitchFamily="34" charset="-120"/>
               </a:rPr>
-              <a:t>t</a:t>
+              <a:t>m</a:t>
             </a:r>
             <a:endParaRPr lang="en-US" sz="900" dirty="0"/>
           </a:p>
@@ -34483,14 +35281,14 @@
       </p:sp>
       <p:sp>
         <p:nvSpPr>
-          <p:cNvPr id="46" name="Shape 44"/>
-          <p:cNvSpPr/>
-          <p:nvPr/>
-        </p:nvSpPr>
-        <p:spPr>
-          <a:xfrm>
-            <a:off x="6668262" y="4169664"/>
-            <a:ext cx="685800" cy="384048"/>
+          <p:cNvPr id="52" name="Shape 50"/>
+          <p:cNvSpPr/>
+          <p:nvPr/>
+        </p:nvSpPr>
+        <p:spPr>
+          <a:xfrm>
+            <a:off x="5218730" y="4169664"/>
+            <a:ext cx="603504" cy="384048"/>
           </a:xfrm>
           <a:prstGeom prst="rect">
             <a:avLst>
@@ -34510,14 +35308,14 @@
       </p:sp>
       <p:sp>
         <p:nvSpPr>
-          <p:cNvPr id="47" name="Text 45"/>
-          <p:cNvSpPr/>
-          <p:nvPr/>
-        </p:nvSpPr>
-        <p:spPr>
-          <a:xfrm>
-            <a:off x="6668262" y="4169664"/>
-            <a:ext cx="685800" cy="384048"/>
+          <p:cNvPr id="53" name="Text 51"/>
+          <p:cNvSpPr/>
+          <p:nvPr/>
+        </p:nvSpPr>
+        <p:spPr>
+          <a:xfrm>
+            <a:off x="5218730" y="4169664"/>
+            <a:ext cx="603504" cy="384048"/>
           </a:xfrm>
           <a:prstGeom prst="rect">
             <a:avLst/>
@@ -34541,7 +35339,7 @@
                 <a:ea typeface="Trebuchet MS" pitchFamily="34" charset="-122"/>
                 <a:cs typeface="Trebuchet MS" pitchFamily="34" charset="-120"/>
               </a:rPr>
-              <a:t>i</a:t>
+              <a:t>a</a:t>
             </a:r>
             <a:endParaRPr lang="en-US" sz="900" dirty="0"/>
           </a:p>
@@ -34549,14 +35347,14 @@
       </p:sp>
       <p:sp>
         <p:nvSpPr>
-          <p:cNvPr id="48" name="Shape 46"/>
-          <p:cNvSpPr/>
-          <p:nvPr/>
-        </p:nvSpPr>
-        <p:spPr>
-          <a:xfrm>
-            <a:off x="7576947" y="4169664"/>
-            <a:ext cx="685800" cy="384048"/>
+          <p:cNvPr id="54" name="Shape 52"/>
+          <p:cNvSpPr/>
+          <p:nvPr/>
+        </p:nvSpPr>
+        <p:spPr>
+          <a:xfrm>
+            <a:off x="5872111" y="4169664"/>
+            <a:ext cx="603504" cy="384048"/>
           </a:xfrm>
           <a:prstGeom prst="rect">
             <a:avLst>
@@ -34576,14 +35374,14 @@
       </p:sp>
       <p:sp>
         <p:nvSpPr>
-          <p:cNvPr id="49" name="Text 47"/>
-          <p:cNvSpPr/>
-          <p:nvPr/>
-        </p:nvSpPr>
-        <p:spPr>
-          <a:xfrm>
-            <a:off x="7576947" y="4169664"/>
-            <a:ext cx="685800" cy="384048"/>
+          <p:cNvPr id="55" name="Text 53"/>
+          <p:cNvSpPr/>
+          <p:nvPr/>
+        </p:nvSpPr>
+        <p:spPr>
+          <a:xfrm>
+            <a:off x="5872111" y="4169664"/>
+            <a:ext cx="603504" cy="384048"/>
           </a:xfrm>
           <a:prstGeom prst="rect">
             <a:avLst/>
@@ -34607,7 +35405,7 @@
                 <a:ea typeface="Trebuchet MS" pitchFamily="34" charset="-122"/>
                 <a:cs typeface="Trebuchet MS" pitchFamily="34" charset="-120"/>
               </a:rPr>
-              <a:t>ve</a:t>
+              <a:t>t</a:t>
             </a:r>
             <a:endParaRPr lang="en-US" sz="900" dirty="0"/>
           </a:p>
@@ -34615,14 +35413,212 @@
       </p:sp>
       <p:sp>
         <p:nvSpPr>
-          <p:cNvPr id="50" name="Text 48"/>
-          <p:cNvSpPr/>
-          <p:nvPr/>
-        </p:nvSpPr>
-        <p:spPr>
-          <a:xfrm>
-            <a:off x="7576947" y="4572000"/>
-            <a:ext cx="685800" cy="219456"/>
+          <p:cNvPr id="56" name="Shape 54"/>
+          <p:cNvSpPr/>
+          <p:nvPr/>
+        </p:nvSpPr>
+        <p:spPr>
+          <a:xfrm>
+            <a:off x="6525491" y="4169664"/>
+            <a:ext cx="603504" cy="384048"/>
+          </a:xfrm>
+          <a:prstGeom prst="rect">
+            <a:avLst>
+              <a:gd name="adj" fmla="val 9524"/>
+            </a:avLst>
+          </a:prstGeom>
+          <a:solidFill>
+            <a:srgbClr val="FFFFFF"/>
+          </a:solidFill>
+          <a:ln w="12700">
+            <a:solidFill>
+              <a:srgbClr val="DB2777"/>
+            </a:solidFill>
+            <a:prstDash val="solid"/>
+          </a:ln>
+        </p:spPr>
+      </p:sp>
+      <p:sp>
+        <p:nvSpPr>
+          <p:cNvPr id="57" name="Text 55"/>
+          <p:cNvSpPr/>
+          <p:nvPr/>
+        </p:nvSpPr>
+        <p:spPr>
+          <a:xfrm>
+            <a:off x="6525491" y="4169664"/>
+            <a:ext cx="603504" cy="384048"/>
+          </a:xfrm>
+          <a:prstGeom prst="rect">
+            <a:avLst/>
+          </a:prstGeom>
+          <a:noFill/>
+          <a:ln/>
+        </p:spPr>
+        <p:txBody>
+          <a:bodyPr wrap="square" lIns="0" tIns="0" rIns="0" bIns="0" rtlCol="0" anchor="ctr"/>
+          <a:lstStyle/>
+          <a:p>
+            <a:pPr algn="ctr" indent="0" marL="0">
+              <a:buNone/>
+            </a:pPr>
+            <a:r>
+              <a:rPr lang="en-US" sz="900" b="1" dirty="0">
+                <a:solidFill>
+                  <a:srgbClr val="9D174D"/>
+                </a:solidFill>
+                <a:latin typeface="Trebuchet MS" pitchFamily="34" charset="0"/>
+                <a:ea typeface="Trebuchet MS" pitchFamily="34" charset="-122"/>
+                <a:cs typeface="Trebuchet MS" pitchFamily="34" charset="-120"/>
+              </a:rPr>
+              <a:t>i</a:t>
+            </a:r>
+            <a:endParaRPr lang="en-US" sz="900" dirty="0"/>
+          </a:p>
+        </p:txBody>
+      </p:sp>
+      <p:sp>
+        <p:nvSpPr>
+          <p:cNvPr id="58" name="Shape 56"/>
+          <p:cNvSpPr/>
+          <p:nvPr/>
+        </p:nvSpPr>
+        <p:spPr>
+          <a:xfrm>
+            <a:off x="7178871" y="4169664"/>
+            <a:ext cx="603504" cy="384048"/>
+          </a:xfrm>
+          <a:prstGeom prst="rect">
+            <a:avLst>
+              <a:gd name="adj" fmla="val 9524"/>
+            </a:avLst>
+          </a:prstGeom>
+          <a:solidFill>
+            <a:srgbClr val="FFFFFF"/>
+          </a:solidFill>
+          <a:ln w="12700">
+            <a:solidFill>
+              <a:srgbClr val="DB2777"/>
+            </a:solidFill>
+            <a:prstDash val="solid"/>
+          </a:ln>
+        </p:spPr>
+      </p:sp>
+      <p:sp>
+        <p:nvSpPr>
+          <p:cNvPr id="59" name="Text 57"/>
+          <p:cNvSpPr/>
+          <p:nvPr/>
+        </p:nvSpPr>
+        <p:spPr>
+          <a:xfrm>
+            <a:off x="7178871" y="4169664"/>
+            <a:ext cx="603504" cy="384048"/>
+          </a:xfrm>
+          <a:prstGeom prst="rect">
+            <a:avLst/>
+          </a:prstGeom>
+          <a:noFill/>
+          <a:ln/>
+        </p:spPr>
+        <p:txBody>
+          <a:bodyPr wrap="square" lIns="0" tIns="0" rIns="0" bIns="0" rtlCol="0" anchor="ctr"/>
+          <a:lstStyle/>
+          <a:p>
+            <a:pPr algn="ctr" indent="0" marL="0">
+              <a:buNone/>
+            </a:pPr>
+            <a:r>
+              <a:rPr lang="en-US" sz="900" b="1" dirty="0">
+                <a:solidFill>
+                  <a:srgbClr val="9D174D"/>
+                </a:solidFill>
+                <a:latin typeface="Trebuchet MS" pitchFamily="34" charset="0"/>
+                <a:ea typeface="Trebuchet MS" pitchFamily="34" charset="-122"/>
+                <a:cs typeface="Trebuchet MS" pitchFamily="34" charset="-120"/>
+              </a:rPr>
+              <a:t>v</a:t>
+            </a:r>
+            <a:endParaRPr lang="en-US" sz="900" dirty="0"/>
+          </a:p>
+        </p:txBody>
+      </p:sp>
+      <p:sp>
+        <p:nvSpPr>
+          <p:cNvPr id="60" name="Shape 58"/>
+          <p:cNvSpPr/>
+          <p:nvPr/>
+        </p:nvSpPr>
+        <p:spPr>
+          <a:xfrm>
+            <a:off x="7832252" y="4169664"/>
+            <a:ext cx="603504" cy="384048"/>
+          </a:xfrm>
+          <a:prstGeom prst="rect">
+            <a:avLst>
+              <a:gd name="adj" fmla="val 9524"/>
+            </a:avLst>
+          </a:prstGeom>
+          <a:solidFill>
+            <a:srgbClr val="FFFFFF"/>
+          </a:solidFill>
+          <a:ln w="12700">
+            <a:solidFill>
+              <a:srgbClr val="DB2777"/>
+            </a:solidFill>
+            <a:prstDash val="solid"/>
+          </a:ln>
+        </p:spPr>
+      </p:sp>
+      <p:sp>
+        <p:nvSpPr>
+          <p:cNvPr id="61" name="Text 59"/>
+          <p:cNvSpPr/>
+          <p:nvPr/>
+        </p:nvSpPr>
+        <p:spPr>
+          <a:xfrm>
+            <a:off x="7832252" y="4169664"/>
+            <a:ext cx="603504" cy="384048"/>
+          </a:xfrm>
+          <a:prstGeom prst="rect">
+            <a:avLst/>
+          </a:prstGeom>
+          <a:noFill/>
+          <a:ln/>
+        </p:spPr>
+        <p:txBody>
+          <a:bodyPr wrap="square" lIns="0" tIns="0" rIns="0" bIns="0" rtlCol="0" anchor="ctr"/>
+          <a:lstStyle/>
+          <a:p>
+            <a:pPr algn="ctr" indent="0" marL="0">
+              <a:buNone/>
+            </a:pPr>
+            <a:r>
+              <a:rPr lang="en-US" sz="900" b="1" dirty="0">
+                <a:solidFill>
+                  <a:srgbClr val="9D174D"/>
+                </a:solidFill>
+                <a:latin typeface="Trebuchet MS" pitchFamily="34" charset="0"/>
+                <a:ea typeface="Trebuchet MS" pitchFamily="34" charset="-122"/>
+                <a:cs typeface="Trebuchet MS" pitchFamily="34" charset="-120"/>
+              </a:rPr>
+              <a:t>e</a:t>
+            </a:r>
+            <a:endParaRPr lang="en-US" sz="900" dirty="0"/>
+          </a:p>
+        </p:txBody>
+      </p:sp>
+      <p:sp>
+        <p:nvSpPr>
+          <p:cNvPr id="62" name="Text 60"/>
+          <p:cNvSpPr/>
+          <p:nvPr/>
+        </p:nvSpPr>
+        <p:spPr>
+          <a:xfrm>
+            <a:off x="7832252" y="4572000"/>
+            <a:ext cx="603504" cy="219456"/>
           </a:xfrm>
           <a:prstGeom prst="rect">
             <a:avLst/>
@@ -34646,7 +35642,7 @@
                 <a:ea typeface="Calibri" pitchFamily="34" charset="-122"/>
                 <a:cs typeface="Calibri" pitchFamily="34" charset="-120"/>
               </a:rPr>
-              <a:t>/v/</a:t>
+              <a:t>silent</a:t>
             </a:r>
             <a:endParaRPr lang="en-US" sz="750" dirty="0"/>
           </a:p>
@@ -36600,7 +37596,7 @@
                 <a:ea typeface="Trebuchet MS" pitchFamily="34" charset="-122"/>
                 <a:cs typeface="Trebuchet MS" pitchFamily="34" charset="-120"/>
               </a:rPr>
-              <a:t>in-</a:t>
+              <a:t>im-</a:t>
             </a:r>
             <a:endParaRPr lang="en-US" sz="1300" dirty="0"/>
           </a:p>
@@ -36664,7 +37660,7 @@
                 <a:ea typeface="Trebuchet MS" pitchFamily="34" charset="-122"/>
                 <a:cs typeface="Trebuchet MS" pitchFamily="34" charset="-120"/>
               </a:rPr>
-              <a:t>talk</a:t>
+              <a:t>inform</a:t>
             </a:r>
             <a:endParaRPr lang="en-US" sz="1300" dirty="0"/>
           </a:p>
@@ -36753,7 +37749,7 @@
                 <a:ea typeface="Trebuchet MS" pitchFamily="34" charset="-122"/>
                 <a:cs typeface="Trebuchet MS" pitchFamily="34" charset="-120"/>
               </a:rPr>
-              <a:t>im-</a:t>
+              <a:t>col-</a:t>
             </a:r>
             <a:endParaRPr lang="en-US" sz="1300" dirty="0"/>
           </a:p>
@@ -36817,7 +37813,7 @@
                 <a:ea typeface="Trebuchet MS" pitchFamily="34" charset="-122"/>
                 <a:cs typeface="Trebuchet MS" pitchFamily="34" charset="-120"/>
               </a:rPr>
-              <a:t>imagin</a:t>
+              <a:t>talk</a:t>
             </a:r>
             <a:endParaRPr lang="en-US" sz="1300" dirty="0"/>
           </a:p>
@@ -36906,7 +37902,7 @@
                 <a:ea typeface="Trebuchet MS" pitchFamily="34" charset="-122"/>
                 <a:cs typeface="Trebuchet MS" pitchFamily="34" charset="-120"/>
               </a:rPr>
-              <a:t>col-</a:t>
+              <a:t>con-</a:t>
             </a:r>
             <a:endParaRPr lang="en-US" sz="1300" dirty="0"/>
           </a:p>
@@ -36970,7 +37966,7 @@
                 <a:ea typeface="Trebuchet MS" pitchFamily="34" charset="-122"/>
                 <a:cs typeface="Trebuchet MS" pitchFamily="34" charset="-120"/>
               </a:rPr>
-              <a:t>inform</a:t>
+              <a:t>imagin</a:t>
             </a:r>
             <a:endParaRPr lang="en-US" sz="1300" dirty="0"/>
           </a:p>
@@ -37059,7 +38055,7 @@
                 <a:ea typeface="Trebuchet MS" pitchFamily="34" charset="-122"/>
                 <a:cs typeface="Trebuchet MS" pitchFamily="34" charset="-120"/>
               </a:rPr>
-              <a:t>con-</a:t>
+              <a:t>gen-</a:t>
             </a:r>
             <a:endParaRPr lang="en-US" sz="1300" dirty="0"/>
           </a:p>
@@ -37123,7 +38119,7 @@
                 <a:ea typeface="Trebuchet MS" pitchFamily="34" charset="-122"/>
                 <a:cs typeface="Trebuchet MS" pitchFamily="34" charset="-120"/>
               </a:rPr>
-              <a:t>cooper</a:t>
+              <a:t>conserv</a:t>
             </a:r>
             <a:endParaRPr lang="en-US" sz="1300" dirty="0"/>
           </a:p>
@@ -37319,7 +38315,7 @@
                 <a:ea typeface="Trebuchet MS" pitchFamily="34" charset="-122"/>
                 <a:cs typeface="Trebuchet MS" pitchFamily="34" charset="-120"/>
               </a:rPr>
-              <a:t>talkative</a:t>
+              <a:t>informative</a:t>
             </a:r>
             <a:endParaRPr lang="en-US" sz="1200" dirty="0"/>
           </a:p>
@@ -37385,7 +38381,7 @@
                 <a:ea typeface="Trebuchet MS" pitchFamily="34" charset="-122"/>
                 <a:cs typeface="Trebuchet MS" pitchFamily="34" charset="-120"/>
               </a:rPr>
-              <a:t>imaginative</a:t>
+              <a:t>talkative</a:t>
             </a:r>
             <a:endParaRPr lang="en-US" sz="1200" dirty="0"/>
           </a:p>
@@ -37451,7 +38447,7 @@
                 <a:ea typeface="Trebuchet MS" pitchFamily="34" charset="-122"/>
                 <a:cs typeface="Trebuchet MS" pitchFamily="34" charset="-120"/>
               </a:rPr>
-              <a:t>informative</a:t>
+              <a:t>imaginative</a:t>
             </a:r>
             <a:endParaRPr lang="en-US" sz="1200" dirty="0"/>
           </a:p>
@@ -37517,7 +38513,7 @@
                 <a:ea typeface="Trebuchet MS" pitchFamily="34" charset="-122"/>
                 <a:cs typeface="Trebuchet MS" pitchFamily="34" charset="-120"/>
               </a:rPr>
-              <a:t>cooperative</a:t>
+              <a:t>conservative</a:t>
             </a:r>
             <a:endParaRPr lang="en-US" sz="1200" dirty="0"/>
           </a:p>
@@ -37583,7 +38579,7 @@
                 <a:ea typeface="Trebuchet MS" pitchFamily="34" charset="-122"/>
                 <a:cs typeface="Trebuchet MS" pitchFamily="34" charset="-120"/>
               </a:rPr>
-              <a:t>negative</a:t>
+              <a:t>representative</a:t>
             </a:r>
             <a:endParaRPr lang="en-US" sz="1200" dirty="0"/>
           </a:p>
@@ -37649,7 +38645,7 @@
                 <a:ea typeface="Trebuchet MS" pitchFamily="34" charset="-122"/>
                 <a:cs typeface="Trebuchet MS" pitchFamily="34" charset="-120"/>
               </a:rPr>
-              <a:t>representative</a:t>
+              <a:t>cooperative</a:t>
             </a:r>
             <a:endParaRPr lang="en-US" sz="1200" dirty="0"/>
           </a:p>
@@ -38499,7 +39495,7 @@
                 <a:ea typeface="Calibri" pitchFamily="34" charset="-122"/>
                 <a:cs typeface="Calibri" pitchFamily="34" charset="-120"/>
               </a:rPr>
-              <a:t>A meaningful word part added to the beginning of a root to change its meaning. E.g. 'un-' in 'talkative' means 'not'.</a:t>
+              <a:t>A meaningful word part added to the beginning of a root to change its meaning. E.g. 'un-' in 'informative' means 'not'.</a:t>
             </a:r>
             <a:endParaRPr lang="en-US" sz="1350" dirty="0"/>
           </a:p>
@@ -38903,7 +39899,7 @@
                 <a:ea typeface="Calibri" pitchFamily="34" charset="-122"/>
                 <a:cs typeface="Calibri" pitchFamily="34" charset="-120"/>
               </a:rPr>
-              <a:t>1.  The suffix '-ative' can turn a verb or base word into an adjective.</a:t>
+              <a:t>1.  The word 'talkative' uses the suffix '-ative' to mean 'tending to talk'.</a:t>
             </a:r>
             <a:endParaRPr lang="en-US" sz="1300" dirty="0"/>
           </a:p>
@@ -39042,7 +40038,7 @@
                 <a:ea typeface="Calibri" pitchFamily="34" charset="-122"/>
                 <a:cs typeface="Calibri" pitchFamily="34" charset="-120"/>
               </a:rPr>
-              <a:t>2.  The suffix '-ative' comes from an Old English origin.</a:t>
+              <a:t>2.  The suffix '-ative' can turn a verb or base word into an adjective.</a:t>
             </a:r>
             <a:endParaRPr lang="en-US" sz="1300" dirty="0"/>
           </a:p>
@@ -39065,11 +40061,11 @@
             </a:avLst>
           </a:prstGeom>
           <a:solidFill>
-            <a:srgbClr val="FEE2E2"/>
-          </a:solidFill>
-          <a:ln w="12700">
-            <a:solidFill>
-              <a:srgbClr val="DC2626"/>
+            <a:srgbClr val="DCFCE7"/>
+          </a:solidFill>
+          <a:ln w="12700">
+            <a:solidFill>
+              <a:srgbClr val="16A34A"/>
             </a:solidFill>
             <a:prstDash val="solid"/>
           </a:ln>
@@ -39102,13 +40098,13 @@
             <a:r>
               <a:rPr lang="en-US" sz="1100" b="1" dirty="0">
                 <a:solidFill>
-                  <a:srgbClr val="DC2626"/>
+                  <a:srgbClr val="16A34A"/>
                 </a:solidFill>
                 <a:latin typeface="Trebuchet MS" pitchFamily="34" charset="0"/>
                 <a:ea typeface="Trebuchet MS" pitchFamily="34" charset="-122"/>
                 <a:cs typeface="Trebuchet MS" pitchFamily="34" charset="-120"/>
               </a:rPr>
-              <a:t>FALSE</a:t>
+              <a:t>TRUE</a:t>
             </a:r>
             <a:endParaRPr lang="en-US" sz="1100" dirty="0"/>
           </a:p>
@@ -39181,7 +40177,7 @@
                 <a:ea typeface="Calibri" pitchFamily="34" charset="-122"/>
                 <a:cs typeface="Calibri" pitchFamily="34" charset="-120"/>
               </a:rPr>
-              <a:t>3.  The word 'creative' ends in the suffix '-ative'.</a:t>
+              <a:t>3.  The suffix '-ative' comes from Latin.</a:t>
             </a:r>
             <a:endParaRPr lang="en-US" sz="1300" dirty="0"/>
           </a:p>
@@ -39320,7 +40316,7 @@
                 <a:ea typeface="Calibri" pitchFamily="34" charset="-122"/>
                 <a:cs typeface="Calibri" pitchFamily="34" charset="-120"/>
               </a:rPr>
-              <a:t>4.  Words ending in '-ative' often describe a tendency or quality.</a:t>
+              <a:t>4.  The suffix '-ative' always means 'without' or 'not'.</a:t>
             </a:r>
             <a:endParaRPr lang="en-US" sz="1300" dirty="0"/>
           </a:p>
@@ -39343,11 +40339,11 @@
             </a:avLst>
           </a:prstGeom>
           <a:solidFill>
-            <a:srgbClr val="DCFCE7"/>
-          </a:solidFill>
-          <a:ln w="12700">
-            <a:solidFill>
-              <a:srgbClr val="16A34A"/>
+            <a:srgbClr val="FEE2E2"/>
+          </a:solidFill>
+          <a:ln w="12700">
+            <a:solidFill>
+              <a:srgbClr val="DC2626"/>
             </a:solidFill>
             <a:prstDash val="solid"/>
           </a:ln>
@@ -39380,13 +40376,13 @@
             <a:r>
               <a:rPr lang="en-US" sz="1100" b="1" dirty="0">
                 <a:solidFill>
-                  <a:srgbClr val="16A34A"/>
+                  <a:srgbClr val="DC2626"/>
                 </a:solidFill>
                 <a:latin typeface="Trebuchet MS" pitchFamily="34" charset="0"/>
                 <a:ea typeface="Trebuchet MS" pitchFamily="34" charset="-122"/>
                 <a:cs typeface="Trebuchet MS" pitchFamily="34" charset="-120"/>
               </a:rPr>
-              <a:t>TRUE</a:t>
+              <a:t>FALSE</a:t>
             </a:r>
             <a:endParaRPr lang="en-US" sz="1100" dirty="0"/>
           </a:p>
@@ -39459,7 +40455,7 @@
                 <a:ea typeface="Calibri" pitchFamily="34" charset="-122"/>
                 <a:cs typeface="Calibri" pitchFamily="34" charset="-120"/>
               </a:rPr>
-              <a:t>5.  The suffix '-ative' always makes a word mean the opposite of its base.</a:t>
+              <a:t>5.  Words ending in '-ative' are always nouns.</a:t>
             </a:r>
             <a:endParaRPr lang="en-US" sz="1300" dirty="0"/>
           </a:p>
@@ -40164,7 +41160,7 @@
                 <a:ea typeface="Trebuchet MS" pitchFamily="34" charset="-122"/>
                 <a:cs typeface="Trebuchet MS" pitchFamily="34" charset="-120"/>
               </a:rPr>
-              <a:t>talkative</a:t>
+              <a:t>informative</a:t>
             </a:r>
             <a:endParaRPr lang="en-US" sz="1300" dirty="0"/>
           </a:p>
@@ -40230,7 +41226,7 @@
                 <a:ea typeface="Trebuchet MS" pitchFamily="34" charset="-122"/>
                 <a:cs typeface="Trebuchet MS" pitchFamily="34" charset="-120"/>
               </a:rPr>
-              <a:t>imaginative</a:t>
+              <a:t>talkative</a:t>
             </a:r>
             <a:endParaRPr lang="en-US" sz="1300" dirty="0"/>
           </a:p>
@@ -40296,7 +41292,7 @@
                 <a:ea typeface="Trebuchet MS" pitchFamily="34" charset="-122"/>
                 <a:cs typeface="Trebuchet MS" pitchFamily="34" charset="-120"/>
               </a:rPr>
-              <a:t>informative</a:t>
+              <a:t>imaginative</a:t>
             </a:r>
             <a:endParaRPr lang="en-US" sz="1300" dirty="0"/>
           </a:p>
@@ -40362,7 +41358,7 @@
                 <a:ea typeface="Trebuchet MS" pitchFamily="34" charset="-122"/>
                 <a:cs typeface="Trebuchet MS" pitchFamily="34" charset="-120"/>
               </a:rPr>
-              <a:t>cooperative</a:t>
+              <a:t>conservative</a:t>
             </a:r>
             <a:endParaRPr lang="en-US" sz="1300" dirty="0"/>
           </a:p>
@@ -40428,7 +41424,7 @@
                 <a:ea typeface="Trebuchet MS" pitchFamily="34" charset="-122"/>
                 <a:cs typeface="Trebuchet MS" pitchFamily="34" charset="-120"/>
               </a:rPr>
-              <a:t>negative</a:t>
+              <a:t>representative</a:t>
             </a:r>
             <a:endParaRPr lang="en-US" sz="1300" dirty="0"/>
           </a:p>
@@ -40494,7 +41490,7 @@
                 <a:ea typeface="Trebuchet MS" pitchFamily="34" charset="-122"/>
                 <a:cs typeface="Trebuchet MS" pitchFamily="34" charset="-120"/>
               </a:rPr>
-              <a:t>representative</a:t>
+              <a:t>cooperative</a:t>
             </a:r>
             <a:endParaRPr lang="en-US" sz="1300" dirty="0"/>
           </a:p>
@@ -41279,7 +42275,7 @@
                 <a:ea typeface="Trebuchet MS" pitchFamily="34" charset="-122"/>
                 <a:cs typeface="Trebuchet MS" pitchFamily="34" charset="-120"/>
               </a:rPr>
-              <a:t>in-</a:t>
+              <a:t>im-</a:t>
             </a:r>
             <a:endParaRPr lang="en-US" sz="1300" dirty="0"/>
           </a:p>
@@ -41343,7 +42339,7 @@
                 <a:ea typeface="Trebuchet MS" pitchFamily="34" charset="-122"/>
                 <a:cs typeface="Trebuchet MS" pitchFamily="34" charset="-120"/>
               </a:rPr>
-              <a:t>talk</a:t>
+              <a:t>inform</a:t>
             </a:r>
             <a:endParaRPr lang="en-US" sz="1300" dirty="0"/>
           </a:p>
@@ -41432,7 +42428,7 @@
                 <a:ea typeface="Trebuchet MS" pitchFamily="34" charset="-122"/>
                 <a:cs typeface="Trebuchet MS" pitchFamily="34" charset="-120"/>
               </a:rPr>
-              <a:t>im-</a:t>
+              <a:t>col-</a:t>
             </a:r>
             <a:endParaRPr lang="en-US" sz="1300" dirty="0"/>
           </a:p>
@@ -41496,7 +42492,7 @@
                 <a:ea typeface="Trebuchet MS" pitchFamily="34" charset="-122"/>
                 <a:cs typeface="Trebuchet MS" pitchFamily="34" charset="-120"/>
               </a:rPr>
-              <a:t>imagin</a:t>
+              <a:t>talk</a:t>
             </a:r>
             <a:endParaRPr lang="en-US" sz="1300" dirty="0"/>
           </a:p>
@@ -41585,7 +42581,7 @@
                 <a:ea typeface="Trebuchet MS" pitchFamily="34" charset="-122"/>
                 <a:cs typeface="Trebuchet MS" pitchFamily="34" charset="-120"/>
               </a:rPr>
-              <a:t>col-</a:t>
+              <a:t>con-</a:t>
             </a:r>
             <a:endParaRPr lang="en-US" sz="1300" dirty="0"/>
           </a:p>
@@ -41649,7 +42645,7 @@
                 <a:ea typeface="Trebuchet MS" pitchFamily="34" charset="-122"/>
                 <a:cs typeface="Trebuchet MS" pitchFamily="34" charset="-120"/>
               </a:rPr>
-              <a:t>inform</a:t>
+              <a:t>imagin</a:t>
             </a:r>
             <a:endParaRPr lang="en-US" sz="1300" dirty="0"/>
           </a:p>
@@ -41738,7 +42734,7 @@
                 <a:ea typeface="Trebuchet MS" pitchFamily="34" charset="-122"/>
                 <a:cs typeface="Trebuchet MS" pitchFamily="34" charset="-120"/>
               </a:rPr>
-              <a:t>con-</a:t>
+              <a:t>gen-</a:t>
             </a:r>
             <a:endParaRPr lang="en-US" sz="1300" dirty="0"/>
           </a:p>
@@ -41802,7 +42798,7 @@
                 <a:ea typeface="Trebuchet MS" pitchFamily="34" charset="-122"/>
                 <a:cs typeface="Trebuchet MS" pitchFamily="34" charset="-120"/>
               </a:rPr>
-              <a:t>cooper</a:t>
+              <a:t>conserv</a:t>
             </a:r>
             <a:endParaRPr lang="en-US" sz="1300" dirty="0"/>
           </a:p>
@@ -42738,7 +43734,7 @@
                 <a:ea typeface="Calibri" pitchFamily="34" charset="-122"/>
                 <a:cs typeface="Calibri" pitchFamily="34" charset="-120"/>
               </a:rPr>
-              <a:t>Willing to work together with others to get something done.</a:t>
+              <a:t>Preferring to keep things the way they are rather than change them.</a:t>
             </a:r>
             <a:endParaRPr lang="en-US" sz="1200" dirty="0"/>
           </a:p>
@@ -42811,7 +43807,7 @@
                 <a:ea typeface="Trebuchet MS" pitchFamily="34" charset="-122"/>
                 <a:cs typeface="Trebuchet MS" pitchFamily="34" charset="-120"/>
               </a:rPr>
-              <a:t>talkative</a:t>
+              <a:t>informative</a:t>
             </a:r>
             <a:endParaRPr lang="en-US" sz="1200" dirty="0"/>
           </a:p>
@@ -42877,7 +43873,7 @@
                 <a:ea typeface="Calibri" pitchFamily="34" charset="-122"/>
                 <a:cs typeface="Calibri" pitchFamily="34" charset="-120"/>
               </a:rPr>
-              <a:t>Giving useful facts or knowledge about something.</a:t>
+              <a:t>Having a strong ability to think up new ideas or stories.</a:t>
             </a:r>
             <a:endParaRPr lang="en-US" sz="1200" dirty="0"/>
           </a:p>
@@ -42950,7 +43946,7 @@
                 <a:ea typeface="Trebuchet MS" pitchFamily="34" charset="-122"/>
                 <a:cs typeface="Trebuchet MS" pitchFamily="34" charset="-120"/>
               </a:rPr>
-              <a:t>imaginative</a:t>
+              <a:t>talkative</a:t>
             </a:r>
             <a:endParaRPr lang="en-US" sz="1200" dirty="0"/>
           </a:p>
@@ -43016,7 +44012,7 @@
                 <a:ea typeface="Calibri" pitchFamily="34" charset="-122"/>
                 <a:cs typeface="Calibri" pitchFamily="34" charset="-120"/>
               </a:rPr>
-              <a:t>Showing a 'no' result, or having a harmful or unhappy effect.</a:t>
+              <a:t>A person chosen to speak or act on behalf of others.</a:t>
             </a:r>
             <a:endParaRPr lang="en-US" sz="1200" dirty="0"/>
           </a:p>
@@ -43089,7 +44085,7 @@
                 <a:ea typeface="Trebuchet MS" pitchFamily="34" charset="-122"/>
                 <a:cs typeface="Trebuchet MS" pitchFamily="34" charset="-120"/>
               </a:rPr>
-              <a:t>informative</a:t>
+              <a:t>imaginative</a:t>
             </a:r>
             <a:endParaRPr lang="en-US" sz="1200" dirty="0"/>
           </a:p>
@@ -43155,7 +44151,7 @@
                 <a:ea typeface="Calibri" pitchFamily="34" charset="-122"/>
                 <a:cs typeface="Calibri" pitchFamily="34" charset="-120"/>
               </a:rPr>
-              <a:t>Having a strong ability to think up new ideas or pictures in your mind.</a:t>
+              <a:t>Tending to talk a lot.</a:t>
             </a:r>
             <a:endParaRPr lang="en-US" sz="1200" dirty="0"/>
           </a:p>
@@ -43228,7 +44224,7 @@
                 <a:ea typeface="Trebuchet MS" pitchFamily="34" charset="-122"/>
                 <a:cs typeface="Trebuchet MS" pitchFamily="34" charset="-120"/>
               </a:rPr>
-              <a:t>cooperative</a:t>
+              <a:t>conservative</a:t>
             </a:r>
             <a:endParaRPr lang="en-US" sz="1200" dirty="0"/>
           </a:p>
@@ -43294,7 +44290,7 @@
                 <a:ea typeface="Calibri" pitchFamily="34" charset="-122"/>
                 <a:cs typeface="Calibri" pitchFamily="34" charset="-120"/>
               </a:rPr>
-              <a:t>A person who speaks or acts on behalf of a group of people.</a:t>
+              <a:t>Willing to work together with others.</a:t>
             </a:r>
             <a:endParaRPr lang="en-US" sz="1200" dirty="0"/>
           </a:p>
@@ -43367,7 +44363,7 @@
                 <a:ea typeface="Trebuchet MS" pitchFamily="34" charset="-122"/>
                 <a:cs typeface="Trebuchet MS" pitchFamily="34" charset="-120"/>
               </a:rPr>
-              <a:t>negative</a:t>
+              <a:t>representative</a:t>
             </a:r>
             <a:endParaRPr lang="en-US" sz="1200" dirty="0"/>
           </a:p>
@@ -43433,7 +44429,7 @@
                 <a:ea typeface="Calibri" pitchFamily="34" charset="-122"/>
                 <a:cs typeface="Calibri" pitchFamily="34" charset="-120"/>
               </a:rPr>
-              <a:t>Having the ability to make new and interesting things or ideas.</a:t>
+              <a:t>Good at making or imagining new things.</a:t>
             </a:r>
             <a:endParaRPr lang="en-US" sz="1200" dirty="0"/>
           </a:p>
@@ -43506,7 +44502,7 @@
                 <a:ea typeface="Trebuchet MS" pitchFamily="34" charset="-122"/>
                 <a:cs typeface="Trebuchet MS" pitchFamily="34" charset="-120"/>
               </a:rPr>
-              <a:t>representative</a:t>
+              <a:t>cooperative</a:t>
             </a:r>
             <a:endParaRPr lang="en-US" sz="1200" dirty="0"/>
           </a:p>
@@ -43572,7 +44568,7 @@
                 <a:ea typeface="Calibri" pitchFamily="34" charset="-122"/>
                 <a:cs typeface="Calibri" pitchFamily="34" charset="-120"/>
               </a:rPr>
-              <a:t>Someone who talks a lot.</a:t>
+              <a:t>Giving you lots of useful facts and knowledge.</a:t>
             </a:r>
             <a:endParaRPr lang="en-US" sz="1200" dirty="0"/>
           </a:p>
@@ -44231,7 +45227,7 @@
                 <a:ea typeface="Calibri" pitchFamily="34" charset="-122"/>
                 <a:cs typeface="Calibri" pitchFamily="34" charset="-120"/>
               </a:rPr>
-              <a:t>Our teacher gave us an informative talk about how volcanoes are formed.</a:t>
+              <a:t>Our tour guide was very informative and told us interesting facts about the museum.</a:t>
             </a:r>
             <a:endParaRPr lang="en-US" sz="1500" dirty="0"/>
           </a:p>
@@ -44395,7 +45391,7 @@
                 <a:ea typeface="Calibri" pitchFamily="34" charset="-122"/>
                 <a:cs typeface="Calibri" pitchFamily="34" charset="-120"/>
               </a:rPr>
-              <a:t>It is important to be cooperative when working in a group project.</a:t>
+              <a:t>My little brother is so talkative that he barely stops to take a breath!</a:t>
             </a:r>
             <a:endParaRPr lang="en-US" sz="1500" dirty="0"/>
           </a:p>
